--- a/Vidres_Portugal_Apresentacao_Estrategica.pptx
+++ b/Vidres_Portugal_Apresentacao_Estrategica.pptx
@@ -17,6 +17,8 @@
     <p:sldId id="265" r:id="rId16"/>
     <p:sldId id="266" r:id="rId17"/>
     <p:sldId id="267" r:id="rId18"/>
+    <p:sldId id="268" r:id="rId19"/>
+    <p:sldId id="269" r:id="rId20"/>
   </p:sldIdLst>
   <p:sldSz cx="12191695" cy="6858000" type="screen4x3"/>
   <p:notesSz cx="6858000" cy="9144000"/>
@@ -3485,7 +3487,7 @@
                 </a:solidFill>
                 <a:latin typeface="Calibri"/>
               </a:rPr>
-              <a:t>8. EXECUÇÃO</a:t>
+              <a:t>6. ENTRADA NAS CONTAS-CHAVE</a:t>
             </a:r>
           </a:p>
         </p:txBody>
@@ -3527,7 +3529,7 @@
                 </a:solidFill>
                 <a:latin typeface="Calibri"/>
               </a:rPr>
-              <a:t>Plano de execução a 24 meses</a:t>
+              <a:t>Jogo de contas nomeadas — não de volume</a:t>
             </a:r>
           </a:p>
         </p:txBody>
@@ -3541,7 +3543,177 @@
         <p:spPr>
           <a:xfrm>
             <a:off x="548640" y="1783080"/>
-            <a:ext cx="2697480" cy="1051560"/>
+            <a:ext cx="2468880" cy="594360"/>
+          </a:xfrm>
+          <a:prstGeom prst="rect">
+            <a:avLst/>
+          </a:prstGeom>
+          <a:solidFill>
+            <a:srgbClr val="E36A1E"/>
+          </a:solidFill>
+          <a:ln>
+            <a:noFill/>
+          </a:ln>
+          <a:effectLst/>
+        </p:spPr>
+        <p:style>
+          <a:lnRef idx="1">
+            <a:schemeClr val="accent1"/>
+          </a:lnRef>
+          <a:fillRef idx="3">
+            <a:schemeClr val="accent1"/>
+          </a:fillRef>
+          <a:effectRef idx="2">
+            <a:schemeClr val="accent1"/>
+          </a:effectRef>
+          <a:fontRef idx="minor">
+            <a:schemeClr val="lt1"/>
+          </a:fontRef>
+        </p:style>
+        <p:txBody>
+          <a:bodyPr rtlCol="0" anchor="ctr"/>
+          <a:lstStyle/>
+          <a:p>
+            <a:pPr algn="ctr"/>
+          </a:p>
+        </p:txBody>
+      </p:sp>
+      <p:sp>
+        <p:nvSpPr>
+          <p:cNvPr id="6" name="TextBox 5"/>
+          <p:cNvSpPr txBox="1"/>
+          <p:nvPr/>
+        </p:nvSpPr>
+        <p:spPr>
+          <a:xfrm>
+            <a:off x="548640" y="1783080"/>
+            <a:ext cx="2468880" cy="594360"/>
+          </a:xfrm>
+          <a:prstGeom prst="rect">
+            <a:avLst/>
+          </a:prstGeom>
+          <a:noFill/>
+        </p:spPr>
+        <p:txBody>
+          <a:bodyPr wrap="square" anchor="ctr">
+            <a:spAutoFit/>
+          </a:bodyPr>
+          <a:lstStyle/>
+          <a:p>
+            <a:pPr algn="ctr">
+              <a:lnSpc>
+                <a:spcPct val="100000"/>
+              </a:lnSpc>
+              <a:spcAft>
+                <a:spcPts val="600"/>
+              </a:spcAft>
+            </a:pPr>
+            <a:r>
+              <a:rPr sz="1300" b="1">
+                <a:solidFill>
+                  <a:srgbClr val="FFFFFF"/>
+                </a:solidFill>
+                <a:latin typeface="Calibri"/>
+              </a:rPr>
+              <a:t>NÍVEL 1 — Farol</a:t>
+            </a:r>
+          </a:p>
+        </p:txBody>
+      </p:sp>
+      <p:sp>
+        <p:nvSpPr>
+          <p:cNvPr id="7" name="TextBox 6"/>
+          <p:cNvSpPr txBox="1"/>
+          <p:nvPr/>
+        </p:nvSpPr>
+        <p:spPr>
+          <a:xfrm>
+            <a:off x="3200400" y="1783080"/>
+            <a:ext cx="3657600" cy="594360"/>
+          </a:xfrm>
+          <a:prstGeom prst="rect">
+            <a:avLst/>
+          </a:prstGeom>
+          <a:noFill/>
+        </p:spPr>
+        <p:txBody>
+          <a:bodyPr wrap="square" anchor="ctr">
+            <a:spAutoFit/>
+          </a:bodyPr>
+          <a:lstStyle/>
+          <a:p>
+            <a:pPr algn="l">
+              <a:lnSpc>
+                <a:spcPct val="100000"/>
+              </a:lnSpc>
+              <a:spcAft>
+                <a:spcPts val="600"/>
+              </a:spcAft>
+            </a:pPr>
+            <a:r>
+              <a:rPr sz="1300" b="1">
+                <a:solidFill>
+                  <a:srgbClr val="0E2A47"/>
+                </a:solidFill>
+                <a:latin typeface="Calibri"/>
+              </a:rPr>
+              <a:t>Vista Alegre · Costa Verde</a:t>
+            </a:r>
+          </a:p>
+        </p:txBody>
+      </p:sp>
+      <p:sp>
+        <p:nvSpPr>
+          <p:cNvPr id="8" name="TextBox 7"/>
+          <p:cNvSpPr txBox="1"/>
+          <p:nvPr/>
+        </p:nvSpPr>
+        <p:spPr>
+          <a:xfrm>
+            <a:off x="6949440" y="1783080"/>
+            <a:ext cx="4663440" cy="594360"/>
+          </a:xfrm>
+          <a:prstGeom prst="rect">
+            <a:avLst/>
+          </a:prstGeom>
+          <a:noFill/>
+        </p:spPr>
+        <p:txBody>
+          <a:bodyPr wrap="square" anchor="ctr">
+            <a:spAutoFit/>
+          </a:bodyPr>
+          <a:lstStyle/>
+          <a:p>
+            <a:pPr algn="l">
+              <a:lnSpc>
+                <a:spcPct val="100000"/>
+              </a:lnSpc>
+              <a:spcAft>
+                <a:spcPts val="600"/>
+              </a:spcAft>
+            </a:pPr>
+            <a:r>
+              <a:rPr sz="1250" b="0">
+                <a:solidFill>
+                  <a:srgbClr val="1A242B"/>
+                </a:solidFill>
+                <a:latin typeface="Calibri"/>
+              </a:rPr>
+              <a:t>Piloto Eco-Low-Fire numa linha</a:t>
+            </a:r>
+          </a:p>
+        </p:txBody>
+      </p:sp>
+      <p:sp>
+        <p:nvSpPr>
+          <p:cNvPr id="9" name="Rectangle 8"/>
+          <p:cNvSpPr/>
+          <p:nvPr/>
+        </p:nvSpPr>
+        <p:spPr>
+          <a:xfrm>
+            <a:off x="548640" y="2496312"/>
+            <a:ext cx="2468880" cy="594360"/>
           </a:xfrm>
           <a:prstGeom prst="rect">
             <a:avLst/>
@@ -3578,14 +3750,14 @@
       </p:sp>
       <p:sp>
         <p:nvSpPr>
-          <p:cNvPr id="6" name="TextBox 5"/>
-          <p:cNvSpPr txBox="1"/>
-          <p:nvPr/>
-        </p:nvSpPr>
-        <p:spPr>
-          <a:xfrm>
-            <a:off x="548640" y="1783080"/>
-            <a:ext cx="2697480" cy="1051560"/>
+          <p:cNvPr id="10" name="TextBox 9"/>
+          <p:cNvSpPr txBox="1"/>
+          <p:nvPr/>
+        </p:nvSpPr>
+        <p:spPr>
+          <a:xfrm>
+            <a:off x="548640" y="2496312"/>
+            <a:ext cx="2468880" cy="594360"/>
           </a:xfrm>
           <a:prstGeom prst="rect">
             <a:avLst/>
@@ -3603,69 +3775,285 @@
                 <a:spcPct val="100000"/>
               </a:lnSpc>
               <a:spcAft>
-                <a:spcPts val="100"/>
-              </a:spcAft>
-            </a:pPr>
-            <a:r>
-              <a:rPr sz="1400" b="1">
+                <a:spcPts val="600"/>
+              </a:spcAft>
+            </a:pPr>
+            <a:r>
+              <a:rPr sz="1300" b="1">
                 <a:solidFill>
                   <a:srgbClr val="FFFFFF"/>
                 </a:solidFill>
                 <a:latin typeface="Calibri"/>
               </a:rPr>
-              <a:t>FASE 1</a:t>
-            </a:r>
-          </a:p>
+              <a:t>NÍVEL 2 — Volume</a:t>
+            </a:r>
+          </a:p>
+        </p:txBody>
+      </p:sp>
+      <p:sp>
+        <p:nvSpPr>
+          <p:cNvPr id="11" name="TextBox 10"/>
+          <p:cNvSpPr txBox="1"/>
+          <p:nvPr/>
+        </p:nvSpPr>
+        <p:spPr>
+          <a:xfrm>
+            <a:off x="3200400" y="2496312"/>
+            <a:ext cx="3657600" cy="594360"/>
+          </a:xfrm>
+          <a:prstGeom prst="rect">
+            <a:avLst/>
+          </a:prstGeom>
+          <a:noFill/>
+        </p:spPr>
+        <p:txBody>
+          <a:bodyPr wrap="square" anchor="ctr">
+            <a:spAutoFit/>
+          </a:bodyPr>
+          <a:lstStyle/>
+          <a:p>
+            <a:pPr algn="l">
+              <a:lnSpc>
+                <a:spcPct val="100000"/>
+              </a:lnSpc>
+              <a:spcAft>
+                <a:spcPts val="600"/>
+              </a:spcAft>
+            </a:pPr>
+            <a:r>
+              <a:rPr sz="1300" b="1">
+                <a:solidFill>
+                  <a:srgbClr val="0E2A47"/>
+                </a:solidFill>
+                <a:latin typeface="Calibri"/>
+              </a:rPr>
+              <a:t>Grestel · Matceramica · Spal</a:t>
+            </a:r>
+          </a:p>
+        </p:txBody>
+      </p:sp>
+      <p:sp>
+        <p:nvSpPr>
+          <p:cNvPr id="12" name="TextBox 11"/>
+          <p:cNvSpPr txBox="1"/>
+          <p:nvPr/>
+        </p:nvSpPr>
+        <p:spPr>
+          <a:xfrm>
+            <a:off x="6949440" y="2496312"/>
+            <a:ext cx="4663440" cy="594360"/>
+          </a:xfrm>
+          <a:prstGeom prst="rect">
+            <a:avLst/>
+          </a:prstGeom>
+          <a:noFill/>
+        </p:spPr>
+        <p:txBody>
+          <a:bodyPr wrap="square" anchor="ctr">
+            <a:spAutoFit/>
+          </a:bodyPr>
+          <a:lstStyle/>
+          <a:p>
+            <a:pPr algn="l">
+              <a:lnSpc>
+                <a:spcPct val="100000"/>
+              </a:lnSpc>
+              <a:spcAft>
+                <a:spcPts val="600"/>
+              </a:spcAft>
+            </a:pPr>
+            <a:r>
+              <a:rPr sz="1250" b="0">
+                <a:solidFill>
+                  <a:srgbClr val="1A242B"/>
+                </a:solidFill>
+                <a:latin typeface="Calibri"/>
+              </a:rPr>
+              <a:t>SLA de consistência + energia</a:t>
+            </a:r>
+          </a:p>
+        </p:txBody>
+      </p:sp>
+      <p:sp>
+        <p:nvSpPr>
+          <p:cNvPr id="13" name="Rectangle 12"/>
+          <p:cNvSpPr/>
+          <p:nvPr/>
+        </p:nvSpPr>
+        <p:spPr>
+          <a:xfrm>
+            <a:off x="548640" y="3209544"/>
+            <a:ext cx="2468880" cy="594360"/>
+          </a:xfrm>
+          <a:prstGeom prst="rect">
+            <a:avLst/>
+          </a:prstGeom>
+          <a:solidFill>
+            <a:srgbClr val="0E2A47"/>
+          </a:solidFill>
+          <a:ln>
+            <a:noFill/>
+          </a:ln>
+          <a:effectLst/>
+        </p:spPr>
+        <p:style>
+          <a:lnRef idx="1">
+            <a:schemeClr val="accent1"/>
+          </a:lnRef>
+          <a:fillRef idx="3">
+            <a:schemeClr val="accent1"/>
+          </a:fillRef>
+          <a:effectRef idx="2">
+            <a:schemeClr val="accent1"/>
+          </a:effectRef>
+          <a:fontRef idx="minor">
+            <a:schemeClr val="lt1"/>
+          </a:fontRef>
+        </p:style>
+        <p:txBody>
+          <a:bodyPr rtlCol="0" anchor="ctr"/>
+          <a:lstStyle/>
+          <a:p>
+            <a:pPr algn="ctr"/>
+          </a:p>
+        </p:txBody>
+      </p:sp>
+      <p:sp>
+        <p:nvSpPr>
+          <p:cNvPr id="14" name="TextBox 13"/>
+          <p:cNvSpPr txBox="1"/>
+          <p:nvPr/>
+        </p:nvSpPr>
+        <p:spPr>
+          <a:xfrm>
+            <a:off x="548640" y="3209544"/>
+            <a:ext cx="2468880" cy="594360"/>
+          </a:xfrm>
+          <a:prstGeom prst="rect">
+            <a:avLst/>
+          </a:prstGeom>
+          <a:noFill/>
+        </p:spPr>
+        <p:txBody>
+          <a:bodyPr wrap="square" anchor="ctr">
+            <a:spAutoFit/>
+          </a:bodyPr>
+          <a:lstStyle/>
           <a:p>
             <a:pPr algn="ctr">
               <a:lnSpc>
                 <a:spcPct val="100000"/>
               </a:lnSpc>
               <a:spcAft>
-                <a:spcPts val="100"/>
-              </a:spcAft>
-            </a:pPr>
-            <a:r>
-              <a:rPr sz="1100" b="1">
+                <a:spcPts val="600"/>
+              </a:spcAft>
+            </a:pPr>
+            <a:r>
+              <a:rPr sz="1300" b="1">
                 <a:solidFill>
                   <a:srgbClr val="FFFFFF"/>
                 </a:solidFill>
                 <a:latin typeface="Calibri"/>
               </a:rPr>
-              <a:t>M0–6</a:t>
-            </a:r>
-          </a:p>
-          <a:p>
-            <a:pPr algn="ctr">
-              <a:lnSpc>
-                <a:spcPct val="100000"/>
-              </a:lnSpc>
-              <a:spcAft>
-                <a:spcPts val="100"/>
-              </a:spcAft>
-            </a:pPr>
-            <a:r>
-              <a:rPr sz="1400" b="1">
-                <a:solidFill>
-                  <a:srgbClr val="FFFFFF"/>
-                </a:solidFill>
-                <a:latin typeface="Calibri"/>
-              </a:rPr>
-              <a:t>FUNDAÇÃO</a:t>
-            </a:r>
-          </a:p>
-        </p:txBody>
-      </p:sp>
-      <p:sp>
-        <p:nvSpPr>
-          <p:cNvPr id="7" name="Rectangle 6"/>
+              <a:t>NÍVEL 3 — Expansão</a:t>
+            </a:r>
+          </a:p>
+        </p:txBody>
+      </p:sp>
+      <p:sp>
+        <p:nvSpPr>
+          <p:cNvPr id="15" name="TextBox 14"/>
+          <p:cNvSpPr txBox="1"/>
+          <p:nvPr/>
+        </p:nvSpPr>
+        <p:spPr>
+          <a:xfrm>
+            <a:off x="3200400" y="3209544"/>
+            <a:ext cx="3657600" cy="594360"/>
+          </a:xfrm>
+          <a:prstGeom prst="rect">
+            <a:avLst/>
+          </a:prstGeom>
+          <a:noFill/>
+        </p:spPr>
+        <p:txBody>
+          <a:bodyPr wrap="square" anchor="ctr">
+            <a:spAutoFit/>
+          </a:bodyPr>
+          <a:lstStyle/>
+          <a:p>
+            <a:pPr algn="l">
+              <a:lnSpc>
+                <a:spcPct val="100000"/>
+              </a:lnSpc>
+              <a:spcAft>
+                <a:spcPts val="600"/>
+              </a:spcAft>
+            </a:pPr>
+            <a:r>
+              <a:rPr sz="1300" b="1">
+                <a:solidFill>
+                  <a:srgbClr val="0E2A47"/>
+                </a:solidFill>
+                <a:latin typeface="Calibri"/>
+              </a:rPr>
+              <a:t>Sanindusa · Revigrés · Love Tiles</a:t>
+            </a:r>
+          </a:p>
+        </p:txBody>
+      </p:sp>
+      <p:sp>
+        <p:nvSpPr>
+          <p:cNvPr id="16" name="TextBox 15"/>
+          <p:cNvSpPr txBox="1"/>
+          <p:nvPr/>
+        </p:nvSpPr>
+        <p:spPr>
+          <a:xfrm>
+            <a:off x="6949440" y="3209544"/>
+            <a:ext cx="4663440" cy="594360"/>
+          </a:xfrm>
+          <a:prstGeom prst="rect">
+            <a:avLst/>
+          </a:prstGeom>
+          <a:noFill/>
+        </p:spPr>
+        <p:txBody>
+          <a:bodyPr wrap="square" anchor="ctr">
+            <a:spAutoFit/>
+          </a:bodyPr>
+          <a:lstStyle/>
+          <a:p>
+            <a:pPr algn="l">
+              <a:lnSpc>
+                <a:spcPct val="100000"/>
+              </a:lnSpc>
+              <a:spcAft>
+                <a:spcPts val="600"/>
+              </a:spcAft>
+            </a:pPr>
+            <a:r>
+              <a:rPr sz="1250" b="0">
+                <a:solidFill>
+                  <a:srgbClr val="1A242B"/>
+                </a:solidFill>
+                <a:latin typeface="Calibri"/>
+              </a:rPr>
+              <a:t>Engobes/vidrados + serviço local</a:t>
+            </a:r>
+          </a:p>
+        </p:txBody>
+      </p:sp>
+      <p:sp>
+        <p:nvSpPr>
+          <p:cNvPr id="17" name="Rectangle 16"/>
           <p:cNvSpPr/>
           <p:nvPr/>
         </p:nvSpPr>
         <p:spPr>
           <a:xfrm>
-            <a:off x="548640" y="2834640"/>
-            <a:ext cx="2697480" cy="2743200"/>
+            <a:off x="548640" y="4114800"/>
+            <a:ext cx="11064240" cy="1920240"/>
           </a:xfrm>
           <a:prstGeom prst="rect">
             <a:avLst/>
@@ -3702,14 +4090,14 @@
       </p:sp>
       <p:sp>
         <p:nvSpPr>
-          <p:cNvPr id="8" name="TextBox 7"/>
-          <p:cNvSpPr txBox="1"/>
-          <p:nvPr/>
-        </p:nvSpPr>
-        <p:spPr>
-          <a:xfrm>
-            <a:off x="731520" y="3017520"/>
-            <a:ext cx="2377440" cy="2468880"/>
+          <p:cNvPr id="18" name="TextBox 17"/>
+          <p:cNvSpPr txBox="1"/>
+          <p:nvPr/>
+        </p:nvSpPr>
+        <p:spPr>
+          <a:xfrm>
+            <a:off x="822960" y="4251960"/>
+            <a:ext cx="10515600" cy="457200"/>
           </a:xfrm>
           <a:prstGeom prst="rect">
             <a:avLst/>
@@ -3724,1029 +4112,69 @@
           <a:p>
             <a:pPr algn="l">
               <a:lnSpc>
-                <a:spcPct val="105000"/>
-              </a:lnSpc>
-              <a:spcAft>
-                <a:spcPts val="1000"/>
-              </a:spcAft>
-            </a:pPr>
-            <a:r>
-              <a:rPr sz="1200" b="1">
-                <a:solidFill>
-                  <a:srgbClr val="128C7E"/>
-                </a:solidFill>
-                <a:latin typeface="Calibri"/>
-              </a:rPr>
-              <a:t>•  </a:t>
-            </a:r>
-            <a:r>
-              <a:rPr sz="1200" b="0">
+                <a:spcPct val="100000"/>
+              </a:lnSpc>
+              <a:spcAft>
+                <a:spcPts val="600"/>
+              </a:spcAft>
+            </a:pPr>
+            <a:r>
+              <a:rPr sz="1700" b="1">
+                <a:solidFill>
+                  <a:srgbClr val="0E2A47"/>
+                </a:solidFill>
+                <a:latin typeface="Calibri"/>
+              </a:rPr>
+              <a:t>A jogada de "aterragem" em 5 passos</a:t>
+            </a:r>
+          </a:p>
+        </p:txBody>
+      </p:sp>
+      <p:sp>
+        <p:nvSpPr>
+          <p:cNvPr id="19" name="TextBox 18"/>
+          <p:cNvSpPr txBox="1"/>
+          <p:nvPr/>
+        </p:nvSpPr>
+        <p:spPr>
+          <a:xfrm>
+            <a:off x="822960" y="4754880"/>
+            <a:ext cx="10515600" cy="1188720"/>
+          </a:xfrm>
+          <a:prstGeom prst="rect">
+            <a:avLst/>
+          </a:prstGeom>
+          <a:noFill/>
+        </p:spPr>
+        <p:txBody>
+          <a:bodyPr wrap="square" anchor="t">
+            <a:spAutoFit/>
+          </a:bodyPr>
+          <a:lstStyle/>
+          <a:p>
+            <a:pPr algn="l">
+              <a:lnSpc>
+                <a:spcPct val="120000"/>
+              </a:lnSpc>
+              <a:spcAft>
+                <a:spcPts val="600"/>
+              </a:spcAft>
+            </a:pPr>
+            <a:r>
+              <a:rPr sz="1400" b="0">
                 <a:solidFill>
                   <a:srgbClr val="1A242B"/>
                 </a:solidFill>
                 <a:latin typeface="Calibri"/>
               </a:rPr>
-              <a:t>Laboratório + armazém em Aveiro</a:t>
-            </a:r>
-          </a:p>
-          <a:p>
-            <a:pPr algn="l">
-              <a:lnSpc>
-                <a:spcPct val="105000"/>
-              </a:lnSpc>
-              <a:spcAft>
-                <a:spcPts val="1000"/>
-              </a:spcAft>
-            </a:pPr>
-            <a:r>
-              <a:rPr sz="1200" b="1">
-                <a:solidFill>
-                  <a:srgbClr val="128C7E"/>
-                </a:solidFill>
-                <a:latin typeface="Calibri"/>
-              </a:rPr>
-              <a:t>•  </a:t>
-            </a:r>
-            <a:r>
-              <a:rPr sz="1200" b="0">
-                <a:solidFill>
-                  <a:srgbClr val="1A242B"/>
-                </a:solidFill>
-                <a:latin typeface="Calibri"/>
-              </a:rPr>
-              <a:t>2–3 engenheiros de campo</a:t>
-            </a:r>
-          </a:p>
-          <a:p>
-            <a:pPr algn="l">
-              <a:lnSpc>
-                <a:spcPct val="105000"/>
-              </a:lnSpc>
-              <a:spcAft>
-                <a:spcPts val="1000"/>
-              </a:spcAft>
-            </a:pPr>
-            <a:r>
-              <a:rPr sz="1200" b="1">
-                <a:solidFill>
-                  <a:srgbClr val="128C7E"/>
-                </a:solidFill>
-                <a:latin typeface="Calibri"/>
-              </a:rPr>
-              <a:t>•  </a:t>
-            </a:r>
-            <a:r>
-              <a:rPr sz="1200" b="0">
-                <a:solidFill>
-                  <a:srgbClr val="1A242B"/>
-                </a:solidFill>
-                <a:latin typeface="Calibri"/>
-              </a:rPr>
-              <a:t>5 fritas-base + SPC/ΔE</a:t>
-            </a:r>
-          </a:p>
-          <a:p>
-            <a:pPr algn="l">
-              <a:lnSpc>
-                <a:spcPct val="105000"/>
-              </a:lnSpc>
-              <a:spcAft>
-                <a:spcPts val="1000"/>
-              </a:spcAft>
-            </a:pPr>
-            <a:r>
-              <a:rPr sz="1200" b="1">
-                <a:solidFill>
-                  <a:srgbClr val="128C7E"/>
-                </a:solidFill>
-                <a:latin typeface="Calibri"/>
-              </a:rPr>
-              <a:t>•  </a:t>
-            </a:r>
-            <a:r>
-              <a:rPr sz="1200" b="0">
-                <a:solidFill>
-                  <a:srgbClr val="1A242B"/>
-                </a:solidFill>
-                <a:latin typeface="Calibri"/>
-              </a:rPr>
-              <a:t>Assinar pilotos VA + CV</a:t>
-            </a:r>
-          </a:p>
-        </p:txBody>
-      </p:sp>
-      <p:sp>
-        <p:nvSpPr>
-          <p:cNvPr id="9" name="Rectangle 8"/>
-          <p:cNvSpPr/>
-          <p:nvPr/>
-        </p:nvSpPr>
-        <p:spPr>
-          <a:xfrm>
-            <a:off x="3364992" y="1783080"/>
-            <a:ext cx="2697480" cy="1051560"/>
-          </a:xfrm>
-          <a:prstGeom prst="rect">
-            <a:avLst/>
-          </a:prstGeom>
-          <a:solidFill>
-            <a:srgbClr val="0E2A47"/>
-          </a:solidFill>
-          <a:ln>
-            <a:noFill/>
-          </a:ln>
-          <a:effectLst/>
-        </p:spPr>
-        <p:style>
-          <a:lnRef idx="1">
-            <a:schemeClr val="accent1"/>
-          </a:lnRef>
-          <a:fillRef idx="3">
-            <a:schemeClr val="accent1"/>
-          </a:fillRef>
-          <a:effectRef idx="2">
-            <a:schemeClr val="accent1"/>
-          </a:effectRef>
-          <a:fontRef idx="minor">
-            <a:schemeClr val="lt1"/>
-          </a:fontRef>
-        </p:style>
-        <p:txBody>
-          <a:bodyPr rtlCol="0" anchor="ctr"/>
-          <a:lstStyle/>
-          <a:p>
-            <a:pPr algn="ctr"/>
-          </a:p>
-        </p:txBody>
-      </p:sp>
-      <p:sp>
-        <p:nvSpPr>
-          <p:cNvPr id="10" name="TextBox 9"/>
-          <p:cNvSpPr txBox="1"/>
-          <p:nvPr/>
-        </p:nvSpPr>
-        <p:spPr>
-          <a:xfrm>
-            <a:off x="3364992" y="1783080"/>
-            <a:ext cx="2697480" cy="1051560"/>
-          </a:xfrm>
-          <a:prstGeom prst="rect">
-            <a:avLst/>
-          </a:prstGeom>
-          <a:noFill/>
-        </p:spPr>
-        <p:txBody>
-          <a:bodyPr wrap="square" anchor="ctr">
-            <a:spAutoFit/>
-          </a:bodyPr>
-          <a:lstStyle/>
-          <a:p>
-            <a:pPr algn="ctr">
-              <a:lnSpc>
-                <a:spcPct val="100000"/>
-              </a:lnSpc>
-              <a:spcAft>
-                <a:spcPts val="100"/>
-              </a:spcAft>
-            </a:pPr>
-            <a:r>
-              <a:rPr sz="1400" b="1">
-                <a:solidFill>
-                  <a:srgbClr val="FFFFFF"/>
-                </a:solidFill>
-                <a:latin typeface="Calibri"/>
-              </a:rPr>
-              <a:t>FASE 2</a:t>
-            </a:r>
-          </a:p>
-          <a:p>
-            <a:pPr algn="ctr">
-              <a:lnSpc>
-                <a:spcPct val="100000"/>
-              </a:lnSpc>
-              <a:spcAft>
-                <a:spcPts val="100"/>
-              </a:spcAft>
-            </a:pPr>
-            <a:r>
-              <a:rPr sz="1100" b="1">
-                <a:solidFill>
-                  <a:srgbClr val="FFFFFF"/>
-                </a:solidFill>
-                <a:latin typeface="Calibri"/>
-              </a:rPr>
-              <a:t>M4–12</a:t>
-            </a:r>
-          </a:p>
-          <a:p>
-            <a:pPr algn="ctr">
-              <a:lnSpc>
-                <a:spcPct val="100000"/>
-              </a:lnSpc>
-              <a:spcAft>
-                <a:spcPts val="100"/>
-              </a:spcAft>
-            </a:pPr>
-            <a:r>
-              <a:rPr sz="1400" b="1">
-                <a:solidFill>
-                  <a:srgbClr val="FFFFFF"/>
-                </a:solidFill>
-                <a:latin typeface="Calibri"/>
-              </a:rPr>
-              <a:t>PROVA</a:t>
-            </a:r>
-          </a:p>
-        </p:txBody>
-      </p:sp>
-      <p:sp>
-        <p:nvSpPr>
-          <p:cNvPr id="11" name="Rectangle 10"/>
-          <p:cNvSpPr/>
-          <p:nvPr/>
-        </p:nvSpPr>
-        <p:spPr>
-          <a:xfrm>
-            <a:off x="3364992" y="2834640"/>
-            <a:ext cx="2697480" cy="2743200"/>
-          </a:xfrm>
-          <a:prstGeom prst="rect">
-            <a:avLst/>
-          </a:prstGeom>
-          <a:solidFill>
-            <a:srgbClr val="F2F5F7"/>
-          </a:solidFill>
-          <a:ln>
-            <a:noFill/>
-          </a:ln>
-          <a:effectLst/>
-        </p:spPr>
-        <p:style>
-          <a:lnRef idx="1">
-            <a:schemeClr val="accent1"/>
-          </a:lnRef>
-          <a:fillRef idx="3">
-            <a:schemeClr val="accent1"/>
-          </a:fillRef>
-          <a:effectRef idx="2">
-            <a:schemeClr val="accent1"/>
-          </a:effectRef>
-          <a:fontRef idx="minor">
-            <a:schemeClr val="lt1"/>
-          </a:fontRef>
-        </p:style>
-        <p:txBody>
-          <a:bodyPr rtlCol="0" anchor="ctr"/>
-          <a:lstStyle/>
-          <a:p>
-            <a:pPr algn="ctr"/>
-          </a:p>
-        </p:txBody>
-      </p:sp>
-      <p:sp>
-        <p:nvSpPr>
-          <p:cNvPr id="12" name="TextBox 11"/>
-          <p:cNvSpPr txBox="1"/>
-          <p:nvPr/>
-        </p:nvSpPr>
-        <p:spPr>
-          <a:xfrm>
-            <a:off x="3547872" y="3017520"/>
-            <a:ext cx="2377440" cy="2468880"/>
-          </a:xfrm>
-          <a:prstGeom prst="rect">
-            <a:avLst/>
-          </a:prstGeom>
-          <a:noFill/>
-        </p:spPr>
-        <p:txBody>
-          <a:bodyPr wrap="square" anchor="t">
-            <a:spAutoFit/>
-          </a:bodyPr>
-          <a:lstStyle/>
-          <a:p>
-            <a:pPr algn="l">
-              <a:lnSpc>
-                <a:spcPct val="105000"/>
-              </a:lnSpc>
-              <a:spcAft>
-                <a:spcPts val="1000"/>
-              </a:spcAft>
-            </a:pPr>
-            <a:r>
-              <a:rPr sz="1200" b="1">
-                <a:solidFill>
-                  <a:srgbClr val="128C7E"/>
-                </a:solidFill>
-                <a:latin typeface="Calibri"/>
-              </a:rPr>
-              <a:t>•  </a:t>
-            </a:r>
-            <a:r>
-              <a:rPr sz="1200" b="0">
-                <a:solidFill>
-                  <a:srgbClr val="1A242B"/>
-                </a:solidFill>
-                <a:latin typeface="Calibri"/>
-              </a:rPr>
-              <a:t>Eco-Low-Fire v1 validado</a:t>
-            </a:r>
-          </a:p>
-          <a:p>
-            <a:pPr algn="l">
-              <a:lnSpc>
-                <a:spcPct val="105000"/>
-              </a:lnSpc>
-              <a:spcAft>
-                <a:spcPts val="1000"/>
-              </a:spcAft>
-            </a:pPr>
-            <a:r>
-              <a:rPr sz="1200" b="1">
-                <a:solidFill>
-                  <a:srgbClr val="128C7E"/>
-                </a:solidFill>
-                <a:latin typeface="Calibri"/>
-              </a:rPr>
-              <a:t>•  </a:t>
-            </a:r>
-            <a:r>
-              <a:rPr sz="1200" b="0">
-                <a:solidFill>
-                  <a:srgbClr val="1A242B"/>
-                </a:solidFill>
-                <a:latin typeface="Calibri"/>
-              </a:rPr>
-              <a:t>Executar Pilotos A e B</a:t>
-            </a:r>
-          </a:p>
-          <a:p>
-            <a:pPr algn="l">
-              <a:lnSpc>
-                <a:spcPct val="105000"/>
-              </a:lnSpc>
-              <a:spcAft>
-                <a:spcPts val="1000"/>
-              </a:spcAft>
-            </a:pPr>
-            <a:r>
-              <a:rPr sz="1200" b="1">
-                <a:solidFill>
-                  <a:srgbClr val="128C7E"/>
-                </a:solidFill>
-                <a:latin typeface="Calibri"/>
-              </a:rPr>
-              <a:t>•  </a:t>
-            </a:r>
-            <a:r>
-              <a:rPr sz="1200" b="0">
-                <a:solidFill>
-                  <a:srgbClr val="1A242B"/>
-                </a:solidFill>
-                <a:latin typeface="Calibri"/>
-              </a:rPr>
-              <a:t>Cor digital ativa</a:t>
-            </a:r>
-          </a:p>
-          <a:p>
-            <a:pPr algn="l">
-              <a:lnSpc>
-                <a:spcPct val="105000"/>
-              </a:lnSpc>
-              <a:spcAft>
-                <a:spcPts val="1000"/>
-              </a:spcAft>
-            </a:pPr>
-            <a:r>
-              <a:rPr sz="1200" b="1">
-                <a:solidFill>
-                  <a:srgbClr val="128C7E"/>
-                </a:solidFill>
-                <a:latin typeface="Calibri"/>
-              </a:rPr>
-              <a:t>•  </a:t>
-            </a:r>
-            <a:r>
-              <a:rPr sz="1200" b="0">
-                <a:solidFill>
-                  <a:srgbClr val="1A242B"/>
-                </a:solidFill>
-                <a:latin typeface="Calibri"/>
-              </a:rPr>
-              <a:t>1ºs casos de estudo</a:t>
-            </a:r>
-          </a:p>
-        </p:txBody>
-      </p:sp>
-      <p:sp>
-        <p:nvSpPr>
-          <p:cNvPr id="13" name="Rectangle 12"/>
-          <p:cNvSpPr/>
-          <p:nvPr/>
-        </p:nvSpPr>
-        <p:spPr>
-          <a:xfrm>
-            <a:off x="6181344" y="1783080"/>
-            <a:ext cx="2697480" cy="1051560"/>
-          </a:xfrm>
-          <a:prstGeom prst="rect">
-            <a:avLst/>
-          </a:prstGeom>
-          <a:solidFill>
-            <a:srgbClr val="E36A1E"/>
-          </a:solidFill>
-          <a:ln>
-            <a:noFill/>
-          </a:ln>
-          <a:effectLst/>
-        </p:spPr>
-        <p:style>
-          <a:lnRef idx="1">
-            <a:schemeClr val="accent1"/>
-          </a:lnRef>
-          <a:fillRef idx="3">
-            <a:schemeClr val="accent1"/>
-          </a:fillRef>
-          <a:effectRef idx="2">
-            <a:schemeClr val="accent1"/>
-          </a:effectRef>
-          <a:fontRef idx="minor">
-            <a:schemeClr val="lt1"/>
-          </a:fontRef>
-        </p:style>
-        <p:txBody>
-          <a:bodyPr rtlCol="0" anchor="ctr"/>
-          <a:lstStyle/>
-          <a:p>
-            <a:pPr algn="ctr"/>
-          </a:p>
-        </p:txBody>
-      </p:sp>
-      <p:sp>
-        <p:nvSpPr>
-          <p:cNvPr id="14" name="TextBox 13"/>
-          <p:cNvSpPr txBox="1"/>
-          <p:nvPr/>
-        </p:nvSpPr>
-        <p:spPr>
-          <a:xfrm>
-            <a:off x="6181344" y="1783080"/>
-            <a:ext cx="2697480" cy="1051560"/>
-          </a:xfrm>
-          <a:prstGeom prst="rect">
-            <a:avLst/>
-          </a:prstGeom>
-          <a:noFill/>
-        </p:spPr>
-        <p:txBody>
-          <a:bodyPr wrap="square" anchor="ctr">
-            <a:spAutoFit/>
-          </a:bodyPr>
-          <a:lstStyle/>
-          <a:p>
-            <a:pPr algn="ctr">
-              <a:lnSpc>
-                <a:spcPct val="100000"/>
-              </a:lnSpc>
-              <a:spcAft>
-                <a:spcPts val="100"/>
-              </a:spcAft>
-            </a:pPr>
-            <a:r>
-              <a:rPr sz="1400" b="1">
-                <a:solidFill>
-                  <a:srgbClr val="FFFFFF"/>
-                </a:solidFill>
-                <a:latin typeface="Calibri"/>
-              </a:rPr>
-              <a:t>FASE 3</a:t>
-            </a:r>
-          </a:p>
-          <a:p>
-            <a:pPr algn="ctr">
-              <a:lnSpc>
-                <a:spcPct val="100000"/>
-              </a:lnSpc>
-              <a:spcAft>
-                <a:spcPts val="100"/>
-              </a:spcAft>
-            </a:pPr>
-            <a:r>
-              <a:rPr sz="1100" b="1">
-                <a:solidFill>
-                  <a:srgbClr val="FFFFFF"/>
-                </a:solidFill>
-                <a:latin typeface="Calibri"/>
-              </a:rPr>
-              <a:t>M9–18</a:t>
-            </a:r>
-          </a:p>
-          <a:p>
-            <a:pPr algn="ctr">
-              <a:lnSpc>
-                <a:spcPct val="100000"/>
-              </a:lnSpc>
-              <a:spcAft>
-                <a:spcPts val="100"/>
-              </a:spcAft>
-            </a:pPr>
-            <a:r>
-              <a:rPr sz="1400" b="1">
-                <a:solidFill>
-                  <a:srgbClr val="FFFFFF"/>
-                </a:solidFill>
-                <a:latin typeface="Calibri"/>
-              </a:rPr>
-              <a:t>ESCALA</a:t>
-            </a:r>
-          </a:p>
-        </p:txBody>
-      </p:sp>
-      <p:sp>
-        <p:nvSpPr>
-          <p:cNvPr id="15" name="Rectangle 14"/>
-          <p:cNvSpPr/>
-          <p:nvPr/>
-        </p:nvSpPr>
-        <p:spPr>
-          <a:xfrm>
-            <a:off x="6181344" y="2834640"/>
-            <a:ext cx="2697480" cy="2743200"/>
-          </a:xfrm>
-          <a:prstGeom prst="rect">
-            <a:avLst/>
-          </a:prstGeom>
-          <a:solidFill>
-            <a:srgbClr val="F2F5F7"/>
-          </a:solidFill>
-          <a:ln>
-            <a:noFill/>
-          </a:ln>
-          <a:effectLst/>
-        </p:spPr>
-        <p:style>
-          <a:lnRef idx="1">
-            <a:schemeClr val="accent1"/>
-          </a:lnRef>
-          <a:fillRef idx="3">
-            <a:schemeClr val="accent1"/>
-          </a:fillRef>
-          <a:effectRef idx="2">
-            <a:schemeClr val="accent1"/>
-          </a:effectRef>
-          <a:fontRef idx="minor">
-            <a:schemeClr val="lt1"/>
-          </a:fontRef>
-        </p:style>
-        <p:txBody>
-          <a:bodyPr rtlCol="0" anchor="ctr"/>
-          <a:lstStyle/>
-          <a:p>
-            <a:pPr algn="ctr"/>
-          </a:p>
-        </p:txBody>
-      </p:sp>
-      <p:sp>
-        <p:nvSpPr>
-          <p:cNvPr id="16" name="TextBox 15"/>
-          <p:cNvSpPr txBox="1"/>
-          <p:nvPr/>
-        </p:nvSpPr>
-        <p:spPr>
-          <a:xfrm>
-            <a:off x="6364224" y="3017520"/>
-            <a:ext cx="2377440" cy="2468880"/>
-          </a:xfrm>
-          <a:prstGeom prst="rect">
-            <a:avLst/>
-          </a:prstGeom>
-          <a:noFill/>
-        </p:spPr>
-        <p:txBody>
-          <a:bodyPr wrap="square" anchor="t">
-            <a:spAutoFit/>
-          </a:bodyPr>
-          <a:lstStyle/>
-          <a:p>
-            <a:pPr algn="l">
-              <a:lnSpc>
-                <a:spcPct val="105000"/>
-              </a:lnSpc>
-              <a:spcAft>
-                <a:spcPts val="1000"/>
-              </a:spcAft>
-            </a:pPr>
-            <a:r>
-              <a:rPr sz="1200" b="1">
-                <a:solidFill>
-                  <a:srgbClr val="128C7E"/>
-                </a:solidFill>
-                <a:latin typeface="Calibri"/>
-              </a:rPr>
-              <a:t>•  </a:t>
-            </a:r>
-            <a:r>
-              <a:rPr sz="1200" b="0">
-                <a:solidFill>
-                  <a:srgbClr val="1A242B"/>
-                </a:solidFill>
-                <a:latin typeface="Calibri"/>
-              </a:rPr>
-              <a:t>Pilotos → contratos SLA</a:t>
-            </a:r>
-          </a:p>
-          <a:p>
-            <a:pPr algn="l">
-              <a:lnSpc>
-                <a:spcPct val="105000"/>
-              </a:lnSpc>
-              <a:spcAft>
-                <a:spcPts val="1000"/>
-              </a:spcAft>
-            </a:pPr>
-            <a:r>
-              <a:rPr sz="1200" b="1">
-                <a:solidFill>
-                  <a:srgbClr val="128C7E"/>
-                </a:solidFill>
-                <a:latin typeface="Calibri"/>
-              </a:rPr>
-              <a:t>•  </a:t>
-            </a:r>
-            <a:r>
-              <a:rPr sz="1200" b="0">
-                <a:solidFill>
-                  <a:srgbClr val="1A242B"/>
-                </a:solidFill>
-                <a:latin typeface="Calibri"/>
-              </a:rPr>
-              <a:t>Eco-Low-Fire v2</a:t>
-            </a:r>
-          </a:p>
-          <a:p>
-            <a:pPr algn="l">
-              <a:lnSpc>
-                <a:spcPct val="105000"/>
-              </a:lnSpc>
-              <a:spcAft>
-                <a:spcPts val="1000"/>
-              </a:spcAft>
-            </a:pPr>
-            <a:r>
-              <a:rPr sz="1200" b="1">
-                <a:solidFill>
-                  <a:srgbClr val="128C7E"/>
-                </a:solidFill>
-                <a:latin typeface="Calibri"/>
-              </a:rPr>
-              <a:t>•  </a:t>
-            </a:r>
-            <a:r>
-              <a:rPr sz="1200" b="0">
-                <a:solidFill>
-                  <a:srgbClr val="1A242B"/>
-                </a:solidFill>
-                <a:latin typeface="Calibri"/>
-              </a:rPr>
-              <a:t>Expandir Nível 2</a:t>
-            </a:r>
-          </a:p>
-          <a:p>
-            <a:pPr algn="l">
-              <a:lnSpc>
-                <a:spcPct val="105000"/>
-              </a:lnSpc>
-              <a:spcAft>
-                <a:spcPts val="1000"/>
-              </a:spcAft>
-            </a:pPr>
-            <a:r>
-              <a:rPr sz="1200" b="1">
-                <a:solidFill>
-                  <a:srgbClr val="128C7E"/>
-                </a:solidFill>
-                <a:latin typeface="Calibri"/>
-              </a:rPr>
-              <a:t>•  </a:t>
-            </a:r>
-            <a:r>
-              <a:rPr sz="1200" b="0">
-                <a:solidFill>
-                  <a:srgbClr val="1A242B"/>
-                </a:solidFill>
-                <a:latin typeface="Calibri"/>
-              </a:rPr>
-              <a:t>Abordar Nível 3</a:t>
-            </a:r>
-          </a:p>
-        </p:txBody>
-      </p:sp>
-      <p:sp>
-        <p:nvSpPr>
-          <p:cNvPr id="17" name="Rectangle 16"/>
-          <p:cNvSpPr/>
-          <p:nvPr/>
-        </p:nvSpPr>
-        <p:spPr>
-          <a:xfrm>
-            <a:off x="8997696" y="1783080"/>
-            <a:ext cx="2697480" cy="1051560"/>
-          </a:xfrm>
-          <a:prstGeom prst="rect">
-            <a:avLst/>
-          </a:prstGeom>
-          <a:solidFill>
-            <a:srgbClr val="6A4C93"/>
-          </a:solidFill>
-          <a:ln>
-            <a:noFill/>
-          </a:ln>
-          <a:effectLst/>
-        </p:spPr>
-        <p:style>
-          <a:lnRef idx="1">
-            <a:schemeClr val="accent1"/>
-          </a:lnRef>
-          <a:fillRef idx="3">
-            <a:schemeClr val="accent1"/>
-          </a:fillRef>
-          <a:effectRef idx="2">
-            <a:schemeClr val="accent1"/>
-          </a:effectRef>
-          <a:fontRef idx="minor">
-            <a:schemeClr val="lt1"/>
-          </a:fontRef>
-        </p:style>
-        <p:txBody>
-          <a:bodyPr rtlCol="0" anchor="ctr"/>
-          <a:lstStyle/>
-          <a:p>
-            <a:pPr algn="ctr"/>
-          </a:p>
-        </p:txBody>
-      </p:sp>
-      <p:sp>
-        <p:nvSpPr>
-          <p:cNvPr id="18" name="TextBox 17"/>
-          <p:cNvSpPr txBox="1"/>
-          <p:nvPr/>
-        </p:nvSpPr>
-        <p:spPr>
-          <a:xfrm>
-            <a:off x="8997696" y="1783080"/>
-            <a:ext cx="2697480" cy="1051560"/>
-          </a:xfrm>
-          <a:prstGeom prst="rect">
-            <a:avLst/>
-          </a:prstGeom>
-          <a:noFill/>
-        </p:spPr>
-        <p:txBody>
-          <a:bodyPr wrap="square" anchor="ctr">
-            <a:spAutoFit/>
-          </a:bodyPr>
-          <a:lstStyle/>
-          <a:p>
-            <a:pPr algn="ctr">
-              <a:lnSpc>
-                <a:spcPct val="100000"/>
-              </a:lnSpc>
-              <a:spcAft>
-                <a:spcPts val="100"/>
-              </a:spcAft>
-            </a:pPr>
-            <a:r>
-              <a:rPr sz="1400" b="1">
-                <a:solidFill>
-                  <a:srgbClr val="FFFFFF"/>
-                </a:solidFill>
-                <a:latin typeface="Calibri"/>
-              </a:rPr>
-              <a:t>FASE 4</a:t>
-            </a:r>
-          </a:p>
-          <a:p>
-            <a:pPr algn="ctr">
-              <a:lnSpc>
-                <a:spcPct val="100000"/>
-              </a:lnSpc>
-              <a:spcAft>
-                <a:spcPts val="100"/>
-              </a:spcAft>
-            </a:pPr>
-            <a:r>
-              <a:rPr sz="1100" b="1">
-                <a:solidFill>
-                  <a:srgbClr val="FFFFFF"/>
-                </a:solidFill>
-                <a:latin typeface="Calibri"/>
-              </a:rPr>
-              <a:t>M12–24</a:t>
-            </a:r>
-          </a:p>
-          <a:p>
-            <a:pPr algn="ctr">
-              <a:lnSpc>
-                <a:spcPct val="100000"/>
-              </a:lnSpc>
-              <a:spcAft>
-                <a:spcPts val="100"/>
-              </a:spcAft>
-            </a:pPr>
-            <a:r>
-              <a:rPr sz="1400" b="1">
-                <a:solidFill>
-                  <a:srgbClr val="FFFFFF"/>
-                </a:solidFill>
-                <a:latin typeface="Calibri"/>
-              </a:rPr>
-              <a:t>FIDELIZAÇÃO</a:t>
-            </a:r>
-          </a:p>
-        </p:txBody>
-      </p:sp>
-      <p:sp>
-        <p:nvSpPr>
-          <p:cNvPr id="19" name="Rectangle 18"/>
-          <p:cNvSpPr/>
-          <p:nvPr/>
-        </p:nvSpPr>
-        <p:spPr>
-          <a:xfrm>
-            <a:off x="8997696" y="2834640"/>
-            <a:ext cx="2697480" cy="2743200"/>
-          </a:xfrm>
-          <a:prstGeom prst="rect">
-            <a:avLst/>
-          </a:prstGeom>
-          <a:solidFill>
-            <a:srgbClr val="F2F5F7"/>
-          </a:solidFill>
-          <a:ln>
-            <a:noFill/>
-          </a:ln>
-          <a:effectLst/>
-        </p:spPr>
-        <p:style>
-          <a:lnRef idx="1">
-            <a:schemeClr val="accent1"/>
-          </a:lnRef>
-          <a:fillRef idx="3">
-            <a:schemeClr val="accent1"/>
-          </a:fillRef>
-          <a:effectRef idx="2">
-            <a:schemeClr val="accent1"/>
-          </a:effectRef>
-          <a:fontRef idx="minor">
-            <a:schemeClr val="lt1"/>
-          </a:fontRef>
-        </p:style>
-        <p:txBody>
-          <a:bodyPr rtlCol="0" anchor="ctr"/>
-          <a:lstStyle/>
-          <a:p>
-            <a:pPr algn="ctr"/>
+              <a:t>1. Visita de diagnóstico gratuita (relatório de oportunidade)   →   2. Piloto numa única linha (baixo risco)   →   3. Resultado quantificado em €/ano   →   4. Contrato com SLA de consistência   →   5. Expandir + plataforma de IA = fidelização</a:t>
+            </a:r>
           </a:p>
         </p:txBody>
       </p:sp>
       <p:sp>
         <p:nvSpPr>
           <p:cNvPr id="20" name="TextBox 19"/>
-          <p:cNvSpPr txBox="1"/>
-          <p:nvPr/>
-        </p:nvSpPr>
-        <p:spPr>
-          <a:xfrm>
-            <a:off x="9180576" y="3017520"/>
-            <a:ext cx="2377440" cy="2468880"/>
-          </a:xfrm>
-          <a:prstGeom prst="rect">
-            <a:avLst/>
-          </a:prstGeom>
-          <a:noFill/>
-        </p:spPr>
-        <p:txBody>
-          <a:bodyPr wrap="square" anchor="t">
-            <a:spAutoFit/>
-          </a:bodyPr>
-          <a:lstStyle/>
-          <a:p>
-            <a:pPr algn="l">
-              <a:lnSpc>
-                <a:spcPct val="105000"/>
-              </a:lnSpc>
-              <a:spcAft>
-                <a:spcPts val="1000"/>
-              </a:spcAft>
-            </a:pPr>
-            <a:r>
-              <a:rPr sz="1200" b="1">
-                <a:solidFill>
-                  <a:srgbClr val="128C7E"/>
-                </a:solidFill>
-                <a:latin typeface="Calibri"/>
-              </a:rPr>
-              <a:t>•  </a:t>
-            </a:r>
-            <a:r>
-              <a:rPr sz="1200" b="0">
-                <a:solidFill>
-                  <a:srgbClr val="1A242B"/>
-                </a:solidFill>
-                <a:latin typeface="Calibri"/>
-              </a:rPr>
-              <a:t>Plataforma de IA (beta→rollout)</a:t>
-            </a:r>
-          </a:p>
-          <a:p>
-            <a:pPr algn="l">
-              <a:lnSpc>
-                <a:spcPct val="105000"/>
-              </a:lnSpc>
-              <a:spcAft>
-                <a:spcPts val="1000"/>
-              </a:spcAft>
-            </a:pPr>
-            <a:r>
-              <a:rPr sz="1200" b="1">
-                <a:solidFill>
-                  <a:srgbClr val="128C7E"/>
-                </a:solidFill>
-                <a:latin typeface="Calibri"/>
-              </a:rPr>
-              <a:t>•  </a:t>
-            </a:r>
-            <a:r>
-              <a:rPr sz="1200" b="0">
-                <a:solidFill>
-                  <a:srgbClr val="1A242B"/>
-                </a:solidFill>
-                <a:latin typeface="Calibri"/>
-              </a:rPr>
-              <a:t>Fosso de dados</a:t>
-            </a:r>
-          </a:p>
-          <a:p>
-            <a:pPr algn="l">
-              <a:lnSpc>
-                <a:spcPct val="105000"/>
-              </a:lnSpc>
-              <a:spcAft>
-                <a:spcPts val="1000"/>
-              </a:spcAft>
-            </a:pPr>
-            <a:r>
-              <a:rPr sz="1200" b="1">
-                <a:solidFill>
-                  <a:srgbClr val="128C7E"/>
-                </a:solidFill>
-                <a:latin typeface="Calibri"/>
-              </a:rPr>
-              <a:t>•  </a:t>
-            </a:r>
-            <a:r>
-              <a:rPr sz="1200" b="0">
-                <a:solidFill>
-                  <a:srgbClr val="1A242B"/>
-                </a:solidFill>
-                <a:latin typeface="Calibri"/>
-              </a:rPr>
-              <a:t>Co-desenvolvimento</a:t>
-            </a:r>
-          </a:p>
-          <a:p>
-            <a:pPr algn="l">
-              <a:lnSpc>
-                <a:spcPct val="105000"/>
-              </a:lnSpc>
-              <a:spcAft>
-                <a:spcPts val="1000"/>
-              </a:spcAft>
-            </a:pPr>
-            <a:r>
-              <a:rPr sz="1200" b="1">
-                <a:solidFill>
-                  <a:srgbClr val="128C7E"/>
-                </a:solidFill>
-                <a:latin typeface="Calibri"/>
-              </a:rPr>
-              <a:t>•  </a:t>
-            </a:r>
-            <a:r>
-              <a:rPr sz="1200" b="0">
-                <a:solidFill>
-                  <a:srgbClr val="1A242B"/>
-                </a:solidFill>
-                <a:latin typeface="Calibri"/>
-              </a:rPr>
-              <a:t>Parceiro por defeito do cluster</a:t>
-            </a:r>
-          </a:p>
-        </p:txBody>
-      </p:sp>
-      <p:sp>
-        <p:nvSpPr>
-          <p:cNvPr id="21" name="TextBox 20"/>
           <p:cNvSpPr txBox="1"/>
           <p:nvPr/>
         </p:nvSpPr>
@@ -4788,7 +4216,7 @@
       </p:sp>
       <p:sp>
         <p:nvSpPr>
-          <p:cNvPr id="22" name="TextBox 21"/>
+          <p:cNvPr id="21" name="TextBox 20"/>
           <p:cNvSpPr txBox="1"/>
           <p:nvPr/>
         </p:nvSpPr>
@@ -4935,7 +4363,7 @@
                 </a:solidFill>
                 <a:latin typeface="Calibri"/>
               </a:rPr>
-              <a:t>ANEXO A</a:t>
+              <a:t>7. PROJETOS-PILOTO</a:t>
             </a:r>
           </a:p>
         </p:txBody>
@@ -4977,7 +4405,7 @@
                 </a:solidFill>
                 <a:latin typeface="Calibri"/>
               </a:rPr>
-              <a:t>Painel de KPIs — acompanhar desde o dia 1</a:t>
+              <a:t>Dois pilotos farol = prova quantificada e inegável</a:t>
             </a:r>
           </a:p>
         </p:txBody>
@@ -4990,8 +4418,8 @@
         </p:nvSpPr>
         <p:spPr>
           <a:xfrm>
-            <a:off x="548640" y="1920240"/>
-            <a:ext cx="3520440" cy="1691640"/>
+            <a:off x="548640" y="1783080"/>
+            <a:ext cx="5440680" cy="4023360"/>
           </a:xfrm>
           <a:prstGeom prst="rect">
             <a:avLst/>
@@ -5034,8 +4462,320 @@
         </p:nvSpPr>
         <p:spPr>
           <a:xfrm>
-            <a:off x="548640" y="1920240"/>
-            <a:ext cx="3520440" cy="91440"/>
+            <a:off x="548640" y="1783080"/>
+            <a:ext cx="5440680" cy="731520"/>
+          </a:xfrm>
+          <a:prstGeom prst="rect">
+            <a:avLst/>
+          </a:prstGeom>
+          <a:solidFill>
+            <a:srgbClr val="0E2A47"/>
+          </a:solidFill>
+          <a:ln>
+            <a:noFill/>
+          </a:ln>
+          <a:effectLst/>
+        </p:spPr>
+        <p:style>
+          <a:lnRef idx="1">
+            <a:schemeClr val="accent1"/>
+          </a:lnRef>
+          <a:fillRef idx="3">
+            <a:schemeClr val="accent1"/>
+          </a:fillRef>
+          <a:effectRef idx="2">
+            <a:schemeClr val="accent1"/>
+          </a:effectRef>
+          <a:fontRef idx="minor">
+            <a:schemeClr val="lt1"/>
+          </a:fontRef>
+        </p:style>
+        <p:txBody>
+          <a:bodyPr rtlCol="0" anchor="ctr"/>
+          <a:lstStyle/>
+          <a:p>
+            <a:pPr algn="ctr"/>
+          </a:p>
+        </p:txBody>
+      </p:sp>
+      <p:sp>
+        <p:nvSpPr>
+          <p:cNvPr id="7" name="TextBox 6"/>
+          <p:cNvSpPr txBox="1"/>
+          <p:nvPr/>
+        </p:nvSpPr>
+        <p:spPr>
+          <a:xfrm>
+            <a:off x="777240" y="1783080"/>
+            <a:ext cx="5029200" cy="731520"/>
+          </a:xfrm>
+          <a:prstGeom prst="rect">
+            <a:avLst/>
+          </a:prstGeom>
+          <a:noFill/>
+        </p:spPr>
+        <p:txBody>
+          <a:bodyPr wrap="square" anchor="ctr">
+            <a:spAutoFit/>
+          </a:bodyPr>
+          <a:lstStyle/>
+          <a:p>
+            <a:pPr algn="l">
+              <a:lnSpc>
+                <a:spcPct val="100000"/>
+              </a:lnSpc>
+              <a:spcAft>
+                <a:spcPts val="200"/>
+              </a:spcAft>
+            </a:pPr>
+            <a:r>
+              <a:rPr sz="1800" b="1">
+                <a:solidFill>
+                  <a:srgbClr val="FFFFFF"/>
+                </a:solidFill>
+                <a:latin typeface="Calibri"/>
+              </a:rPr>
+              <a:t>PILOTO A — Vista Alegre</a:t>
+            </a:r>
+          </a:p>
+          <a:p>
+            <a:pPr algn="l">
+              <a:lnSpc>
+                <a:spcPct val="100000"/>
+              </a:lnSpc>
+              <a:spcAft>
+                <a:spcPts val="200"/>
+              </a:spcAft>
+            </a:pPr>
+            <a:r>
+              <a:rPr sz="1100" b="0">
+                <a:solidFill>
+                  <a:srgbClr val="C8D4DC"/>
+                </a:solidFill>
+                <a:latin typeface="Calibri"/>
+              </a:rPr>
+              <a:t>Porcelana premium · a barra de qualidade mais alta</a:t>
+            </a:r>
+          </a:p>
+        </p:txBody>
+      </p:sp>
+      <p:sp>
+        <p:nvSpPr>
+          <p:cNvPr id="8" name="TextBox 7"/>
+          <p:cNvSpPr txBox="1"/>
+          <p:nvPr/>
+        </p:nvSpPr>
+        <p:spPr>
+          <a:xfrm>
+            <a:off x="777240" y="2743200"/>
+            <a:ext cx="5029200" cy="2926080"/>
+          </a:xfrm>
+          <a:prstGeom prst="rect">
+            <a:avLst/>
+          </a:prstGeom>
+          <a:noFill/>
+        </p:spPr>
+        <p:txBody>
+          <a:bodyPr wrap="square" anchor="t">
+            <a:spAutoFit/>
+          </a:bodyPr>
+          <a:lstStyle/>
+          <a:p>
+            <a:pPr algn="l">
+              <a:lnSpc>
+                <a:spcPct val="105000"/>
+              </a:lnSpc>
+              <a:spcAft>
+                <a:spcPts val="1000"/>
+              </a:spcAft>
+            </a:pPr>
+            <a:r>
+              <a:rPr sz="1350" b="1">
+                <a:solidFill>
+                  <a:srgbClr val="128C7E"/>
+                </a:solidFill>
+                <a:latin typeface="Calibri"/>
+              </a:rPr>
+              <a:t>•  </a:t>
+            </a:r>
+            <a:r>
+              <a:rPr sz="1350" b="0">
+                <a:solidFill>
+                  <a:srgbClr val="1A242B"/>
+                </a:solidFill>
+                <a:latin typeface="Calibri"/>
+              </a:rPr>
+              <a:t>Provar Eco-Low-Fire sem perda de brancura/brilho</a:t>
+            </a:r>
+          </a:p>
+          <a:p>
+            <a:pPr algn="l">
+              <a:lnSpc>
+                <a:spcPct val="105000"/>
+              </a:lnSpc>
+              <a:spcAft>
+                <a:spcPts val="1000"/>
+              </a:spcAft>
+            </a:pPr>
+            <a:r>
+              <a:rPr sz="1350" b="1">
+                <a:solidFill>
+                  <a:srgbClr val="128C7E"/>
+                </a:solidFill>
+                <a:latin typeface="Calibri"/>
+              </a:rPr>
+              <a:t>•  </a:t>
+            </a:r>
+            <a:r>
+              <a:rPr sz="1350" b="0">
+                <a:solidFill>
+                  <a:srgbClr val="1A242B"/>
+                </a:solidFill>
+                <a:latin typeface="Calibri"/>
+              </a:rPr>
+              <a:t>−30 a −50 °C na temperatura de pico</a:t>
+            </a:r>
+          </a:p>
+          <a:p>
+            <a:pPr algn="l">
+              <a:lnSpc>
+                <a:spcPct val="105000"/>
+              </a:lnSpc>
+              <a:spcAft>
+                <a:spcPts val="1000"/>
+              </a:spcAft>
+            </a:pPr>
+            <a:r>
+              <a:rPr sz="1350" b="1">
+                <a:solidFill>
+                  <a:srgbClr val="128C7E"/>
+                </a:solidFill>
+                <a:latin typeface="Calibri"/>
+              </a:rPr>
+              <a:t>•  </a:t>
+            </a:r>
+            <a:r>
+              <a:rPr sz="1350" b="0">
+                <a:solidFill>
+                  <a:srgbClr val="1A242B"/>
+                </a:solidFill>
+                <a:latin typeface="Calibri"/>
+              </a:rPr>
+              <a:t>≥ 8% de redução medida de energia</a:t>
+            </a:r>
+          </a:p>
+          <a:p>
+            <a:pPr algn="l">
+              <a:lnSpc>
+                <a:spcPct val="105000"/>
+              </a:lnSpc>
+              <a:spcAft>
+                <a:spcPts val="1000"/>
+              </a:spcAft>
+            </a:pPr>
+            <a:r>
+              <a:rPr sz="1350" b="1">
+                <a:solidFill>
+                  <a:srgbClr val="128C7E"/>
+                </a:solidFill>
+                <a:latin typeface="Calibri"/>
+              </a:rPr>
+              <a:t>•  </a:t>
+            </a:r>
+            <a:r>
+              <a:rPr sz="1350" b="0">
+                <a:solidFill>
+                  <a:srgbClr val="1A242B"/>
+                </a:solidFill>
+                <a:latin typeface="Calibri"/>
+              </a:rPr>
+              <a:t>ΔE ≤ 0,5 em 3 lotes consecutivos</a:t>
+            </a:r>
+          </a:p>
+          <a:p>
+            <a:pPr algn="l">
+              <a:lnSpc>
+                <a:spcPct val="105000"/>
+              </a:lnSpc>
+              <a:spcAft>
+                <a:spcPts val="1000"/>
+              </a:spcAft>
+            </a:pPr>
+            <a:r>
+              <a:rPr sz="1350" b="1">
+                <a:solidFill>
+                  <a:srgbClr val="128C7E"/>
+                </a:solidFill>
+                <a:latin typeface="Calibri"/>
+              </a:rPr>
+              <a:t>•  </a:t>
+            </a:r>
+            <a:r>
+              <a:rPr sz="1350" b="0">
+                <a:solidFill>
+                  <a:srgbClr val="1A242B"/>
+                </a:solidFill>
+                <a:latin typeface="Calibri"/>
+              </a:rPr>
+              <a:t>Vencer aqui = certificado de qualidade para todas as contas</a:t>
+            </a:r>
+          </a:p>
+        </p:txBody>
+      </p:sp>
+      <p:sp>
+        <p:nvSpPr>
+          <p:cNvPr id="9" name="Rectangle 8"/>
+          <p:cNvSpPr/>
+          <p:nvPr/>
+        </p:nvSpPr>
+        <p:spPr>
+          <a:xfrm>
+            <a:off x="6172200" y="1783080"/>
+            <a:ext cx="5440680" cy="4023360"/>
+          </a:xfrm>
+          <a:prstGeom prst="rect">
+            <a:avLst/>
+          </a:prstGeom>
+          <a:solidFill>
+            <a:srgbClr val="FFFFFF"/>
+          </a:solidFill>
+          <a:ln>
+            <a:noFill/>
+          </a:ln>
+          <a:effectLst/>
+        </p:spPr>
+        <p:style>
+          <a:lnRef idx="1">
+            <a:schemeClr val="accent1"/>
+          </a:lnRef>
+          <a:fillRef idx="3">
+            <a:schemeClr val="accent1"/>
+          </a:fillRef>
+          <a:effectRef idx="2">
+            <a:schemeClr val="accent1"/>
+          </a:effectRef>
+          <a:fontRef idx="minor">
+            <a:schemeClr val="lt1"/>
+          </a:fontRef>
+        </p:style>
+        <p:txBody>
+          <a:bodyPr rtlCol="0" anchor="ctr"/>
+          <a:lstStyle/>
+          <a:p>
+            <a:pPr algn="ctr"/>
+          </a:p>
+        </p:txBody>
+      </p:sp>
+      <p:sp>
+        <p:nvSpPr>
+          <p:cNvPr id="10" name="Rectangle 9"/>
+          <p:cNvSpPr/>
+          <p:nvPr/>
+        </p:nvSpPr>
+        <p:spPr>
+          <a:xfrm>
+            <a:off x="6172200" y="1783080"/>
+            <a:ext cx="5440680" cy="731520"/>
           </a:xfrm>
           <a:prstGeom prst="rect">
             <a:avLst/>
@@ -5072,14 +4812,75 @@
       </p:sp>
       <p:sp>
         <p:nvSpPr>
-          <p:cNvPr id="7" name="TextBox 6"/>
-          <p:cNvSpPr txBox="1"/>
-          <p:nvPr/>
-        </p:nvSpPr>
-        <p:spPr>
-          <a:xfrm>
-            <a:off x="548640" y="2194560"/>
-            <a:ext cx="3520440" cy="822960"/>
+          <p:cNvPr id="11" name="TextBox 10"/>
+          <p:cNvSpPr txBox="1"/>
+          <p:nvPr/>
+        </p:nvSpPr>
+        <p:spPr>
+          <a:xfrm>
+            <a:off x="6400800" y="1783080"/>
+            <a:ext cx="5029200" cy="731520"/>
+          </a:xfrm>
+          <a:prstGeom prst="rect">
+            <a:avLst/>
+          </a:prstGeom>
+          <a:noFill/>
+        </p:spPr>
+        <p:txBody>
+          <a:bodyPr wrap="square" anchor="ctr">
+            <a:spAutoFit/>
+          </a:bodyPr>
+          <a:lstStyle/>
+          <a:p>
+            <a:pPr algn="l">
+              <a:lnSpc>
+                <a:spcPct val="100000"/>
+              </a:lnSpc>
+              <a:spcAft>
+                <a:spcPts val="200"/>
+              </a:spcAft>
+            </a:pPr>
+            <a:r>
+              <a:rPr sz="1800" b="1">
+                <a:solidFill>
+                  <a:srgbClr val="FFFFFF"/>
+                </a:solidFill>
+                <a:latin typeface="Calibri"/>
+              </a:rPr>
+              <a:t>PILOTO B — Costa Verde</a:t>
+            </a:r>
+          </a:p>
+          <a:p>
+            <a:pPr algn="l">
+              <a:lnSpc>
+                <a:spcPct val="100000"/>
+              </a:lnSpc>
+              <a:spcAft>
+                <a:spcPts val="200"/>
+              </a:spcAft>
+            </a:pPr>
+            <a:r>
+              <a:rPr sz="1100" b="0">
+                <a:solidFill>
+                  <a:srgbClr val="FFFFFF"/>
+                </a:solidFill>
+                <a:latin typeface="Calibri"/>
+              </a:rPr>
+              <a:t>Louça de volume · prova de serviço e SLA</a:t>
+            </a:r>
+          </a:p>
+        </p:txBody>
+      </p:sp>
+      <p:sp>
+        <p:nvSpPr>
+          <p:cNvPr id="12" name="TextBox 11"/>
+          <p:cNvSpPr txBox="1"/>
+          <p:nvPr/>
+        </p:nvSpPr>
+        <p:spPr>
+          <a:xfrm>
+            <a:off x="6400800" y="2743200"/>
+            <a:ext cx="5029200" cy="2926080"/>
           </a:xfrm>
           <a:prstGeom prst="rect">
             <a:avLst/>
@@ -5092,931 +4893,150 @@
           </a:bodyPr>
           <a:lstStyle/>
           <a:p>
-            <a:pPr algn="ctr">
-              <a:lnSpc>
-                <a:spcPct val="100000"/>
-              </a:lnSpc>
-              <a:spcAft>
-                <a:spcPts val="600"/>
-              </a:spcAft>
-            </a:pPr>
-            <a:r>
-              <a:rPr sz="3400" b="1">
+            <a:pPr algn="l">
+              <a:lnSpc>
+                <a:spcPct val="105000"/>
+              </a:lnSpc>
+              <a:spcAft>
+                <a:spcPts val="1000"/>
+              </a:spcAft>
+            </a:pPr>
+            <a:r>
+              <a:rPr sz="1350" b="1">
                 <a:solidFill>
                   <a:srgbClr val="128C7E"/>
                 </a:solidFill>
                 <a:latin typeface="Calibri"/>
               </a:rPr>
-              <a:t>≤ 0,5</a:t>
-            </a:r>
-          </a:p>
-        </p:txBody>
-      </p:sp>
-      <p:sp>
-        <p:nvSpPr>
-          <p:cNvPr id="8" name="TextBox 7"/>
-          <p:cNvSpPr txBox="1"/>
-          <p:nvPr/>
-        </p:nvSpPr>
-        <p:spPr>
-          <a:xfrm>
-            <a:off x="548640" y="3063240"/>
-            <a:ext cx="3520440" cy="457200"/>
-          </a:xfrm>
-          <a:prstGeom prst="rect">
-            <a:avLst/>
-          </a:prstGeom>
-          <a:noFill/>
-        </p:spPr>
-        <p:txBody>
-          <a:bodyPr wrap="square" anchor="t">
-            <a:spAutoFit/>
-          </a:bodyPr>
-          <a:lstStyle/>
-          <a:p>
-            <a:pPr algn="ctr">
-              <a:lnSpc>
-                <a:spcPct val="100000"/>
-              </a:lnSpc>
-              <a:spcAft>
-                <a:spcPts val="600"/>
-              </a:spcAft>
-            </a:pPr>
-            <a:r>
-              <a:rPr sz="1400" b="1">
-                <a:solidFill>
-                  <a:srgbClr val="0E2A47"/>
-                </a:solidFill>
-                <a:latin typeface="Calibri"/>
-              </a:rPr>
-              <a:t>ΔE entre lotes</a:t>
-            </a:r>
-          </a:p>
-        </p:txBody>
-      </p:sp>
-      <p:sp>
-        <p:nvSpPr>
-          <p:cNvPr id="9" name="Rectangle 8"/>
-          <p:cNvSpPr/>
-          <p:nvPr/>
-        </p:nvSpPr>
-        <p:spPr>
-          <a:xfrm>
-            <a:off x="4251960" y="1920240"/>
-            <a:ext cx="3520440" cy="1691640"/>
-          </a:xfrm>
-          <a:prstGeom prst="rect">
-            <a:avLst/>
-          </a:prstGeom>
-          <a:solidFill>
-            <a:srgbClr val="FFFFFF"/>
-          </a:solidFill>
-          <a:ln>
-            <a:noFill/>
-          </a:ln>
-          <a:effectLst/>
-        </p:spPr>
-        <p:style>
-          <a:lnRef idx="1">
-            <a:schemeClr val="accent1"/>
-          </a:lnRef>
-          <a:fillRef idx="3">
-            <a:schemeClr val="accent1"/>
-          </a:fillRef>
-          <a:effectRef idx="2">
-            <a:schemeClr val="accent1"/>
-          </a:effectRef>
-          <a:fontRef idx="minor">
-            <a:schemeClr val="lt1"/>
-          </a:fontRef>
-        </p:style>
-        <p:txBody>
-          <a:bodyPr rtlCol="0" anchor="ctr"/>
-          <a:lstStyle/>
-          <a:p>
-            <a:pPr algn="ctr"/>
-          </a:p>
-        </p:txBody>
-      </p:sp>
-      <p:sp>
-        <p:nvSpPr>
-          <p:cNvPr id="10" name="Rectangle 9"/>
-          <p:cNvSpPr/>
-          <p:nvPr/>
-        </p:nvSpPr>
-        <p:spPr>
-          <a:xfrm>
-            <a:off x="4251960" y="1920240"/>
-            <a:ext cx="3520440" cy="91440"/>
-          </a:xfrm>
-          <a:prstGeom prst="rect">
-            <a:avLst/>
-          </a:prstGeom>
-          <a:solidFill>
-            <a:srgbClr val="E36A1E"/>
-          </a:solidFill>
-          <a:ln>
-            <a:noFill/>
-          </a:ln>
-          <a:effectLst/>
-        </p:spPr>
-        <p:style>
-          <a:lnRef idx="1">
-            <a:schemeClr val="accent1"/>
-          </a:lnRef>
-          <a:fillRef idx="3">
-            <a:schemeClr val="accent1"/>
-          </a:fillRef>
-          <a:effectRef idx="2">
-            <a:schemeClr val="accent1"/>
-          </a:effectRef>
-          <a:fontRef idx="minor">
-            <a:schemeClr val="lt1"/>
-          </a:fontRef>
-        </p:style>
-        <p:txBody>
-          <a:bodyPr rtlCol="0" anchor="ctr"/>
-          <a:lstStyle/>
-          <a:p>
-            <a:pPr algn="ctr"/>
-          </a:p>
-        </p:txBody>
-      </p:sp>
-      <p:sp>
-        <p:nvSpPr>
-          <p:cNvPr id="11" name="TextBox 10"/>
-          <p:cNvSpPr txBox="1"/>
-          <p:nvPr/>
-        </p:nvSpPr>
-        <p:spPr>
-          <a:xfrm>
-            <a:off x="4251960" y="2194560"/>
-            <a:ext cx="3520440" cy="822960"/>
-          </a:xfrm>
-          <a:prstGeom prst="rect">
-            <a:avLst/>
-          </a:prstGeom>
-          <a:noFill/>
-        </p:spPr>
-        <p:txBody>
-          <a:bodyPr wrap="square" anchor="t">
-            <a:spAutoFit/>
-          </a:bodyPr>
-          <a:lstStyle/>
-          <a:p>
-            <a:pPr algn="ctr">
-              <a:lnSpc>
-                <a:spcPct val="100000"/>
-              </a:lnSpc>
-              <a:spcAft>
-                <a:spcPts val="600"/>
-              </a:spcAft>
-            </a:pPr>
-            <a:r>
-              <a:rPr sz="3400" b="1">
-                <a:solidFill>
-                  <a:srgbClr val="E36A1E"/>
-                </a:solidFill>
-                <a:latin typeface="Calibri"/>
-              </a:rPr>
-              <a:t>8–12%</a:t>
-            </a:r>
-          </a:p>
-        </p:txBody>
-      </p:sp>
-      <p:sp>
-        <p:nvSpPr>
-          <p:cNvPr id="12" name="TextBox 11"/>
-          <p:cNvSpPr txBox="1"/>
-          <p:nvPr/>
-        </p:nvSpPr>
-        <p:spPr>
-          <a:xfrm>
-            <a:off x="4251960" y="3063240"/>
-            <a:ext cx="3520440" cy="457200"/>
-          </a:xfrm>
-          <a:prstGeom prst="rect">
-            <a:avLst/>
-          </a:prstGeom>
-          <a:noFill/>
-        </p:spPr>
-        <p:txBody>
-          <a:bodyPr wrap="square" anchor="t">
-            <a:spAutoFit/>
-          </a:bodyPr>
-          <a:lstStyle/>
-          <a:p>
-            <a:pPr algn="ctr">
-              <a:lnSpc>
-                <a:spcPct val="100000"/>
-              </a:lnSpc>
-              <a:spcAft>
-                <a:spcPts val="600"/>
-              </a:spcAft>
-            </a:pPr>
-            <a:r>
-              <a:rPr sz="1400" b="1">
-                <a:solidFill>
-                  <a:srgbClr val="0E2A47"/>
-                </a:solidFill>
-                <a:latin typeface="Calibri"/>
-              </a:rPr>
-              <a:t>Redução de energia</a:t>
-            </a:r>
-          </a:p>
-        </p:txBody>
-      </p:sp>
-      <p:sp>
-        <p:nvSpPr>
-          <p:cNvPr id="13" name="Rectangle 12"/>
-          <p:cNvSpPr/>
-          <p:nvPr/>
-        </p:nvSpPr>
-        <p:spPr>
-          <a:xfrm>
-            <a:off x="7955280" y="1920240"/>
-            <a:ext cx="3520440" cy="1691640"/>
-          </a:xfrm>
-          <a:prstGeom prst="rect">
-            <a:avLst/>
-          </a:prstGeom>
-          <a:solidFill>
-            <a:srgbClr val="FFFFFF"/>
-          </a:solidFill>
-          <a:ln>
-            <a:noFill/>
-          </a:ln>
-          <a:effectLst/>
-        </p:spPr>
-        <p:style>
-          <a:lnRef idx="1">
-            <a:schemeClr val="accent1"/>
-          </a:lnRef>
-          <a:fillRef idx="3">
-            <a:schemeClr val="accent1"/>
-          </a:fillRef>
-          <a:effectRef idx="2">
-            <a:schemeClr val="accent1"/>
-          </a:effectRef>
-          <a:fontRef idx="minor">
-            <a:schemeClr val="lt1"/>
-          </a:fontRef>
-        </p:style>
-        <p:txBody>
-          <a:bodyPr rtlCol="0" anchor="ctr"/>
-          <a:lstStyle/>
-          <a:p>
-            <a:pPr algn="ctr"/>
-          </a:p>
-        </p:txBody>
-      </p:sp>
-      <p:sp>
-        <p:nvSpPr>
-          <p:cNvPr id="14" name="Rectangle 13"/>
-          <p:cNvSpPr/>
-          <p:nvPr/>
-        </p:nvSpPr>
-        <p:spPr>
-          <a:xfrm>
-            <a:off x="7955280" y="1920240"/>
-            <a:ext cx="3520440" cy="91440"/>
-          </a:xfrm>
-          <a:prstGeom prst="rect">
-            <a:avLst/>
-          </a:prstGeom>
-          <a:solidFill>
-            <a:srgbClr val="0E2A47"/>
-          </a:solidFill>
-          <a:ln>
-            <a:noFill/>
-          </a:ln>
-          <a:effectLst/>
-        </p:spPr>
-        <p:style>
-          <a:lnRef idx="1">
-            <a:schemeClr val="accent1"/>
-          </a:lnRef>
-          <a:fillRef idx="3">
-            <a:schemeClr val="accent1"/>
-          </a:fillRef>
-          <a:effectRef idx="2">
-            <a:schemeClr val="accent1"/>
-          </a:effectRef>
-          <a:fontRef idx="minor">
-            <a:schemeClr val="lt1"/>
-          </a:fontRef>
-        </p:style>
-        <p:txBody>
-          <a:bodyPr rtlCol="0" anchor="ctr"/>
-          <a:lstStyle/>
-          <a:p>
-            <a:pPr algn="ctr"/>
-          </a:p>
-        </p:txBody>
-      </p:sp>
-      <p:sp>
-        <p:nvSpPr>
-          <p:cNvPr id="15" name="TextBox 14"/>
-          <p:cNvSpPr txBox="1"/>
-          <p:nvPr/>
-        </p:nvSpPr>
-        <p:spPr>
-          <a:xfrm>
-            <a:off x="7955280" y="2194560"/>
-            <a:ext cx="3520440" cy="822960"/>
-          </a:xfrm>
-          <a:prstGeom prst="rect">
-            <a:avLst/>
-          </a:prstGeom>
-          <a:noFill/>
-        </p:spPr>
-        <p:txBody>
-          <a:bodyPr wrap="square" anchor="t">
-            <a:spAutoFit/>
-          </a:bodyPr>
-          <a:lstStyle/>
-          <a:p>
-            <a:pPr algn="ctr">
-              <a:lnSpc>
-                <a:spcPct val="100000"/>
-              </a:lnSpc>
-              <a:spcAft>
-                <a:spcPts val="600"/>
-              </a:spcAft>
-            </a:pPr>
-            <a:r>
-              <a:rPr sz="3400" b="1">
-                <a:solidFill>
-                  <a:srgbClr val="0E2A47"/>
-                </a:solidFill>
-                <a:latin typeface="Calibri"/>
-              </a:rPr>
-              <a:t>≤ 10 dias</a:t>
-            </a:r>
-          </a:p>
-        </p:txBody>
-      </p:sp>
-      <p:sp>
-        <p:nvSpPr>
-          <p:cNvPr id="16" name="TextBox 15"/>
-          <p:cNvSpPr txBox="1"/>
-          <p:nvPr/>
-        </p:nvSpPr>
-        <p:spPr>
-          <a:xfrm>
-            <a:off x="7955280" y="3063240"/>
-            <a:ext cx="3520440" cy="457200"/>
-          </a:xfrm>
-          <a:prstGeom prst="rect">
-            <a:avLst/>
-          </a:prstGeom>
-          <a:noFill/>
-        </p:spPr>
-        <p:txBody>
-          <a:bodyPr wrap="square" anchor="t">
-            <a:spAutoFit/>
-          </a:bodyPr>
-          <a:lstStyle/>
-          <a:p>
-            <a:pPr algn="ctr">
-              <a:lnSpc>
-                <a:spcPct val="100000"/>
-              </a:lnSpc>
-              <a:spcAft>
-                <a:spcPts val="600"/>
-              </a:spcAft>
-            </a:pPr>
-            <a:r>
-              <a:rPr sz="1400" b="1">
-                <a:solidFill>
-                  <a:srgbClr val="0E2A47"/>
-                </a:solidFill>
-                <a:latin typeface="Calibri"/>
-              </a:rPr>
-              <a:t>Prazo de amostra</a:t>
-            </a:r>
-          </a:p>
-        </p:txBody>
-      </p:sp>
-      <p:sp>
-        <p:nvSpPr>
-          <p:cNvPr id="17" name="Rectangle 16"/>
-          <p:cNvSpPr/>
-          <p:nvPr/>
-        </p:nvSpPr>
-        <p:spPr>
-          <a:xfrm>
-            <a:off x="548640" y="3840480"/>
-            <a:ext cx="3520440" cy="1691640"/>
-          </a:xfrm>
-          <a:prstGeom prst="rect">
-            <a:avLst/>
-          </a:prstGeom>
-          <a:solidFill>
-            <a:srgbClr val="FFFFFF"/>
-          </a:solidFill>
-          <a:ln>
-            <a:noFill/>
-          </a:ln>
-          <a:effectLst/>
-        </p:spPr>
-        <p:style>
-          <a:lnRef idx="1">
-            <a:schemeClr val="accent1"/>
-          </a:lnRef>
-          <a:fillRef idx="3">
-            <a:schemeClr val="accent1"/>
-          </a:fillRef>
-          <a:effectRef idx="2">
-            <a:schemeClr val="accent1"/>
-          </a:effectRef>
-          <a:fontRef idx="minor">
-            <a:schemeClr val="lt1"/>
-          </a:fontRef>
-        </p:style>
-        <p:txBody>
-          <a:bodyPr rtlCol="0" anchor="ctr"/>
-          <a:lstStyle/>
-          <a:p>
-            <a:pPr algn="ctr"/>
-          </a:p>
-        </p:txBody>
-      </p:sp>
-      <p:sp>
-        <p:nvSpPr>
-          <p:cNvPr id="18" name="Rectangle 17"/>
-          <p:cNvSpPr/>
-          <p:nvPr/>
-        </p:nvSpPr>
-        <p:spPr>
-          <a:xfrm>
-            <a:off x="548640" y="3840480"/>
-            <a:ext cx="3520440" cy="91440"/>
-          </a:xfrm>
-          <a:prstGeom prst="rect">
-            <a:avLst/>
-          </a:prstGeom>
-          <a:solidFill>
-            <a:srgbClr val="128C7E"/>
-          </a:solidFill>
-          <a:ln>
-            <a:noFill/>
-          </a:ln>
-          <a:effectLst/>
-        </p:spPr>
-        <p:style>
-          <a:lnRef idx="1">
-            <a:schemeClr val="accent1"/>
-          </a:lnRef>
-          <a:fillRef idx="3">
-            <a:schemeClr val="accent1"/>
-          </a:fillRef>
-          <a:effectRef idx="2">
-            <a:schemeClr val="accent1"/>
-          </a:effectRef>
-          <a:fontRef idx="minor">
-            <a:schemeClr val="lt1"/>
-          </a:fontRef>
-        </p:style>
-        <p:txBody>
-          <a:bodyPr rtlCol="0" anchor="ctr"/>
-          <a:lstStyle/>
-          <a:p>
-            <a:pPr algn="ctr"/>
-          </a:p>
-        </p:txBody>
-      </p:sp>
-      <p:sp>
-        <p:nvSpPr>
-          <p:cNvPr id="19" name="TextBox 18"/>
-          <p:cNvSpPr txBox="1"/>
-          <p:nvPr/>
-        </p:nvSpPr>
-        <p:spPr>
-          <a:xfrm>
-            <a:off x="548640" y="4114800"/>
-            <a:ext cx="3520440" cy="822960"/>
-          </a:xfrm>
-          <a:prstGeom prst="rect">
-            <a:avLst/>
-          </a:prstGeom>
-          <a:noFill/>
-        </p:spPr>
-        <p:txBody>
-          <a:bodyPr wrap="square" anchor="t">
-            <a:spAutoFit/>
-          </a:bodyPr>
-          <a:lstStyle/>
-          <a:p>
-            <a:pPr algn="ctr">
-              <a:lnSpc>
-                <a:spcPct val="100000"/>
-              </a:lnSpc>
-              <a:spcAft>
-                <a:spcPts val="600"/>
-              </a:spcAft>
-            </a:pPr>
-            <a:r>
-              <a:rPr sz="3400" b="1">
+              <a:t>•  </a:t>
+            </a:r>
+            <a:r>
+              <a:rPr sz="1350" b="0">
+                <a:solidFill>
+                  <a:srgbClr val="1A242B"/>
+                </a:solidFill>
+                <a:latin typeface="Calibri"/>
+              </a:rPr>
+              <a:t>SLA de consistência + serviço no local 24–48h</a:t>
+            </a:r>
+          </a:p>
+          <a:p>
+            <a:pPr algn="l">
+              <a:lnSpc>
+                <a:spcPct val="105000"/>
+              </a:lnSpc>
+              <a:spcAft>
+                <a:spcPts val="1000"/>
+              </a:spcAft>
+            </a:pPr>
+            <a:r>
+              <a:rPr sz="1350" b="1">
                 <a:solidFill>
                   <a:srgbClr val="128C7E"/>
                 </a:solidFill>
                 <a:latin typeface="Calibri"/>
               </a:rPr>
-              <a:t>24–48h</a:t>
-            </a:r>
-          </a:p>
-        </p:txBody>
-      </p:sp>
-      <p:sp>
-        <p:nvSpPr>
-          <p:cNvPr id="20" name="TextBox 19"/>
-          <p:cNvSpPr txBox="1"/>
-          <p:nvPr/>
-        </p:nvSpPr>
-        <p:spPr>
-          <a:xfrm>
-            <a:off x="548640" y="4983480"/>
-            <a:ext cx="3520440" cy="457200"/>
-          </a:xfrm>
-          <a:prstGeom prst="rect">
-            <a:avLst/>
-          </a:prstGeom>
-          <a:noFill/>
-        </p:spPr>
-        <p:txBody>
-          <a:bodyPr wrap="square" anchor="t">
-            <a:spAutoFit/>
-          </a:bodyPr>
-          <a:lstStyle/>
-          <a:p>
-            <a:pPr algn="ctr">
-              <a:lnSpc>
-                <a:spcPct val="100000"/>
-              </a:lnSpc>
-              <a:spcAft>
-                <a:spcPts val="600"/>
-              </a:spcAft>
-            </a:pPr>
-            <a:r>
-              <a:rPr sz="1400" b="1">
-                <a:solidFill>
-                  <a:srgbClr val="0E2A47"/>
-                </a:solidFill>
-                <a:latin typeface="Calibri"/>
-              </a:rPr>
-              <a:t>Resposta no local</a:t>
-            </a:r>
-          </a:p>
-        </p:txBody>
-      </p:sp>
-      <p:sp>
-        <p:nvSpPr>
-          <p:cNvPr id="21" name="Rectangle 20"/>
-          <p:cNvSpPr/>
-          <p:nvPr/>
-        </p:nvSpPr>
-        <p:spPr>
-          <a:xfrm>
-            <a:off x="4251960" y="3840480"/>
-            <a:ext cx="3520440" cy="1691640"/>
-          </a:xfrm>
-          <a:prstGeom prst="rect">
-            <a:avLst/>
-          </a:prstGeom>
-          <a:solidFill>
-            <a:srgbClr val="FFFFFF"/>
-          </a:solidFill>
-          <a:ln>
-            <a:noFill/>
-          </a:ln>
-          <a:effectLst/>
-        </p:spPr>
-        <p:style>
-          <a:lnRef idx="1">
-            <a:schemeClr val="accent1"/>
-          </a:lnRef>
-          <a:fillRef idx="3">
-            <a:schemeClr val="accent1"/>
-          </a:fillRef>
-          <a:effectRef idx="2">
-            <a:schemeClr val="accent1"/>
-          </a:effectRef>
-          <a:fontRef idx="minor">
-            <a:schemeClr val="lt1"/>
-          </a:fontRef>
-        </p:style>
-        <p:txBody>
-          <a:bodyPr rtlCol="0" anchor="ctr"/>
-          <a:lstStyle/>
-          <a:p>
-            <a:pPr algn="ctr"/>
-          </a:p>
-        </p:txBody>
-      </p:sp>
-      <p:sp>
-        <p:nvSpPr>
-          <p:cNvPr id="22" name="Rectangle 21"/>
-          <p:cNvSpPr/>
-          <p:nvPr/>
-        </p:nvSpPr>
-        <p:spPr>
-          <a:xfrm>
-            <a:off x="4251960" y="3840480"/>
-            <a:ext cx="3520440" cy="91440"/>
-          </a:xfrm>
-          <a:prstGeom prst="rect">
-            <a:avLst/>
-          </a:prstGeom>
-          <a:solidFill>
-            <a:srgbClr val="E36A1E"/>
-          </a:solidFill>
-          <a:ln>
-            <a:noFill/>
-          </a:ln>
-          <a:effectLst/>
-        </p:spPr>
-        <p:style>
-          <a:lnRef idx="1">
-            <a:schemeClr val="accent1"/>
-          </a:lnRef>
-          <a:fillRef idx="3">
-            <a:schemeClr val="accent1"/>
-          </a:fillRef>
-          <a:effectRef idx="2">
-            <a:schemeClr val="accent1"/>
-          </a:effectRef>
-          <a:fontRef idx="minor">
-            <a:schemeClr val="lt1"/>
-          </a:fontRef>
-        </p:style>
-        <p:txBody>
-          <a:bodyPr rtlCol="0" anchor="ctr"/>
-          <a:lstStyle/>
-          <a:p>
-            <a:pPr algn="ctr"/>
-          </a:p>
-        </p:txBody>
-      </p:sp>
-      <p:sp>
-        <p:nvSpPr>
-          <p:cNvPr id="23" name="TextBox 22"/>
-          <p:cNvSpPr txBox="1"/>
-          <p:nvPr/>
-        </p:nvSpPr>
-        <p:spPr>
-          <a:xfrm>
-            <a:off x="4251960" y="4114800"/>
-            <a:ext cx="3520440" cy="822960"/>
-          </a:xfrm>
-          <a:prstGeom prst="rect">
-            <a:avLst/>
-          </a:prstGeom>
-          <a:noFill/>
-        </p:spPr>
-        <p:txBody>
-          <a:bodyPr wrap="square" anchor="t">
-            <a:spAutoFit/>
-          </a:bodyPr>
-          <a:lstStyle/>
-          <a:p>
-            <a:pPr algn="ctr">
-              <a:lnSpc>
-                <a:spcPct val="100000"/>
-              </a:lnSpc>
-              <a:spcAft>
-                <a:spcPts val="600"/>
-              </a:spcAft>
-            </a:pPr>
-            <a:r>
-              <a:rPr sz="3400" b="1">
-                <a:solidFill>
-                  <a:srgbClr val="E36A1E"/>
-                </a:solidFill>
-                <a:latin typeface="Calibri"/>
-              </a:rPr>
-              <a:t>≥ 60%</a:t>
-            </a:r>
-          </a:p>
-        </p:txBody>
-      </p:sp>
-      <p:sp>
-        <p:nvSpPr>
-          <p:cNvPr id="24" name="TextBox 23"/>
-          <p:cNvSpPr txBox="1"/>
-          <p:nvPr/>
-        </p:nvSpPr>
-        <p:spPr>
-          <a:xfrm>
-            <a:off x="4251960" y="4983480"/>
-            <a:ext cx="3520440" cy="457200"/>
-          </a:xfrm>
-          <a:prstGeom prst="rect">
-            <a:avLst/>
-          </a:prstGeom>
-          <a:noFill/>
-        </p:spPr>
-        <p:txBody>
-          <a:bodyPr wrap="square" anchor="t">
-            <a:spAutoFit/>
-          </a:bodyPr>
-          <a:lstStyle/>
-          <a:p>
-            <a:pPr algn="ctr">
-              <a:lnSpc>
-                <a:spcPct val="100000"/>
-              </a:lnSpc>
-              <a:spcAft>
-                <a:spcPts val="600"/>
-              </a:spcAft>
-            </a:pPr>
-            <a:r>
-              <a:rPr sz="1400" b="1">
-                <a:solidFill>
-                  <a:srgbClr val="0E2A47"/>
-                </a:solidFill>
-                <a:latin typeface="Calibri"/>
-              </a:rPr>
-              <a:t>Conversão piloto→contrato</a:t>
-            </a:r>
-          </a:p>
-        </p:txBody>
-      </p:sp>
-      <p:sp>
-        <p:nvSpPr>
-          <p:cNvPr id="25" name="Rectangle 24"/>
-          <p:cNvSpPr/>
-          <p:nvPr/>
-        </p:nvSpPr>
-        <p:spPr>
-          <a:xfrm>
-            <a:off x="7955280" y="3840480"/>
-            <a:ext cx="3520440" cy="1691640"/>
-          </a:xfrm>
-          <a:prstGeom prst="rect">
-            <a:avLst/>
-          </a:prstGeom>
-          <a:solidFill>
-            <a:srgbClr val="FFFFFF"/>
-          </a:solidFill>
-          <a:ln>
-            <a:noFill/>
-          </a:ln>
-          <a:effectLst/>
-        </p:spPr>
-        <p:style>
-          <a:lnRef idx="1">
-            <a:schemeClr val="accent1"/>
-          </a:lnRef>
-          <a:fillRef idx="3">
-            <a:schemeClr val="accent1"/>
-          </a:fillRef>
-          <a:effectRef idx="2">
-            <a:schemeClr val="accent1"/>
-          </a:effectRef>
-          <a:fontRef idx="minor">
-            <a:schemeClr val="lt1"/>
-          </a:fontRef>
-        </p:style>
-        <p:txBody>
-          <a:bodyPr rtlCol="0" anchor="ctr"/>
-          <a:lstStyle/>
-          <a:p>
-            <a:pPr algn="ctr"/>
-          </a:p>
-        </p:txBody>
-      </p:sp>
-      <p:sp>
-        <p:nvSpPr>
-          <p:cNvPr id="26" name="Rectangle 25"/>
-          <p:cNvSpPr/>
-          <p:nvPr/>
-        </p:nvSpPr>
-        <p:spPr>
-          <a:xfrm>
-            <a:off x="7955280" y="3840480"/>
-            <a:ext cx="3520440" cy="91440"/>
-          </a:xfrm>
-          <a:prstGeom prst="rect">
-            <a:avLst/>
-          </a:prstGeom>
-          <a:solidFill>
-            <a:srgbClr val="0E2A47"/>
-          </a:solidFill>
-          <a:ln>
-            <a:noFill/>
-          </a:ln>
-          <a:effectLst/>
-        </p:spPr>
-        <p:style>
-          <a:lnRef idx="1">
-            <a:schemeClr val="accent1"/>
-          </a:lnRef>
-          <a:fillRef idx="3">
-            <a:schemeClr val="accent1"/>
-          </a:fillRef>
-          <a:effectRef idx="2">
-            <a:schemeClr val="accent1"/>
-          </a:effectRef>
-          <a:fontRef idx="minor">
-            <a:schemeClr val="lt1"/>
-          </a:fontRef>
-        </p:style>
-        <p:txBody>
-          <a:bodyPr rtlCol="0" anchor="ctr"/>
-          <a:lstStyle/>
-          <a:p>
-            <a:pPr algn="ctr"/>
-          </a:p>
-        </p:txBody>
-      </p:sp>
-      <p:sp>
-        <p:nvSpPr>
-          <p:cNvPr id="27" name="TextBox 26"/>
-          <p:cNvSpPr txBox="1"/>
-          <p:nvPr/>
-        </p:nvSpPr>
-        <p:spPr>
-          <a:xfrm>
-            <a:off x="7955280" y="4114800"/>
-            <a:ext cx="3520440" cy="822960"/>
-          </a:xfrm>
-          <a:prstGeom prst="rect">
-            <a:avLst/>
-          </a:prstGeom>
-          <a:noFill/>
-        </p:spPr>
-        <p:txBody>
-          <a:bodyPr wrap="square" anchor="t">
-            <a:spAutoFit/>
-          </a:bodyPr>
-          <a:lstStyle/>
-          <a:p>
-            <a:pPr algn="ctr">
-              <a:lnSpc>
-                <a:spcPct val="100000"/>
-              </a:lnSpc>
-              <a:spcAft>
-                <a:spcPts val="600"/>
-              </a:spcAft>
-            </a:pPr>
-            <a:r>
-              <a:rPr sz="3400" b="1">
-                <a:solidFill>
-                  <a:srgbClr val="0E2A47"/>
-                </a:solidFill>
-                <a:latin typeface="Calibri"/>
-              </a:rPr>
-              <a:t>−20–35%</a:t>
-            </a:r>
-          </a:p>
-        </p:txBody>
-      </p:sp>
-      <p:sp>
-        <p:nvSpPr>
-          <p:cNvPr id="28" name="TextBox 27"/>
-          <p:cNvSpPr txBox="1"/>
-          <p:nvPr/>
-        </p:nvSpPr>
-        <p:spPr>
-          <a:xfrm>
-            <a:off x="7955280" y="4983480"/>
-            <a:ext cx="3520440" cy="457200"/>
-          </a:xfrm>
-          <a:prstGeom prst="rect">
-            <a:avLst/>
-          </a:prstGeom>
-          <a:noFill/>
-        </p:spPr>
-        <p:txBody>
-          <a:bodyPr wrap="square" anchor="t">
-            <a:spAutoFit/>
-          </a:bodyPr>
-          <a:lstStyle/>
-          <a:p>
-            <a:pPr algn="ctr">
-              <a:lnSpc>
-                <a:spcPct val="100000"/>
-              </a:lnSpc>
-              <a:spcAft>
-                <a:spcPts val="600"/>
-              </a:spcAft>
-            </a:pPr>
-            <a:r>
-              <a:rPr sz="1400" b="1">
-                <a:solidFill>
-                  <a:srgbClr val="0E2A47"/>
-                </a:solidFill>
-                <a:latin typeface="Calibri"/>
-              </a:rPr>
-              <a:t>Custo-de-servir / I&amp;D</a:t>
-            </a:r>
-          </a:p>
-        </p:txBody>
-      </p:sp>
-      <p:sp>
-        <p:nvSpPr>
-          <p:cNvPr id="29" name="TextBox 28"/>
+              <a:t>•  </a:t>
+            </a:r>
+            <a:r>
+              <a:rPr sz="1350" b="0">
+                <a:solidFill>
+                  <a:srgbClr val="1A242B"/>
+                </a:solidFill>
+                <a:latin typeface="Calibri"/>
+              </a:rPr>
+              <a:t>Taxa de defeitos ↓ (alvo −20%)</a:t>
+            </a:r>
+          </a:p>
+          <a:p>
+            <a:pPr algn="l">
+              <a:lnSpc>
+                <a:spcPct val="105000"/>
+              </a:lnSpc>
+              <a:spcAft>
+                <a:spcPts val="1000"/>
+              </a:spcAft>
+            </a:pPr>
+            <a:r>
+              <a:rPr sz="1350" b="1">
+                <a:solidFill>
+                  <a:srgbClr val="128C7E"/>
+                </a:solidFill>
+                <a:latin typeface="Calibri"/>
+              </a:rPr>
+              <a:t>•  </a:t>
+            </a:r>
+            <a:r>
+              <a:rPr sz="1350" b="0">
+                <a:solidFill>
+                  <a:srgbClr val="1A242B"/>
+                </a:solidFill>
+                <a:latin typeface="Calibri"/>
+              </a:rPr>
+              <a:t>Energia/peça ↓ 8–12%</a:t>
+            </a:r>
+          </a:p>
+          <a:p>
+            <a:pPr algn="l">
+              <a:lnSpc>
+                <a:spcPct val="105000"/>
+              </a:lnSpc>
+              <a:spcAft>
+                <a:spcPts val="1000"/>
+              </a:spcAft>
+            </a:pPr>
+            <a:r>
+              <a:rPr sz="1350" b="1">
+                <a:solidFill>
+                  <a:srgbClr val="128C7E"/>
+                </a:solidFill>
+                <a:latin typeface="Calibri"/>
+              </a:rPr>
+              <a:t>•  </a:t>
+            </a:r>
+            <a:r>
+              <a:rPr sz="1350" b="0">
+                <a:solidFill>
+                  <a:srgbClr val="1A242B"/>
+                </a:solidFill>
+                <a:latin typeface="Calibri"/>
+              </a:rPr>
+              <a:t>Resposta do engenheiro ≤ 48h registada</a:t>
+            </a:r>
+          </a:p>
+          <a:p>
+            <a:pPr algn="l">
+              <a:lnSpc>
+                <a:spcPct val="105000"/>
+              </a:lnSpc>
+              <a:spcAft>
+                <a:spcPts val="1000"/>
+              </a:spcAft>
+            </a:pPr>
+            <a:r>
+              <a:rPr sz="1350" b="1">
+                <a:solidFill>
+                  <a:srgbClr val="128C7E"/>
+                </a:solidFill>
+                <a:latin typeface="Calibri"/>
+              </a:rPr>
+              <a:t>•  </a:t>
+            </a:r>
+            <a:r>
+              <a:rPr sz="1350" b="0">
+                <a:solidFill>
+                  <a:srgbClr val="1A242B"/>
+                </a:solidFill>
+                <a:latin typeface="Calibri"/>
+              </a:rPr>
+              <a:t>Poupança em €/ano validada pela equipa de processo</a:t>
+            </a:r>
+          </a:p>
+        </p:txBody>
+      </p:sp>
+      <p:sp>
+        <p:nvSpPr>
+          <p:cNvPr id="13" name="TextBox 12"/>
           <p:cNvSpPr txBox="1"/>
           <p:nvPr/>
         </p:nvSpPr>
@@ -6058,7 +5078,7 @@
       </p:sp>
       <p:sp>
         <p:nvSpPr>
-          <p:cNvPr id="30" name="TextBox 29"/>
+          <p:cNvPr id="14" name="TextBox 13"/>
           <p:cNvSpPr txBox="1"/>
           <p:nvPr/>
         </p:nvSpPr>
@@ -6107,6 +5127,2726 @@
 </file>
 
 <file path=ppt/slides/slide12.xml><?xml version="1.0" encoding="utf-8"?>
+<p:sld xmlns:a="http://schemas.openxmlformats.org/drawingml/2006/main" xmlns:p="http://schemas.openxmlformats.org/presentationml/2006/main" xmlns:r="http://schemas.openxmlformats.org/officeDocument/2006/relationships">
+  <p:cSld>
+    <p:bg>
+      <p:bgPr>
+        <a:solidFill>
+          <a:srgbClr val="FFFFFF"/>
+        </a:solidFill>
+        <a:effectLst/>
+      </p:bgPr>
+    </p:bg>
+    <p:spTree>
+      <p:nvGrpSpPr>
+        <p:cNvPr id="1" name=""/>
+        <p:cNvGrpSpPr/>
+        <p:nvPr/>
+      </p:nvGrpSpPr>
+      <p:grpSpPr/>
+      <p:sp>
+        <p:nvSpPr>
+          <p:cNvPr id="2" name="Rectangle 1"/>
+          <p:cNvSpPr/>
+          <p:nvPr/>
+        </p:nvSpPr>
+        <p:spPr>
+          <a:xfrm>
+            <a:off x="0" y="0"/>
+            <a:ext cx="164592" cy="6858000"/>
+          </a:xfrm>
+          <a:prstGeom prst="rect">
+            <a:avLst/>
+          </a:prstGeom>
+          <a:solidFill>
+            <a:srgbClr val="E36A1E"/>
+          </a:solidFill>
+          <a:ln>
+            <a:noFill/>
+          </a:ln>
+          <a:effectLst/>
+        </p:spPr>
+        <p:style>
+          <a:lnRef idx="1">
+            <a:schemeClr val="accent1"/>
+          </a:lnRef>
+          <a:fillRef idx="3">
+            <a:schemeClr val="accent1"/>
+          </a:fillRef>
+          <a:effectRef idx="2">
+            <a:schemeClr val="accent1"/>
+          </a:effectRef>
+          <a:fontRef idx="minor">
+            <a:schemeClr val="lt1"/>
+          </a:fontRef>
+        </p:style>
+        <p:txBody>
+          <a:bodyPr rtlCol="0" anchor="ctr"/>
+          <a:lstStyle/>
+          <a:p>
+            <a:pPr algn="ctr"/>
+          </a:p>
+        </p:txBody>
+      </p:sp>
+      <p:sp>
+        <p:nvSpPr>
+          <p:cNvPr id="3" name="TextBox 2"/>
+          <p:cNvSpPr txBox="1"/>
+          <p:nvPr/>
+        </p:nvSpPr>
+        <p:spPr>
+          <a:xfrm>
+            <a:off x="548640" y="411480"/>
+            <a:ext cx="10972800" cy="365760"/>
+          </a:xfrm>
+          <a:prstGeom prst="rect">
+            <a:avLst/>
+          </a:prstGeom>
+          <a:noFill/>
+        </p:spPr>
+        <p:txBody>
+          <a:bodyPr wrap="square" anchor="t">
+            <a:spAutoFit/>
+          </a:bodyPr>
+          <a:lstStyle/>
+          <a:p>
+            <a:pPr algn="l">
+              <a:lnSpc>
+                <a:spcPct val="100000"/>
+              </a:lnSpc>
+              <a:spcAft>
+                <a:spcPts val="600"/>
+              </a:spcAft>
+            </a:pPr>
+            <a:r>
+              <a:rPr sz="1300" b="1">
+                <a:solidFill>
+                  <a:srgbClr val="128C7E"/>
+                </a:solidFill>
+                <a:latin typeface="Calibri"/>
+              </a:rPr>
+              <a:t>8. EXECUÇÃO</a:t>
+            </a:r>
+          </a:p>
+        </p:txBody>
+      </p:sp>
+      <p:sp>
+        <p:nvSpPr>
+          <p:cNvPr id="4" name="TextBox 3"/>
+          <p:cNvSpPr txBox="1"/>
+          <p:nvPr/>
+        </p:nvSpPr>
+        <p:spPr>
+          <a:xfrm>
+            <a:off x="548640" y="777240"/>
+            <a:ext cx="11064240" cy="822960"/>
+          </a:xfrm>
+          <a:prstGeom prst="rect">
+            <a:avLst/>
+          </a:prstGeom>
+          <a:noFill/>
+        </p:spPr>
+        <p:txBody>
+          <a:bodyPr wrap="square" anchor="t">
+            <a:spAutoFit/>
+          </a:bodyPr>
+          <a:lstStyle/>
+          <a:p>
+            <a:pPr algn="l">
+              <a:lnSpc>
+                <a:spcPct val="100000"/>
+              </a:lnSpc>
+              <a:spcAft>
+                <a:spcPts val="600"/>
+              </a:spcAft>
+            </a:pPr>
+            <a:r>
+              <a:rPr sz="3000" b="1">
+                <a:solidFill>
+                  <a:srgbClr val="0E2A47"/>
+                </a:solidFill>
+                <a:latin typeface="Calibri"/>
+              </a:rPr>
+              <a:t>Plano de execução a 24 meses</a:t>
+            </a:r>
+          </a:p>
+        </p:txBody>
+      </p:sp>
+      <p:sp>
+        <p:nvSpPr>
+          <p:cNvPr id="5" name="Rectangle 4"/>
+          <p:cNvSpPr/>
+          <p:nvPr/>
+        </p:nvSpPr>
+        <p:spPr>
+          <a:xfrm>
+            <a:off x="548640" y="1783080"/>
+            <a:ext cx="2697480" cy="1051560"/>
+          </a:xfrm>
+          <a:prstGeom prst="rect">
+            <a:avLst/>
+          </a:prstGeom>
+          <a:solidFill>
+            <a:srgbClr val="128C7E"/>
+          </a:solidFill>
+          <a:ln>
+            <a:noFill/>
+          </a:ln>
+          <a:effectLst/>
+        </p:spPr>
+        <p:style>
+          <a:lnRef idx="1">
+            <a:schemeClr val="accent1"/>
+          </a:lnRef>
+          <a:fillRef idx="3">
+            <a:schemeClr val="accent1"/>
+          </a:fillRef>
+          <a:effectRef idx="2">
+            <a:schemeClr val="accent1"/>
+          </a:effectRef>
+          <a:fontRef idx="minor">
+            <a:schemeClr val="lt1"/>
+          </a:fontRef>
+        </p:style>
+        <p:txBody>
+          <a:bodyPr rtlCol="0" anchor="ctr"/>
+          <a:lstStyle/>
+          <a:p>
+            <a:pPr algn="ctr"/>
+          </a:p>
+        </p:txBody>
+      </p:sp>
+      <p:sp>
+        <p:nvSpPr>
+          <p:cNvPr id="6" name="TextBox 5"/>
+          <p:cNvSpPr txBox="1"/>
+          <p:nvPr/>
+        </p:nvSpPr>
+        <p:spPr>
+          <a:xfrm>
+            <a:off x="548640" y="1783080"/>
+            <a:ext cx="2697480" cy="1051560"/>
+          </a:xfrm>
+          <a:prstGeom prst="rect">
+            <a:avLst/>
+          </a:prstGeom>
+          <a:noFill/>
+        </p:spPr>
+        <p:txBody>
+          <a:bodyPr wrap="square" anchor="ctr">
+            <a:spAutoFit/>
+          </a:bodyPr>
+          <a:lstStyle/>
+          <a:p>
+            <a:pPr algn="ctr">
+              <a:lnSpc>
+                <a:spcPct val="100000"/>
+              </a:lnSpc>
+              <a:spcAft>
+                <a:spcPts val="100"/>
+              </a:spcAft>
+            </a:pPr>
+            <a:r>
+              <a:rPr sz="1400" b="1">
+                <a:solidFill>
+                  <a:srgbClr val="FFFFFF"/>
+                </a:solidFill>
+                <a:latin typeface="Calibri"/>
+              </a:rPr>
+              <a:t>FASE 1</a:t>
+            </a:r>
+          </a:p>
+          <a:p>
+            <a:pPr algn="ctr">
+              <a:lnSpc>
+                <a:spcPct val="100000"/>
+              </a:lnSpc>
+              <a:spcAft>
+                <a:spcPts val="100"/>
+              </a:spcAft>
+            </a:pPr>
+            <a:r>
+              <a:rPr sz="1100" b="1">
+                <a:solidFill>
+                  <a:srgbClr val="FFFFFF"/>
+                </a:solidFill>
+                <a:latin typeface="Calibri"/>
+              </a:rPr>
+              <a:t>M0–6</a:t>
+            </a:r>
+          </a:p>
+          <a:p>
+            <a:pPr algn="ctr">
+              <a:lnSpc>
+                <a:spcPct val="100000"/>
+              </a:lnSpc>
+              <a:spcAft>
+                <a:spcPts val="100"/>
+              </a:spcAft>
+            </a:pPr>
+            <a:r>
+              <a:rPr sz="1400" b="1">
+                <a:solidFill>
+                  <a:srgbClr val="FFFFFF"/>
+                </a:solidFill>
+                <a:latin typeface="Calibri"/>
+              </a:rPr>
+              <a:t>FUNDAÇÃO</a:t>
+            </a:r>
+          </a:p>
+        </p:txBody>
+      </p:sp>
+      <p:sp>
+        <p:nvSpPr>
+          <p:cNvPr id="7" name="Rectangle 6"/>
+          <p:cNvSpPr/>
+          <p:nvPr/>
+        </p:nvSpPr>
+        <p:spPr>
+          <a:xfrm>
+            <a:off x="548640" y="2834640"/>
+            <a:ext cx="2697480" cy="2743200"/>
+          </a:xfrm>
+          <a:prstGeom prst="rect">
+            <a:avLst/>
+          </a:prstGeom>
+          <a:solidFill>
+            <a:srgbClr val="F2F5F7"/>
+          </a:solidFill>
+          <a:ln>
+            <a:noFill/>
+          </a:ln>
+          <a:effectLst/>
+        </p:spPr>
+        <p:style>
+          <a:lnRef idx="1">
+            <a:schemeClr val="accent1"/>
+          </a:lnRef>
+          <a:fillRef idx="3">
+            <a:schemeClr val="accent1"/>
+          </a:fillRef>
+          <a:effectRef idx="2">
+            <a:schemeClr val="accent1"/>
+          </a:effectRef>
+          <a:fontRef idx="minor">
+            <a:schemeClr val="lt1"/>
+          </a:fontRef>
+        </p:style>
+        <p:txBody>
+          <a:bodyPr rtlCol="0" anchor="ctr"/>
+          <a:lstStyle/>
+          <a:p>
+            <a:pPr algn="ctr"/>
+          </a:p>
+        </p:txBody>
+      </p:sp>
+      <p:sp>
+        <p:nvSpPr>
+          <p:cNvPr id="8" name="TextBox 7"/>
+          <p:cNvSpPr txBox="1"/>
+          <p:nvPr/>
+        </p:nvSpPr>
+        <p:spPr>
+          <a:xfrm>
+            <a:off x="731520" y="3017520"/>
+            <a:ext cx="2377440" cy="2468880"/>
+          </a:xfrm>
+          <a:prstGeom prst="rect">
+            <a:avLst/>
+          </a:prstGeom>
+          <a:noFill/>
+        </p:spPr>
+        <p:txBody>
+          <a:bodyPr wrap="square" anchor="t">
+            <a:spAutoFit/>
+          </a:bodyPr>
+          <a:lstStyle/>
+          <a:p>
+            <a:pPr algn="l">
+              <a:lnSpc>
+                <a:spcPct val="105000"/>
+              </a:lnSpc>
+              <a:spcAft>
+                <a:spcPts val="1000"/>
+              </a:spcAft>
+            </a:pPr>
+            <a:r>
+              <a:rPr sz="1200" b="1">
+                <a:solidFill>
+                  <a:srgbClr val="128C7E"/>
+                </a:solidFill>
+                <a:latin typeface="Calibri"/>
+              </a:rPr>
+              <a:t>•  </a:t>
+            </a:r>
+            <a:r>
+              <a:rPr sz="1200" b="0">
+                <a:solidFill>
+                  <a:srgbClr val="1A242B"/>
+                </a:solidFill>
+                <a:latin typeface="Calibri"/>
+              </a:rPr>
+              <a:t>Laboratório + armazém em Aveiro</a:t>
+            </a:r>
+          </a:p>
+          <a:p>
+            <a:pPr algn="l">
+              <a:lnSpc>
+                <a:spcPct val="105000"/>
+              </a:lnSpc>
+              <a:spcAft>
+                <a:spcPts val="1000"/>
+              </a:spcAft>
+            </a:pPr>
+            <a:r>
+              <a:rPr sz="1200" b="1">
+                <a:solidFill>
+                  <a:srgbClr val="128C7E"/>
+                </a:solidFill>
+                <a:latin typeface="Calibri"/>
+              </a:rPr>
+              <a:t>•  </a:t>
+            </a:r>
+            <a:r>
+              <a:rPr sz="1200" b="0">
+                <a:solidFill>
+                  <a:srgbClr val="1A242B"/>
+                </a:solidFill>
+                <a:latin typeface="Calibri"/>
+              </a:rPr>
+              <a:t>2–3 engenheiros de campo</a:t>
+            </a:r>
+          </a:p>
+          <a:p>
+            <a:pPr algn="l">
+              <a:lnSpc>
+                <a:spcPct val="105000"/>
+              </a:lnSpc>
+              <a:spcAft>
+                <a:spcPts val="1000"/>
+              </a:spcAft>
+            </a:pPr>
+            <a:r>
+              <a:rPr sz="1200" b="1">
+                <a:solidFill>
+                  <a:srgbClr val="128C7E"/>
+                </a:solidFill>
+                <a:latin typeface="Calibri"/>
+              </a:rPr>
+              <a:t>•  </a:t>
+            </a:r>
+            <a:r>
+              <a:rPr sz="1200" b="0">
+                <a:solidFill>
+                  <a:srgbClr val="1A242B"/>
+                </a:solidFill>
+                <a:latin typeface="Calibri"/>
+              </a:rPr>
+              <a:t>5 fritas-base + SPC/ΔE</a:t>
+            </a:r>
+          </a:p>
+          <a:p>
+            <a:pPr algn="l">
+              <a:lnSpc>
+                <a:spcPct val="105000"/>
+              </a:lnSpc>
+              <a:spcAft>
+                <a:spcPts val="1000"/>
+              </a:spcAft>
+            </a:pPr>
+            <a:r>
+              <a:rPr sz="1200" b="1">
+                <a:solidFill>
+                  <a:srgbClr val="128C7E"/>
+                </a:solidFill>
+                <a:latin typeface="Calibri"/>
+              </a:rPr>
+              <a:t>•  </a:t>
+            </a:r>
+            <a:r>
+              <a:rPr sz="1200" b="0">
+                <a:solidFill>
+                  <a:srgbClr val="1A242B"/>
+                </a:solidFill>
+                <a:latin typeface="Calibri"/>
+              </a:rPr>
+              <a:t>Assinar pilotos VA + CV</a:t>
+            </a:r>
+          </a:p>
+        </p:txBody>
+      </p:sp>
+      <p:sp>
+        <p:nvSpPr>
+          <p:cNvPr id="9" name="Rectangle 8"/>
+          <p:cNvSpPr/>
+          <p:nvPr/>
+        </p:nvSpPr>
+        <p:spPr>
+          <a:xfrm>
+            <a:off x="3364992" y="1783080"/>
+            <a:ext cx="2697480" cy="1051560"/>
+          </a:xfrm>
+          <a:prstGeom prst="rect">
+            <a:avLst/>
+          </a:prstGeom>
+          <a:solidFill>
+            <a:srgbClr val="0E2A47"/>
+          </a:solidFill>
+          <a:ln>
+            <a:noFill/>
+          </a:ln>
+          <a:effectLst/>
+        </p:spPr>
+        <p:style>
+          <a:lnRef idx="1">
+            <a:schemeClr val="accent1"/>
+          </a:lnRef>
+          <a:fillRef idx="3">
+            <a:schemeClr val="accent1"/>
+          </a:fillRef>
+          <a:effectRef idx="2">
+            <a:schemeClr val="accent1"/>
+          </a:effectRef>
+          <a:fontRef idx="minor">
+            <a:schemeClr val="lt1"/>
+          </a:fontRef>
+        </p:style>
+        <p:txBody>
+          <a:bodyPr rtlCol="0" anchor="ctr"/>
+          <a:lstStyle/>
+          <a:p>
+            <a:pPr algn="ctr"/>
+          </a:p>
+        </p:txBody>
+      </p:sp>
+      <p:sp>
+        <p:nvSpPr>
+          <p:cNvPr id="10" name="TextBox 9"/>
+          <p:cNvSpPr txBox="1"/>
+          <p:nvPr/>
+        </p:nvSpPr>
+        <p:spPr>
+          <a:xfrm>
+            <a:off x="3364992" y="1783080"/>
+            <a:ext cx="2697480" cy="1051560"/>
+          </a:xfrm>
+          <a:prstGeom prst="rect">
+            <a:avLst/>
+          </a:prstGeom>
+          <a:noFill/>
+        </p:spPr>
+        <p:txBody>
+          <a:bodyPr wrap="square" anchor="ctr">
+            <a:spAutoFit/>
+          </a:bodyPr>
+          <a:lstStyle/>
+          <a:p>
+            <a:pPr algn="ctr">
+              <a:lnSpc>
+                <a:spcPct val="100000"/>
+              </a:lnSpc>
+              <a:spcAft>
+                <a:spcPts val="100"/>
+              </a:spcAft>
+            </a:pPr>
+            <a:r>
+              <a:rPr sz="1400" b="1">
+                <a:solidFill>
+                  <a:srgbClr val="FFFFFF"/>
+                </a:solidFill>
+                <a:latin typeface="Calibri"/>
+              </a:rPr>
+              <a:t>FASE 2</a:t>
+            </a:r>
+          </a:p>
+          <a:p>
+            <a:pPr algn="ctr">
+              <a:lnSpc>
+                <a:spcPct val="100000"/>
+              </a:lnSpc>
+              <a:spcAft>
+                <a:spcPts val="100"/>
+              </a:spcAft>
+            </a:pPr>
+            <a:r>
+              <a:rPr sz="1100" b="1">
+                <a:solidFill>
+                  <a:srgbClr val="FFFFFF"/>
+                </a:solidFill>
+                <a:latin typeface="Calibri"/>
+              </a:rPr>
+              <a:t>M4–12</a:t>
+            </a:r>
+          </a:p>
+          <a:p>
+            <a:pPr algn="ctr">
+              <a:lnSpc>
+                <a:spcPct val="100000"/>
+              </a:lnSpc>
+              <a:spcAft>
+                <a:spcPts val="100"/>
+              </a:spcAft>
+            </a:pPr>
+            <a:r>
+              <a:rPr sz="1400" b="1">
+                <a:solidFill>
+                  <a:srgbClr val="FFFFFF"/>
+                </a:solidFill>
+                <a:latin typeface="Calibri"/>
+              </a:rPr>
+              <a:t>PROVA</a:t>
+            </a:r>
+          </a:p>
+        </p:txBody>
+      </p:sp>
+      <p:sp>
+        <p:nvSpPr>
+          <p:cNvPr id="11" name="Rectangle 10"/>
+          <p:cNvSpPr/>
+          <p:nvPr/>
+        </p:nvSpPr>
+        <p:spPr>
+          <a:xfrm>
+            <a:off x="3364992" y="2834640"/>
+            <a:ext cx="2697480" cy="2743200"/>
+          </a:xfrm>
+          <a:prstGeom prst="rect">
+            <a:avLst/>
+          </a:prstGeom>
+          <a:solidFill>
+            <a:srgbClr val="F2F5F7"/>
+          </a:solidFill>
+          <a:ln>
+            <a:noFill/>
+          </a:ln>
+          <a:effectLst/>
+        </p:spPr>
+        <p:style>
+          <a:lnRef idx="1">
+            <a:schemeClr val="accent1"/>
+          </a:lnRef>
+          <a:fillRef idx="3">
+            <a:schemeClr val="accent1"/>
+          </a:fillRef>
+          <a:effectRef idx="2">
+            <a:schemeClr val="accent1"/>
+          </a:effectRef>
+          <a:fontRef idx="minor">
+            <a:schemeClr val="lt1"/>
+          </a:fontRef>
+        </p:style>
+        <p:txBody>
+          <a:bodyPr rtlCol="0" anchor="ctr"/>
+          <a:lstStyle/>
+          <a:p>
+            <a:pPr algn="ctr"/>
+          </a:p>
+        </p:txBody>
+      </p:sp>
+      <p:sp>
+        <p:nvSpPr>
+          <p:cNvPr id="12" name="TextBox 11"/>
+          <p:cNvSpPr txBox="1"/>
+          <p:nvPr/>
+        </p:nvSpPr>
+        <p:spPr>
+          <a:xfrm>
+            <a:off x="3547872" y="3017520"/>
+            <a:ext cx="2377440" cy="2468880"/>
+          </a:xfrm>
+          <a:prstGeom prst="rect">
+            <a:avLst/>
+          </a:prstGeom>
+          <a:noFill/>
+        </p:spPr>
+        <p:txBody>
+          <a:bodyPr wrap="square" anchor="t">
+            <a:spAutoFit/>
+          </a:bodyPr>
+          <a:lstStyle/>
+          <a:p>
+            <a:pPr algn="l">
+              <a:lnSpc>
+                <a:spcPct val="105000"/>
+              </a:lnSpc>
+              <a:spcAft>
+                <a:spcPts val="1000"/>
+              </a:spcAft>
+            </a:pPr>
+            <a:r>
+              <a:rPr sz="1200" b="1">
+                <a:solidFill>
+                  <a:srgbClr val="128C7E"/>
+                </a:solidFill>
+                <a:latin typeface="Calibri"/>
+              </a:rPr>
+              <a:t>•  </a:t>
+            </a:r>
+            <a:r>
+              <a:rPr sz="1200" b="0">
+                <a:solidFill>
+                  <a:srgbClr val="1A242B"/>
+                </a:solidFill>
+                <a:latin typeface="Calibri"/>
+              </a:rPr>
+              <a:t>Eco-Low-Fire v1 validado</a:t>
+            </a:r>
+          </a:p>
+          <a:p>
+            <a:pPr algn="l">
+              <a:lnSpc>
+                <a:spcPct val="105000"/>
+              </a:lnSpc>
+              <a:spcAft>
+                <a:spcPts val="1000"/>
+              </a:spcAft>
+            </a:pPr>
+            <a:r>
+              <a:rPr sz="1200" b="1">
+                <a:solidFill>
+                  <a:srgbClr val="128C7E"/>
+                </a:solidFill>
+                <a:latin typeface="Calibri"/>
+              </a:rPr>
+              <a:t>•  </a:t>
+            </a:r>
+            <a:r>
+              <a:rPr sz="1200" b="0">
+                <a:solidFill>
+                  <a:srgbClr val="1A242B"/>
+                </a:solidFill>
+                <a:latin typeface="Calibri"/>
+              </a:rPr>
+              <a:t>Executar Pilotos A e B</a:t>
+            </a:r>
+          </a:p>
+          <a:p>
+            <a:pPr algn="l">
+              <a:lnSpc>
+                <a:spcPct val="105000"/>
+              </a:lnSpc>
+              <a:spcAft>
+                <a:spcPts val="1000"/>
+              </a:spcAft>
+            </a:pPr>
+            <a:r>
+              <a:rPr sz="1200" b="1">
+                <a:solidFill>
+                  <a:srgbClr val="128C7E"/>
+                </a:solidFill>
+                <a:latin typeface="Calibri"/>
+              </a:rPr>
+              <a:t>•  </a:t>
+            </a:r>
+            <a:r>
+              <a:rPr sz="1200" b="0">
+                <a:solidFill>
+                  <a:srgbClr val="1A242B"/>
+                </a:solidFill>
+                <a:latin typeface="Calibri"/>
+              </a:rPr>
+              <a:t>Cor digital ativa</a:t>
+            </a:r>
+          </a:p>
+          <a:p>
+            <a:pPr algn="l">
+              <a:lnSpc>
+                <a:spcPct val="105000"/>
+              </a:lnSpc>
+              <a:spcAft>
+                <a:spcPts val="1000"/>
+              </a:spcAft>
+            </a:pPr>
+            <a:r>
+              <a:rPr sz="1200" b="1">
+                <a:solidFill>
+                  <a:srgbClr val="128C7E"/>
+                </a:solidFill>
+                <a:latin typeface="Calibri"/>
+              </a:rPr>
+              <a:t>•  </a:t>
+            </a:r>
+            <a:r>
+              <a:rPr sz="1200" b="0">
+                <a:solidFill>
+                  <a:srgbClr val="1A242B"/>
+                </a:solidFill>
+                <a:latin typeface="Calibri"/>
+              </a:rPr>
+              <a:t>1ºs casos de estudo</a:t>
+            </a:r>
+          </a:p>
+        </p:txBody>
+      </p:sp>
+      <p:sp>
+        <p:nvSpPr>
+          <p:cNvPr id="13" name="Rectangle 12"/>
+          <p:cNvSpPr/>
+          <p:nvPr/>
+        </p:nvSpPr>
+        <p:spPr>
+          <a:xfrm>
+            <a:off x="6181344" y="1783080"/>
+            <a:ext cx="2697480" cy="1051560"/>
+          </a:xfrm>
+          <a:prstGeom prst="rect">
+            <a:avLst/>
+          </a:prstGeom>
+          <a:solidFill>
+            <a:srgbClr val="E36A1E"/>
+          </a:solidFill>
+          <a:ln>
+            <a:noFill/>
+          </a:ln>
+          <a:effectLst/>
+        </p:spPr>
+        <p:style>
+          <a:lnRef idx="1">
+            <a:schemeClr val="accent1"/>
+          </a:lnRef>
+          <a:fillRef idx="3">
+            <a:schemeClr val="accent1"/>
+          </a:fillRef>
+          <a:effectRef idx="2">
+            <a:schemeClr val="accent1"/>
+          </a:effectRef>
+          <a:fontRef idx="minor">
+            <a:schemeClr val="lt1"/>
+          </a:fontRef>
+        </p:style>
+        <p:txBody>
+          <a:bodyPr rtlCol="0" anchor="ctr"/>
+          <a:lstStyle/>
+          <a:p>
+            <a:pPr algn="ctr"/>
+          </a:p>
+        </p:txBody>
+      </p:sp>
+      <p:sp>
+        <p:nvSpPr>
+          <p:cNvPr id="14" name="TextBox 13"/>
+          <p:cNvSpPr txBox="1"/>
+          <p:nvPr/>
+        </p:nvSpPr>
+        <p:spPr>
+          <a:xfrm>
+            <a:off x="6181344" y="1783080"/>
+            <a:ext cx="2697480" cy="1051560"/>
+          </a:xfrm>
+          <a:prstGeom prst="rect">
+            <a:avLst/>
+          </a:prstGeom>
+          <a:noFill/>
+        </p:spPr>
+        <p:txBody>
+          <a:bodyPr wrap="square" anchor="ctr">
+            <a:spAutoFit/>
+          </a:bodyPr>
+          <a:lstStyle/>
+          <a:p>
+            <a:pPr algn="ctr">
+              <a:lnSpc>
+                <a:spcPct val="100000"/>
+              </a:lnSpc>
+              <a:spcAft>
+                <a:spcPts val="100"/>
+              </a:spcAft>
+            </a:pPr>
+            <a:r>
+              <a:rPr sz="1400" b="1">
+                <a:solidFill>
+                  <a:srgbClr val="FFFFFF"/>
+                </a:solidFill>
+                <a:latin typeface="Calibri"/>
+              </a:rPr>
+              <a:t>FASE 3</a:t>
+            </a:r>
+          </a:p>
+          <a:p>
+            <a:pPr algn="ctr">
+              <a:lnSpc>
+                <a:spcPct val="100000"/>
+              </a:lnSpc>
+              <a:spcAft>
+                <a:spcPts val="100"/>
+              </a:spcAft>
+            </a:pPr>
+            <a:r>
+              <a:rPr sz="1100" b="1">
+                <a:solidFill>
+                  <a:srgbClr val="FFFFFF"/>
+                </a:solidFill>
+                <a:latin typeface="Calibri"/>
+              </a:rPr>
+              <a:t>M9–18</a:t>
+            </a:r>
+          </a:p>
+          <a:p>
+            <a:pPr algn="ctr">
+              <a:lnSpc>
+                <a:spcPct val="100000"/>
+              </a:lnSpc>
+              <a:spcAft>
+                <a:spcPts val="100"/>
+              </a:spcAft>
+            </a:pPr>
+            <a:r>
+              <a:rPr sz="1400" b="1">
+                <a:solidFill>
+                  <a:srgbClr val="FFFFFF"/>
+                </a:solidFill>
+                <a:latin typeface="Calibri"/>
+              </a:rPr>
+              <a:t>ESCALA</a:t>
+            </a:r>
+          </a:p>
+        </p:txBody>
+      </p:sp>
+      <p:sp>
+        <p:nvSpPr>
+          <p:cNvPr id="15" name="Rectangle 14"/>
+          <p:cNvSpPr/>
+          <p:nvPr/>
+        </p:nvSpPr>
+        <p:spPr>
+          <a:xfrm>
+            <a:off x="6181344" y="2834640"/>
+            <a:ext cx="2697480" cy="2743200"/>
+          </a:xfrm>
+          <a:prstGeom prst="rect">
+            <a:avLst/>
+          </a:prstGeom>
+          <a:solidFill>
+            <a:srgbClr val="F2F5F7"/>
+          </a:solidFill>
+          <a:ln>
+            <a:noFill/>
+          </a:ln>
+          <a:effectLst/>
+        </p:spPr>
+        <p:style>
+          <a:lnRef idx="1">
+            <a:schemeClr val="accent1"/>
+          </a:lnRef>
+          <a:fillRef idx="3">
+            <a:schemeClr val="accent1"/>
+          </a:fillRef>
+          <a:effectRef idx="2">
+            <a:schemeClr val="accent1"/>
+          </a:effectRef>
+          <a:fontRef idx="minor">
+            <a:schemeClr val="lt1"/>
+          </a:fontRef>
+        </p:style>
+        <p:txBody>
+          <a:bodyPr rtlCol="0" anchor="ctr"/>
+          <a:lstStyle/>
+          <a:p>
+            <a:pPr algn="ctr"/>
+          </a:p>
+        </p:txBody>
+      </p:sp>
+      <p:sp>
+        <p:nvSpPr>
+          <p:cNvPr id="16" name="TextBox 15"/>
+          <p:cNvSpPr txBox="1"/>
+          <p:nvPr/>
+        </p:nvSpPr>
+        <p:spPr>
+          <a:xfrm>
+            <a:off x="6364224" y="3017520"/>
+            <a:ext cx="2377440" cy="2468880"/>
+          </a:xfrm>
+          <a:prstGeom prst="rect">
+            <a:avLst/>
+          </a:prstGeom>
+          <a:noFill/>
+        </p:spPr>
+        <p:txBody>
+          <a:bodyPr wrap="square" anchor="t">
+            <a:spAutoFit/>
+          </a:bodyPr>
+          <a:lstStyle/>
+          <a:p>
+            <a:pPr algn="l">
+              <a:lnSpc>
+                <a:spcPct val="105000"/>
+              </a:lnSpc>
+              <a:spcAft>
+                <a:spcPts val="1000"/>
+              </a:spcAft>
+            </a:pPr>
+            <a:r>
+              <a:rPr sz="1200" b="1">
+                <a:solidFill>
+                  <a:srgbClr val="128C7E"/>
+                </a:solidFill>
+                <a:latin typeface="Calibri"/>
+              </a:rPr>
+              <a:t>•  </a:t>
+            </a:r>
+            <a:r>
+              <a:rPr sz="1200" b="0">
+                <a:solidFill>
+                  <a:srgbClr val="1A242B"/>
+                </a:solidFill>
+                <a:latin typeface="Calibri"/>
+              </a:rPr>
+              <a:t>Pilotos → contratos SLA</a:t>
+            </a:r>
+          </a:p>
+          <a:p>
+            <a:pPr algn="l">
+              <a:lnSpc>
+                <a:spcPct val="105000"/>
+              </a:lnSpc>
+              <a:spcAft>
+                <a:spcPts val="1000"/>
+              </a:spcAft>
+            </a:pPr>
+            <a:r>
+              <a:rPr sz="1200" b="1">
+                <a:solidFill>
+                  <a:srgbClr val="128C7E"/>
+                </a:solidFill>
+                <a:latin typeface="Calibri"/>
+              </a:rPr>
+              <a:t>•  </a:t>
+            </a:r>
+            <a:r>
+              <a:rPr sz="1200" b="0">
+                <a:solidFill>
+                  <a:srgbClr val="1A242B"/>
+                </a:solidFill>
+                <a:latin typeface="Calibri"/>
+              </a:rPr>
+              <a:t>Eco-Low-Fire v2</a:t>
+            </a:r>
+          </a:p>
+          <a:p>
+            <a:pPr algn="l">
+              <a:lnSpc>
+                <a:spcPct val="105000"/>
+              </a:lnSpc>
+              <a:spcAft>
+                <a:spcPts val="1000"/>
+              </a:spcAft>
+            </a:pPr>
+            <a:r>
+              <a:rPr sz="1200" b="1">
+                <a:solidFill>
+                  <a:srgbClr val="128C7E"/>
+                </a:solidFill>
+                <a:latin typeface="Calibri"/>
+              </a:rPr>
+              <a:t>•  </a:t>
+            </a:r>
+            <a:r>
+              <a:rPr sz="1200" b="0">
+                <a:solidFill>
+                  <a:srgbClr val="1A242B"/>
+                </a:solidFill>
+                <a:latin typeface="Calibri"/>
+              </a:rPr>
+              <a:t>Expandir Nível 2</a:t>
+            </a:r>
+          </a:p>
+          <a:p>
+            <a:pPr algn="l">
+              <a:lnSpc>
+                <a:spcPct val="105000"/>
+              </a:lnSpc>
+              <a:spcAft>
+                <a:spcPts val="1000"/>
+              </a:spcAft>
+            </a:pPr>
+            <a:r>
+              <a:rPr sz="1200" b="1">
+                <a:solidFill>
+                  <a:srgbClr val="128C7E"/>
+                </a:solidFill>
+                <a:latin typeface="Calibri"/>
+              </a:rPr>
+              <a:t>•  </a:t>
+            </a:r>
+            <a:r>
+              <a:rPr sz="1200" b="0">
+                <a:solidFill>
+                  <a:srgbClr val="1A242B"/>
+                </a:solidFill>
+                <a:latin typeface="Calibri"/>
+              </a:rPr>
+              <a:t>Abordar Nível 3</a:t>
+            </a:r>
+          </a:p>
+        </p:txBody>
+      </p:sp>
+      <p:sp>
+        <p:nvSpPr>
+          <p:cNvPr id="17" name="Rectangle 16"/>
+          <p:cNvSpPr/>
+          <p:nvPr/>
+        </p:nvSpPr>
+        <p:spPr>
+          <a:xfrm>
+            <a:off x="8997696" y="1783080"/>
+            <a:ext cx="2697480" cy="1051560"/>
+          </a:xfrm>
+          <a:prstGeom prst="rect">
+            <a:avLst/>
+          </a:prstGeom>
+          <a:solidFill>
+            <a:srgbClr val="6A4C93"/>
+          </a:solidFill>
+          <a:ln>
+            <a:noFill/>
+          </a:ln>
+          <a:effectLst/>
+        </p:spPr>
+        <p:style>
+          <a:lnRef idx="1">
+            <a:schemeClr val="accent1"/>
+          </a:lnRef>
+          <a:fillRef idx="3">
+            <a:schemeClr val="accent1"/>
+          </a:fillRef>
+          <a:effectRef idx="2">
+            <a:schemeClr val="accent1"/>
+          </a:effectRef>
+          <a:fontRef idx="minor">
+            <a:schemeClr val="lt1"/>
+          </a:fontRef>
+        </p:style>
+        <p:txBody>
+          <a:bodyPr rtlCol="0" anchor="ctr"/>
+          <a:lstStyle/>
+          <a:p>
+            <a:pPr algn="ctr"/>
+          </a:p>
+        </p:txBody>
+      </p:sp>
+      <p:sp>
+        <p:nvSpPr>
+          <p:cNvPr id="18" name="TextBox 17"/>
+          <p:cNvSpPr txBox="1"/>
+          <p:nvPr/>
+        </p:nvSpPr>
+        <p:spPr>
+          <a:xfrm>
+            <a:off x="8997696" y="1783080"/>
+            <a:ext cx="2697480" cy="1051560"/>
+          </a:xfrm>
+          <a:prstGeom prst="rect">
+            <a:avLst/>
+          </a:prstGeom>
+          <a:noFill/>
+        </p:spPr>
+        <p:txBody>
+          <a:bodyPr wrap="square" anchor="ctr">
+            <a:spAutoFit/>
+          </a:bodyPr>
+          <a:lstStyle/>
+          <a:p>
+            <a:pPr algn="ctr">
+              <a:lnSpc>
+                <a:spcPct val="100000"/>
+              </a:lnSpc>
+              <a:spcAft>
+                <a:spcPts val="100"/>
+              </a:spcAft>
+            </a:pPr>
+            <a:r>
+              <a:rPr sz="1400" b="1">
+                <a:solidFill>
+                  <a:srgbClr val="FFFFFF"/>
+                </a:solidFill>
+                <a:latin typeface="Calibri"/>
+              </a:rPr>
+              <a:t>FASE 4</a:t>
+            </a:r>
+          </a:p>
+          <a:p>
+            <a:pPr algn="ctr">
+              <a:lnSpc>
+                <a:spcPct val="100000"/>
+              </a:lnSpc>
+              <a:spcAft>
+                <a:spcPts val="100"/>
+              </a:spcAft>
+            </a:pPr>
+            <a:r>
+              <a:rPr sz="1100" b="1">
+                <a:solidFill>
+                  <a:srgbClr val="FFFFFF"/>
+                </a:solidFill>
+                <a:latin typeface="Calibri"/>
+              </a:rPr>
+              <a:t>M12–24</a:t>
+            </a:r>
+          </a:p>
+          <a:p>
+            <a:pPr algn="ctr">
+              <a:lnSpc>
+                <a:spcPct val="100000"/>
+              </a:lnSpc>
+              <a:spcAft>
+                <a:spcPts val="100"/>
+              </a:spcAft>
+            </a:pPr>
+            <a:r>
+              <a:rPr sz="1400" b="1">
+                <a:solidFill>
+                  <a:srgbClr val="FFFFFF"/>
+                </a:solidFill>
+                <a:latin typeface="Calibri"/>
+              </a:rPr>
+              <a:t>FIDELIZAÇÃO</a:t>
+            </a:r>
+          </a:p>
+        </p:txBody>
+      </p:sp>
+      <p:sp>
+        <p:nvSpPr>
+          <p:cNvPr id="19" name="Rectangle 18"/>
+          <p:cNvSpPr/>
+          <p:nvPr/>
+        </p:nvSpPr>
+        <p:spPr>
+          <a:xfrm>
+            <a:off x="8997696" y="2834640"/>
+            <a:ext cx="2697480" cy="2743200"/>
+          </a:xfrm>
+          <a:prstGeom prst="rect">
+            <a:avLst/>
+          </a:prstGeom>
+          <a:solidFill>
+            <a:srgbClr val="F2F5F7"/>
+          </a:solidFill>
+          <a:ln>
+            <a:noFill/>
+          </a:ln>
+          <a:effectLst/>
+        </p:spPr>
+        <p:style>
+          <a:lnRef idx="1">
+            <a:schemeClr val="accent1"/>
+          </a:lnRef>
+          <a:fillRef idx="3">
+            <a:schemeClr val="accent1"/>
+          </a:fillRef>
+          <a:effectRef idx="2">
+            <a:schemeClr val="accent1"/>
+          </a:effectRef>
+          <a:fontRef idx="minor">
+            <a:schemeClr val="lt1"/>
+          </a:fontRef>
+        </p:style>
+        <p:txBody>
+          <a:bodyPr rtlCol="0" anchor="ctr"/>
+          <a:lstStyle/>
+          <a:p>
+            <a:pPr algn="ctr"/>
+          </a:p>
+        </p:txBody>
+      </p:sp>
+      <p:sp>
+        <p:nvSpPr>
+          <p:cNvPr id="20" name="TextBox 19"/>
+          <p:cNvSpPr txBox="1"/>
+          <p:nvPr/>
+        </p:nvSpPr>
+        <p:spPr>
+          <a:xfrm>
+            <a:off x="9180576" y="3017520"/>
+            <a:ext cx="2377440" cy="2468880"/>
+          </a:xfrm>
+          <a:prstGeom prst="rect">
+            <a:avLst/>
+          </a:prstGeom>
+          <a:noFill/>
+        </p:spPr>
+        <p:txBody>
+          <a:bodyPr wrap="square" anchor="t">
+            <a:spAutoFit/>
+          </a:bodyPr>
+          <a:lstStyle/>
+          <a:p>
+            <a:pPr algn="l">
+              <a:lnSpc>
+                <a:spcPct val="105000"/>
+              </a:lnSpc>
+              <a:spcAft>
+                <a:spcPts val="1000"/>
+              </a:spcAft>
+            </a:pPr>
+            <a:r>
+              <a:rPr sz="1200" b="1">
+                <a:solidFill>
+                  <a:srgbClr val="128C7E"/>
+                </a:solidFill>
+                <a:latin typeface="Calibri"/>
+              </a:rPr>
+              <a:t>•  </a:t>
+            </a:r>
+            <a:r>
+              <a:rPr sz="1200" b="0">
+                <a:solidFill>
+                  <a:srgbClr val="1A242B"/>
+                </a:solidFill>
+                <a:latin typeface="Calibri"/>
+              </a:rPr>
+              <a:t>Plataforma de IA (beta→rollout)</a:t>
+            </a:r>
+          </a:p>
+          <a:p>
+            <a:pPr algn="l">
+              <a:lnSpc>
+                <a:spcPct val="105000"/>
+              </a:lnSpc>
+              <a:spcAft>
+                <a:spcPts val="1000"/>
+              </a:spcAft>
+            </a:pPr>
+            <a:r>
+              <a:rPr sz="1200" b="1">
+                <a:solidFill>
+                  <a:srgbClr val="128C7E"/>
+                </a:solidFill>
+                <a:latin typeface="Calibri"/>
+              </a:rPr>
+              <a:t>•  </a:t>
+            </a:r>
+            <a:r>
+              <a:rPr sz="1200" b="0">
+                <a:solidFill>
+                  <a:srgbClr val="1A242B"/>
+                </a:solidFill>
+                <a:latin typeface="Calibri"/>
+              </a:rPr>
+              <a:t>Fosso de dados</a:t>
+            </a:r>
+          </a:p>
+          <a:p>
+            <a:pPr algn="l">
+              <a:lnSpc>
+                <a:spcPct val="105000"/>
+              </a:lnSpc>
+              <a:spcAft>
+                <a:spcPts val="1000"/>
+              </a:spcAft>
+            </a:pPr>
+            <a:r>
+              <a:rPr sz="1200" b="1">
+                <a:solidFill>
+                  <a:srgbClr val="128C7E"/>
+                </a:solidFill>
+                <a:latin typeface="Calibri"/>
+              </a:rPr>
+              <a:t>•  </a:t>
+            </a:r>
+            <a:r>
+              <a:rPr sz="1200" b="0">
+                <a:solidFill>
+                  <a:srgbClr val="1A242B"/>
+                </a:solidFill>
+                <a:latin typeface="Calibri"/>
+              </a:rPr>
+              <a:t>Co-desenvolvimento</a:t>
+            </a:r>
+          </a:p>
+          <a:p>
+            <a:pPr algn="l">
+              <a:lnSpc>
+                <a:spcPct val="105000"/>
+              </a:lnSpc>
+              <a:spcAft>
+                <a:spcPts val="1000"/>
+              </a:spcAft>
+            </a:pPr>
+            <a:r>
+              <a:rPr sz="1200" b="1">
+                <a:solidFill>
+                  <a:srgbClr val="128C7E"/>
+                </a:solidFill>
+                <a:latin typeface="Calibri"/>
+              </a:rPr>
+              <a:t>•  </a:t>
+            </a:r>
+            <a:r>
+              <a:rPr sz="1200" b="0">
+                <a:solidFill>
+                  <a:srgbClr val="1A242B"/>
+                </a:solidFill>
+                <a:latin typeface="Calibri"/>
+              </a:rPr>
+              <a:t>Parceiro por defeito do cluster</a:t>
+            </a:r>
+          </a:p>
+        </p:txBody>
+      </p:sp>
+      <p:sp>
+        <p:nvSpPr>
+          <p:cNvPr id="21" name="TextBox 20"/>
+          <p:cNvSpPr txBox="1"/>
+          <p:nvPr/>
+        </p:nvSpPr>
+        <p:spPr>
+          <a:xfrm>
+            <a:off x="457200" y="6446520"/>
+            <a:ext cx="7315200" cy="365760"/>
+          </a:xfrm>
+          <a:prstGeom prst="rect">
+            <a:avLst/>
+          </a:prstGeom>
+          <a:noFill/>
+        </p:spPr>
+        <p:txBody>
+          <a:bodyPr wrap="square" anchor="t">
+            <a:spAutoFit/>
+          </a:bodyPr>
+          <a:lstStyle/>
+          <a:p>
+            <a:pPr algn="l">
+              <a:lnSpc>
+                <a:spcPct val="100000"/>
+              </a:lnSpc>
+              <a:spcAft>
+                <a:spcPts val="600"/>
+              </a:spcAft>
+            </a:pPr>
+            <a:r>
+              <a:rPr sz="900" b="0">
+                <a:solidFill>
+                  <a:srgbClr val="556670"/>
+                </a:solidFill>
+                <a:latin typeface="Calibri"/>
+              </a:rPr>
+              <a:t>Vidres Portugal — Manual Estratégico</a:t>
+            </a:r>
+          </a:p>
+        </p:txBody>
+      </p:sp>
+      <p:sp>
+        <p:nvSpPr>
+          <p:cNvPr id="22" name="TextBox 21"/>
+          <p:cNvSpPr txBox="1"/>
+          <p:nvPr/>
+        </p:nvSpPr>
+        <p:spPr>
+          <a:xfrm>
+            <a:off x="10332720" y="6446520"/>
+            <a:ext cx="1645920" cy="365760"/>
+          </a:xfrm>
+          <a:prstGeom prst="rect">
+            <a:avLst/>
+          </a:prstGeom>
+          <a:noFill/>
+        </p:spPr>
+        <p:txBody>
+          <a:bodyPr wrap="square" anchor="t">
+            <a:spAutoFit/>
+          </a:bodyPr>
+          <a:lstStyle/>
+          <a:p>
+            <a:pPr algn="r">
+              <a:lnSpc>
+                <a:spcPct val="100000"/>
+              </a:lnSpc>
+              <a:spcAft>
+                <a:spcPts val="600"/>
+              </a:spcAft>
+            </a:pPr>
+            <a:r>
+              <a:rPr sz="900" b="1">
+                <a:solidFill>
+                  <a:srgbClr val="556670"/>
+                </a:solidFill>
+                <a:latin typeface="Calibri"/>
+              </a:rPr>
+              <a:t>12</a:t>
+            </a:r>
+          </a:p>
+        </p:txBody>
+      </p:sp>
+    </p:spTree>
+  </p:cSld>
+  <p:clrMapOvr>
+    <a:masterClrMapping/>
+  </p:clrMapOvr>
+</p:sld>
+</file>
+
+<file path=ppt/slides/slide13.xml><?xml version="1.0" encoding="utf-8"?>
+<p:sld xmlns:a="http://schemas.openxmlformats.org/drawingml/2006/main" xmlns:p="http://schemas.openxmlformats.org/presentationml/2006/main" xmlns:r="http://schemas.openxmlformats.org/officeDocument/2006/relationships">
+  <p:cSld>
+    <p:bg>
+      <p:bgPr>
+        <a:solidFill>
+          <a:srgbClr val="F2F5F7"/>
+        </a:solidFill>
+        <a:effectLst/>
+      </p:bgPr>
+    </p:bg>
+    <p:spTree>
+      <p:nvGrpSpPr>
+        <p:cNvPr id="1" name=""/>
+        <p:cNvGrpSpPr/>
+        <p:nvPr/>
+      </p:nvGrpSpPr>
+      <p:grpSpPr/>
+      <p:sp>
+        <p:nvSpPr>
+          <p:cNvPr id="2" name="Rectangle 1"/>
+          <p:cNvSpPr/>
+          <p:nvPr/>
+        </p:nvSpPr>
+        <p:spPr>
+          <a:xfrm>
+            <a:off x="0" y="0"/>
+            <a:ext cx="164592" cy="6858000"/>
+          </a:xfrm>
+          <a:prstGeom prst="rect">
+            <a:avLst/>
+          </a:prstGeom>
+          <a:solidFill>
+            <a:srgbClr val="E36A1E"/>
+          </a:solidFill>
+          <a:ln>
+            <a:noFill/>
+          </a:ln>
+          <a:effectLst/>
+        </p:spPr>
+        <p:style>
+          <a:lnRef idx="1">
+            <a:schemeClr val="accent1"/>
+          </a:lnRef>
+          <a:fillRef idx="3">
+            <a:schemeClr val="accent1"/>
+          </a:fillRef>
+          <a:effectRef idx="2">
+            <a:schemeClr val="accent1"/>
+          </a:effectRef>
+          <a:fontRef idx="minor">
+            <a:schemeClr val="lt1"/>
+          </a:fontRef>
+        </p:style>
+        <p:txBody>
+          <a:bodyPr rtlCol="0" anchor="ctr"/>
+          <a:lstStyle/>
+          <a:p>
+            <a:pPr algn="ctr"/>
+          </a:p>
+        </p:txBody>
+      </p:sp>
+      <p:sp>
+        <p:nvSpPr>
+          <p:cNvPr id="3" name="TextBox 2"/>
+          <p:cNvSpPr txBox="1"/>
+          <p:nvPr/>
+        </p:nvSpPr>
+        <p:spPr>
+          <a:xfrm>
+            <a:off x="548640" y="411480"/>
+            <a:ext cx="10972800" cy="365760"/>
+          </a:xfrm>
+          <a:prstGeom prst="rect">
+            <a:avLst/>
+          </a:prstGeom>
+          <a:noFill/>
+        </p:spPr>
+        <p:txBody>
+          <a:bodyPr wrap="square" anchor="t">
+            <a:spAutoFit/>
+          </a:bodyPr>
+          <a:lstStyle/>
+          <a:p>
+            <a:pPr algn="l">
+              <a:lnSpc>
+                <a:spcPct val="100000"/>
+              </a:lnSpc>
+              <a:spcAft>
+                <a:spcPts val="600"/>
+              </a:spcAft>
+            </a:pPr>
+            <a:r>
+              <a:rPr sz="1300" b="1">
+                <a:solidFill>
+                  <a:srgbClr val="128C7E"/>
+                </a:solidFill>
+                <a:latin typeface="Calibri"/>
+              </a:rPr>
+              <a:t>ANEXO A</a:t>
+            </a:r>
+          </a:p>
+        </p:txBody>
+      </p:sp>
+      <p:sp>
+        <p:nvSpPr>
+          <p:cNvPr id="4" name="TextBox 3"/>
+          <p:cNvSpPr txBox="1"/>
+          <p:nvPr/>
+        </p:nvSpPr>
+        <p:spPr>
+          <a:xfrm>
+            <a:off x="548640" y="777240"/>
+            <a:ext cx="11064240" cy="822960"/>
+          </a:xfrm>
+          <a:prstGeom prst="rect">
+            <a:avLst/>
+          </a:prstGeom>
+          <a:noFill/>
+        </p:spPr>
+        <p:txBody>
+          <a:bodyPr wrap="square" anchor="t">
+            <a:spAutoFit/>
+          </a:bodyPr>
+          <a:lstStyle/>
+          <a:p>
+            <a:pPr algn="l">
+              <a:lnSpc>
+                <a:spcPct val="100000"/>
+              </a:lnSpc>
+              <a:spcAft>
+                <a:spcPts val="600"/>
+              </a:spcAft>
+            </a:pPr>
+            <a:r>
+              <a:rPr sz="3000" b="1">
+                <a:solidFill>
+                  <a:srgbClr val="0E2A47"/>
+                </a:solidFill>
+                <a:latin typeface="Calibri"/>
+              </a:rPr>
+              <a:t>Painel de KPIs — acompanhar desde o dia 1</a:t>
+            </a:r>
+          </a:p>
+        </p:txBody>
+      </p:sp>
+      <p:sp>
+        <p:nvSpPr>
+          <p:cNvPr id="5" name="Rectangle 4"/>
+          <p:cNvSpPr/>
+          <p:nvPr/>
+        </p:nvSpPr>
+        <p:spPr>
+          <a:xfrm>
+            <a:off x="548640" y="1920240"/>
+            <a:ext cx="3520440" cy="1691640"/>
+          </a:xfrm>
+          <a:prstGeom prst="rect">
+            <a:avLst/>
+          </a:prstGeom>
+          <a:solidFill>
+            <a:srgbClr val="FFFFFF"/>
+          </a:solidFill>
+          <a:ln>
+            <a:noFill/>
+          </a:ln>
+          <a:effectLst/>
+        </p:spPr>
+        <p:style>
+          <a:lnRef idx="1">
+            <a:schemeClr val="accent1"/>
+          </a:lnRef>
+          <a:fillRef idx="3">
+            <a:schemeClr val="accent1"/>
+          </a:fillRef>
+          <a:effectRef idx="2">
+            <a:schemeClr val="accent1"/>
+          </a:effectRef>
+          <a:fontRef idx="minor">
+            <a:schemeClr val="lt1"/>
+          </a:fontRef>
+        </p:style>
+        <p:txBody>
+          <a:bodyPr rtlCol="0" anchor="ctr"/>
+          <a:lstStyle/>
+          <a:p>
+            <a:pPr algn="ctr"/>
+          </a:p>
+        </p:txBody>
+      </p:sp>
+      <p:sp>
+        <p:nvSpPr>
+          <p:cNvPr id="6" name="Rectangle 5"/>
+          <p:cNvSpPr/>
+          <p:nvPr/>
+        </p:nvSpPr>
+        <p:spPr>
+          <a:xfrm>
+            <a:off x="548640" y="1920240"/>
+            <a:ext cx="3520440" cy="91440"/>
+          </a:xfrm>
+          <a:prstGeom prst="rect">
+            <a:avLst/>
+          </a:prstGeom>
+          <a:solidFill>
+            <a:srgbClr val="128C7E"/>
+          </a:solidFill>
+          <a:ln>
+            <a:noFill/>
+          </a:ln>
+          <a:effectLst/>
+        </p:spPr>
+        <p:style>
+          <a:lnRef idx="1">
+            <a:schemeClr val="accent1"/>
+          </a:lnRef>
+          <a:fillRef idx="3">
+            <a:schemeClr val="accent1"/>
+          </a:fillRef>
+          <a:effectRef idx="2">
+            <a:schemeClr val="accent1"/>
+          </a:effectRef>
+          <a:fontRef idx="minor">
+            <a:schemeClr val="lt1"/>
+          </a:fontRef>
+        </p:style>
+        <p:txBody>
+          <a:bodyPr rtlCol="0" anchor="ctr"/>
+          <a:lstStyle/>
+          <a:p>
+            <a:pPr algn="ctr"/>
+          </a:p>
+        </p:txBody>
+      </p:sp>
+      <p:sp>
+        <p:nvSpPr>
+          <p:cNvPr id="7" name="TextBox 6"/>
+          <p:cNvSpPr txBox="1"/>
+          <p:nvPr/>
+        </p:nvSpPr>
+        <p:spPr>
+          <a:xfrm>
+            <a:off x="548640" y="2194560"/>
+            <a:ext cx="3520440" cy="822960"/>
+          </a:xfrm>
+          <a:prstGeom prst="rect">
+            <a:avLst/>
+          </a:prstGeom>
+          <a:noFill/>
+        </p:spPr>
+        <p:txBody>
+          <a:bodyPr wrap="square" anchor="t">
+            <a:spAutoFit/>
+          </a:bodyPr>
+          <a:lstStyle/>
+          <a:p>
+            <a:pPr algn="ctr">
+              <a:lnSpc>
+                <a:spcPct val="100000"/>
+              </a:lnSpc>
+              <a:spcAft>
+                <a:spcPts val="600"/>
+              </a:spcAft>
+            </a:pPr>
+            <a:r>
+              <a:rPr sz="3400" b="1">
+                <a:solidFill>
+                  <a:srgbClr val="128C7E"/>
+                </a:solidFill>
+                <a:latin typeface="Calibri"/>
+              </a:rPr>
+              <a:t>≤ 0,5</a:t>
+            </a:r>
+          </a:p>
+        </p:txBody>
+      </p:sp>
+      <p:sp>
+        <p:nvSpPr>
+          <p:cNvPr id="8" name="TextBox 7"/>
+          <p:cNvSpPr txBox="1"/>
+          <p:nvPr/>
+        </p:nvSpPr>
+        <p:spPr>
+          <a:xfrm>
+            <a:off x="548640" y="3063240"/>
+            <a:ext cx="3520440" cy="457200"/>
+          </a:xfrm>
+          <a:prstGeom prst="rect">
+            <a:avLst/>
+          </a:prstGeom>
+          <a:noFill/>
+        </p:spPr>
+        <p:txBody>
+          <a:bodyPr wrap="square" anchor="t">
+            <a:spAutoFit/>
+          </a:bodyPr>
+          <a:lstStyle/>
+          <a:p>
+            <a:pPr algn="ctr">
+              <a:lnSpc>
+                <a:spcPct val="100000"/>
+              </a:lnSpc>
+              <a:spcAft>
+                <a:spcPts val="600"/>
+              </a:spcAft>
+            </a:pPr>
+            <a:r>
+              <a:rPr sz="1400" b="1">
+                <a:solidFill>
+                  <a:srgbClr val="0E2A47"/>
+                </a:solidFill>
+                <a:latin typeface="Calibri"/>
+              </a:rPr>
+              <a:t>ΔE entre lotes</a:t>
+            </a:r>
+          </a:p>
+        </p:txBody>
+      </p:sp>
+      <p:sp>
+        <p:nvSpPr>
+          <p:cNvPr id="9" name="Rectangle 8"/>
+          <p:cNvSpPr/>
+          <p:nvPr/>
+        </p:nvSpPr>
+        <p:spPr>
+          <a:xfrm>
+            <a:off x="4251960" y="1920240"/>
+            <a:ext cx="3520440" cy="1691640"/>
+          </a:xfrm>
+          <a:prstGeom prst="rect">
+            <a:avLst/>
+          </a:prstGeom>
+          <a:solidFill>
+            <a:srgbClr val="FFFFFF"/>
+          </a:solidFill>
+          <a:ln>
+            <a:noFill/>
+          </a:ln>
+          <a:effectLst/>
+        </p:spPr>
+        <p:style>
+          <a:lnRef idx="1">
+            <a:schemeClr val="accent1"/>
+          </a:lnRef>
+          <a:fillRef idx="3">
+            <a:schemeClr val="accent1"/>
+          </a:fillRef>
+          <a:effectRef idx="2">
+            <a:schemeClr val="accent1"/>
+          </a:effectRef>
+          <a:fontRef idx="minor">
+            <a:schemeClr val="lt1"/>
+          </a:fontRef>
+        </p:style>
+        <p:txBody>
+          <a:bodyPr rtlCol="0" anchor="ctr"/>
+          <a:lstStyle/>
+          <a:p>
+            <a:pPr algn="ctr"/>
+          </a:p>
+        </p:txBody>
+      </p:sp>
+      <p:sp>
+        <p:nvSpPr>
+          <p:cNvPr id="10" name="Rectangle 9"/>
+          <p:cNvSpPr/>
+          <p:nvPr/>
+        </p:nvSpPr>
+        <p:spPr>
+          <a:xfrm>
+            <a:off x="4251960" y="1920240"/>
+            <a:ext cx="3520440" cy="91440"/>
+          </a:xfrm>
+          <a:prstGeom prst="rect">
+            <a:avLst/>
+          </a:prstGeom>
+          <a:solidFill>
+            <a:srgbClr val="E36A1E"/>
+          </a:solidFill>
+          <a:ln>
+            <a:noFill/>
+          </a:ln>
+          <a:effectLst/>
+        </p:spPr>
+        <p:style>
+          <a:lnRef idx="1">
+            <a:schemeClr val="accent1"/>
+          </a:lnRef>
+          <a:fillRef idx="3">
+            <a:schemeClr val="accent1"/>
+          </a:fillRef>
+          <a:effectRef idx="2">
+            <a:schemeClr val="accent1"/>
+          </a:effectRef>
+          <a:fontRef idx="minor">
+            <a:schemeClr val="lt1"/>
+          </a:fontRef>
+        </p:style>
+        <p:txBody>
+          <a:bodyPr rtlCol="0" anchor="ctr"/>
+          <a:lstStyle/>
+          <a:p>
+            <a:pPr algn="ctr"/>
+          </a:p>
+        </p:txBody>
+      </p:sp>
+      <p:sp>
+        <p:nvSpPr>
+          <p:cNvPr id="11" name="TextBox 10"/>
+          <p:cNvSpPr txBox="1"/>
+          <p:nvPr/>
+        </p:nvSpPr>
+        <p:spPr>
+          <a:xfrm>
+            <a:off x="4251960" y="2194560"/>
+            <a:ext cx="3520440" cy="822960"/>
+          </a:xfrm>
+          <a:prstGeom prst="rect">
+            <a:avLst/>
+          </a:prstGeom>
+          <a:noFill/>
+        </p:spPr>
+        <p:txBody>
+          <a:bodyPr wrap="square" anchor="t">
+            <a:spAutoFit/>
+          </a:bodyPr>
+          <a:lstStyle/>
+          <a:p>
+            <a:pPr algn="ctr">
+              <a:lnSpc>
+                <a:spcPct val="100000"/>
+              </a:lnSpc>
+              <a:spcAft>
+                <a:spcPts val="600"/>
+              </a:spcAft>
+            </a:pPr>
+            <a:r>
+              <a:rPr sz="3400" b="1">
+                <a:solidFill>
+                  <a:srgbClr val="E36A1E"/>
+                </a:solidFill>
+                <a:latin typeface="Calibri"/>
+              </a:rPr>
+              <a:t>8–12%</a:t>
+            </a:r>
+          </a:p>
+        </p:txBody>
+      </p:sp>
+      <p:sp>
+        <p:nvSpPr>
+          <p:cNvPr id="12" name="TextBox 11"/>
+          <p:cNvSpPr txBox="1"/>
+          <p:nvPr/>
+        </p:nvSpPr>
+        <p:spPr>
+          <a:xfrm>
+            <a:off x="4251960" y="3063240"/>
+            <a:ext cx="3520440" cy="457200"/>
+          </a:xfrm>
+          <a:prstGeom prst="rect">
+            <a:avLst/>
+          </a:prstGeom>
+          <a:noFill/>
+        </p:spPr>
+        <p:txBody>
+          <a:bodyPr wrap="square" anchor="t">
+            <a:spAutoFit/>
+          </a:bodyPr>
+          <a:lstStyle/>
+          <a:p>
+            <a:pPr algn="ctr">
+              <a:lnSpc>
+                <a:spcPct val="100000"/>
+              </a:lnSpc>
+              <a:spcAft>
+                <a:spcPts val="600"/>
+              </a:spcAft>
+            </a:pPr>
+            <a:r>
+              <a:rPr sz="1400" b="1">
+                <a:solidFill>
+                  <a:srgbClr val="0E2A47"/>
+                </a:solidFill>
+                <a:latin typeface="Calibri"/>
+              </a:rPr>
+              <a:t>Redução de energia</a:t>
+            </a:r>
+          </a:p>
+        </p:txBody>
+      </p:sp>
+      <p:sp>
+        <p:nvSpPr>
+          <p:cNvPr id="13" name="Rectangle 12"/>
+          <p:cNvSpPr/>
+          <p:nvPr/>
+        </p:nvSpPr>
+        <p:spPr>
+          <a:xfrm>
+            <a:off x="7955280" y="1920240"/>
+            <a:ext cx="3520440" cy="1691640"/>
+          </a:xfrm>
+          <a:prstGeom prst="rect">
+            <a:avLst/>
+          </a:prstGeom>
+          <a:solidFill>
+            <a:srgbClr val="FFFFFF"/>
+          </a:solidFill>
+          <a:ln>
+            <a:noFill/>
+          </a:ln>
+          <a:effectLst/>
+        </p:spPr>
+        <p:style>
+          <a:lnRef idx="1">
+            <a:schemeClr val="accent1"/>
+          </a:lnRef>
+          <a:fillRef idx="3">
+            <a:schemeClr val="accent1"/>
+          </a:fillRef>
+          <a:effectRef idx="2">
+            <a:schemeClr val="accent1"/>
+          </a:effectRef>
+          <a:fontRef idx="minor">
+            <a:schemeClr val="lt1"/>
+          </a:fontRef>
+        </p:style>
+        <p:txBody>
+          <a:bodyPr rtlCol="0" anchor="ctr"/>
+          <a:lstStyle/>
+          <a:p>
+            <a:pPr algn="ctr"/>
+          </a:p>
+        </p:txBody>
+      </p:sp>
+      <p:sp>
+        <p:nvSpPr>
+          <p:cNvPr id="14" name="Rectangle 13"/>
+          <p:cNvSpPr/>
+          <p:nvPr/>
+        </p:nvSpPr>
+        <p:spPr>
+          <a:xfrm>
+            <a:off x="7955280" y="1920240"/>
+            <a:ext cx="3520440" cy="91440"/>
+          </a:xfrm>
+          <a:prstGeom prst="rect">
+            <a:avLst/>
+          </a:prstGeom>
+          <a:solidFill>
+            <a:srgbClr val="0E2A47"/>
+          </a:solidFill>
+          <a:ln>
+            <a:noFill/>
+          </a:ln>
+          <a:effectLst/>
+        </p:spPr>
+        <p:style>
+          <a:lnRef idx="1">
+            <a:schemeClr val="accent1"/>
+          </a:lnRef>
+          <a:fillRef idx="3">
+            <a:schemeClr val="accent1"/>
+          </a:fillRef>
+          <a:effectRef idx="2">
+            <a:schemeClr val="accent1"/>
+          </a:effectRef>
+          <a:fontRef idx="minor">
+            <a:schemeClr val="lt1"/>
+          </a:fontRef>
+        </p:style>
+        <p:txBody>
+          <a:bodyPr rtlCol="0" anchor="ctr"/>
+          <a:lstStyle/>
+          <a:p>
+            <a:pPr algn="ctr"/>
+          </a:p>
+        </p:txBody>
+      </p:sp>
+      <p:sp>
+        <p:nvSpPr>
+          <p:cNvPr id="15" name="TextBox 14"/>
+          <p:cNvSpPr txBox="1"/>
+          <p:nvPr/>
+        </p:nvSpPr>
+        <p:spPr>
+          <a:xfrm>
+            <a:off x="7955280" y="2194560"/>
+            <a:ext cx="3520440" cy="822960"/>
+          </a:xfrm>
+          <a:prstGeom prst="rect">
+            <a:avLst/>
+          </a:prstGeom>
+          <a:noFill/>
+        </p:spPr>
+        <p:txBody>
+          <a:bodyPr wrap="square" anchor="t">
+            <a:spAutoFit/>
+          </a:bodyPr>
+          <a:lstStyle/>
+          <a:p>
+            <a:pPr algn="ctr">
+              <a:lnSpc>
+                <a:spcPct val="100000"/>
+              </a:lnSpc>
+              <a:spcAft>
+                <a:spcPts val="600"/>
+              </a:spcAft>
+            </a:pPr>
+            <a:r>
+              <a:rPr sz="3400" b="1">
+                <a:solidFill>
+                  <a:srgbClr val="0E2A47"/>
+                </a:solidFill>
+                <a:latin typeface="Calibri"/>
+              </a:rPr>
+              <a:t>≤ 10 dias</a:t>
+            </a:r>
+          </a:p>
+        </p:txBody>
+      </p:sp>
+      <p:sp>
+        <p:nvSpPr>
+          <p:cNvPr id="16" name="TextBox 15"/>
+          <p:cNvSpPr txBox="1"/>
+          <p:nvPr/>
+        </p:nvSpPr>
+        <p:spPr>
+          <a:xfrm>
+            <a:off x="7955280" y="3063240"/>
+            <a:ext cx="3520440" cy="457200"/>
+          </a:xfrm>
+          <a:prstGeom prst="rect">
+            <a:avLst/>
+          </a:prstGeom>
+          <a:noFill/>
+        </p:spPr>
+        <p:txBody>
+          <a:bodyPr wrap="square" anchor="t">
+            <a:spAutoFit/>
+          </a:bodyPr>
+          <a:lstStyle/>
+          <a:p>
+            <a:pPr algn="ctr">
+              <a:lnSpc>
+                <a:spcPct val="100000"/>
+              </a:lnSpc>
+              <a:spcAft>
+                <a:spcPts val="600"/>
+              </a:spcAft>
+            </a:pPr>
+            <a:r>
+              <a:rPr sz="1400" b="1">
+                <a:solidFill>
+                  <a:srgbClr val="0E2A47"/>
+                </a:solidFill>
+                <a:latin typeface="Calibri"/>
+              </a:rPr>
+              <a:t>Prazo de amostra</a:t>
+            </a:r>
+          </a:p>
+        </p:txBody>
+      </p:sp>
+      <p:sp>
+        <p:nvSpPr>
+          <p:cNvPr id="17" name="Rectangle 16"/>
+          <p:cNvSpPr/>
+          <p:nvPr/>
+        </p:nvSpPr>
+        <p:spPr>
+          <a:xfrm>
+            <a:off x="548640" y="3840480"/>
+            <a:ext cx="3520440" cy="1691640"/>
+          </a:xfrm>
+          <a:prstGeom prst="rect">
+            <a:avLst/>
+          </a:prstGeom>
+          <a:solidFill>
+            <a:srgbClr val="FFFFFF"/>
+          </a:solidFill>
+          <a:ln>
+            <a:noFill/>
+          </a:ln>
+          <a:effectLst/>
+        </p:spPr>
+        <p:style>
+          <a:lnRef idx="1">
+            <a:schemeClr val="accent1"/>
+          </a:lnRef>
+          <a:fillRef idx="3">
+            <a:schemeClr val="accent1"/>
+          </a:fillRef>
+          <a:effectRef idx="2">
+            <a:schemeClr val="accent1"/>
+          </a:effectRef>
+          <a:fontRef idx="minor">
+            <a:schemeClr val="lt1"/>
+          </a:fontRef>
+        </p:style>
+        <p:txBody>
+          <a:bodyPr rtlCol="0" anchor="ctr"/>
+          <a:lstStyle/>
+          <a:p>
+            <a:pPr algn="ctr"/>
+          </a:p>
+        </p:txBody>
+      </p:sp>
+      <p:sp>
+        <p:nvSpPr>
+          <p:cNvPr id="18" name="Rectangle 17"/>
+          <p:cNvSpPr/>
+          <p:nvPr/>
+        </p:nvSpPr>
+        <p:spPr>
+          <a:xfrm>
+            <a:off x="548640" y="3840480"/>
+            <a:ext cx="3520440" cy="91440"/>
+          </a:xfrm>
+          <a:prstGeom prst="rect">
+            <a:avLst/>
+          </a:prstGeom>
+          <a:solidFill>
+            <a:srgbClr val="128C7E"/>
+          </a:solidFill>
+          <a:ln>
+            <a:noFill/>
+          </a:ln>
+          <a:effectLst/>
+        </p:spPr>
+        <p:style>
+          <a:lnRef idx="1">
+            <a:schemeClr val="accent1"/>
+          </a:lnRef>
+          <a:fillRef idx="3">
+            <a:schemeClr val="accent1"/>
+          </a:fillRef>
+          <a:effectRef idx="2">
+            <a:schemeClr val="accent1"/>
+          </a:effectRef>
+          <a:fontRef idx="minor">
+            <a:schemeClr val="lt1"/>
+          </a:fontRef>
+        </p:style>
+        <p:txBody>
+          <a:bodyPr rtlCol="0" anchor="ctr"/>
+          <a:lstStyle/>
+          <a:p>
+            <a:pPr algn="ctr"/>
+          </a:p>
+        </p:txBody>
+      </p:sp>
+      <p:sp>
+        <p:nvSpPr>
+          <p:cNvPr id="19" name="TextBox 18"/>
+          <p:cNvSpPr txBox="1"/>
+          <p:nvPr/>
+        </p:nvSpPr>
+        <p:spPr>
+          <a:xfrm>
+            <a:off x="548640" y="4114800"/>
+            <a:ext cx="3520440" cy="822960"/>
+          </a:xfrm>
+          <a:prstGeom prst="rect">
+            <a:avLst/>
+          </a:prstGeom>
+          <a:noFill/>
+        </p:spPr>
+        <p:txBody>
+          <a:bodyPr wrap="square" anchor="t">
+            <a:spAutoFit/>
+          </a:bodyPr>
+          <a:lstStyle/>
+          <a:p>
+            <a:pPr algn="ctr">
+              <a:lnSpc>
+                <a:spcPct val="100000"/>
+              </a:lnSpc>
+              <a:spcAft>
+                <a:spcPts val="600"/>
+              </a:spcAft>
+            </a:pPr>
+            <a:r>
+              <a:rPr sz="3400" b="1">
+                <a:solidFill>
+                  <a:srgbClr val="128C7E"/>
+                </a:solidFill>
+                <a:latin typeface="Calibri"/>
+              </a:rPr>
+              <a:t>24–48h</a:t>
+            </a:r>
+          </a:p>
+        </p:txBody>
+      </p:sp>
+      <p:sp>
+        <p:nvSpPr>
+          <p:cNvPr id="20" name="TextBox 19"/>
+          <p:cNvSpPr txBox="1"/>
+          <p:nvPr/>
+        </p:nvSpPr>
+        <p:spPr>
+          <a:xfrm>
+            <a:off x="548640" y="4983480"/>
+            <a:ext cx="3520440" cy="457200"/>
+          </a:xfrm>
+          <a:prstGeom prst="rect">
+            <a:avLst/>
+          </a:prstGeom>
+          <a:noFill/>
+        </p:spPr>
+        <p:txBody>
+          <a:bodyPr wrap="square" anchor="t">
+            <a:spAutoFit/>
+          </a:bodyPr>
+          <a:lstStyle/>
+          <a:p>
+            <a:pPr algn="ctr">
+              <a:lnSpc>
+                <a:spcPct val="100000"/>
+              </a:lnSpc>
+              <a:spcAft>
+                <a:spcPts val="600"/>
+              </a:spcAft>
+            </a:pPr>
+            <a:r>
+              <a:rPr sz="1400" b="1">
+                <a:solidFill>
+                  <a:srgbClr val="0E2A47"/>
+                </a:solidFill>
+                <a:latin typeface="Calibri"/>
+              </a:rPr>
+              <a:t>Resposta no local</a:t>
+            </a:r>
+          </a:p>
+        </p:txBody>
+      </p:sp>
+      <p:sp>
+        <p:nvSpPr>
+          <p:cNvPr id="21" name="Rectangle 20"/>
+          <p:cNvSpPr/>
+          <p:nvPr/>
+        </p:nvSpPr>
+        <p:spPr>
+          <a:xfrm>
+            <a:off x="4251960" y="3840480"/>
+            <a:ext cx="3520440" cy="1691640"/>
+          </a:xfrm>
+          <a:prstGeom prst="rect">
+            <a:avLst/>
+          </a:prstGeom>
+          <a:solidFill>
+            <a:srgbClr val="FFFFFF"/>
+          </a:solidFill>
+          <a:ln>
+            <a:noFill/>
+          </a:ln>
+          <a:effectLst/>
+        </p:spPr>
+        <p:style>
+          <a:lnRef idx="1">
+            <a:schemeClr val="accent1"/>
+          </a:lnRef>
+          <a:fillRef idx="3">
+            <a:schemeClr val="accent1"/>
+          </a:fillRef>
+          <a:effectRef idx="2">
+            <a:schemeClr val="accent1"/>
+          </a:effectRef>
+          <a:fontRef idx="minor">
+            <a:schemeClr val="lt1"/>
+          </a:fontRef>
+        </p:style>
+        <p:txBody>
+          <a:bodyPr rtlCol="0" anchor="ctr"/>
+          <a:lstStyle/>
+          <a:p>
+            <a:pPr algn="ctr"/>
+          </a:p>
+        </p:txBody>
+      </p:sp>
+      <p:sp>
+        <p:nvSpPr>
+          <p:cNvPr id="22" name="Rectangle 21"/>
+          <p:cNvSpPr/>
+          <p:nvPr/>
+        </p:nvSpPr>
+        <p:spPr>
+          <a:xfrm>
+            <a:off x="4251960" y="3840480"/>
+            <a:ext cx="3520440" cy="91440"/>
+          </a:xfrm>
+          <a:prstGeom prst="rect">
+            <a:avLst/>
+          </a:prstGeom>
+          <a:solidFill>
+            <a:srgbClr val="E36A1E"/>
+          </a:solidFill>
+          <a:ln>
+            <a:noFill/>
+          </a:ln>
+          <a:effectLst/>
+        </p:spPr>
+        <p:style>
+          <a:lnRef idx="1">
+            <a:schemeClr val="accent1"/>
+          </a:lnRef>
+          <a:fillRef idx="3">
+            <a:schemeClr val="accent1"/>
+          </a:fillRef>
+          <a:effectRef idx="2">
+            <a:schemeClr val="accent1"/>
+          </a:effectRef>
+          <a:fontRef idx="minor">
+            <a:schemeClr val="lt1"/>
+          </a:fontRef>
+        </p:style>
+        <p:txBody>
+          <a:bodyPr rtlCol="0" anchor="ctr"/>
+          <a:lstStyle/>
+          <a:p>
+            <a:pPr algn="ctr"/>
+          </a:p>
+        </p:txBody>
+      </p:sp>
+      <p:sp>
+        <p:nvSpPr>
+          <p:cNvPr id="23" name="TextBox 22"/>
+          <p:cNvSpPr txBox="1"/>
+          <p:nvPr/>
+        </p:nvSpPr>
+        <p:spPr>
+          <a:xfrm>
+            <a:off x="4251960" y="4114800"/>
+            <a:ext cx="3520440" cy="822960"/>
+          </a:xfrm>
+          <a:prstGeom prst="rect">
+            <a:avLst/>
+          </a:prstGeom>
+          <a:noFill/>
+        </p:spPr>
+        <p:txBody>
+          <a:bodyPr wrap="square" anchor="t">
+            <a:spAutoFit/>
+          </a:bodyPr>
+          <a:lstStyle/>
+          <a:p>
+            <a:pPr algn="ctr">
+              <a:lnSpc>
+                <a:spcPct val="100000"/>
+              </a:lnSpc>
+              <a:spcAft>
+                <a:spcPts val="600"/>
+              </a:spcAft>
+            </a:pPr>
+            <a:r>
+              <a:rPr sz="3400" b="1">
+                <a:solidFill>
+                  <a:srgbClr val="E36A1E"/>
+                </a:solidFill>
+                <a:latin typeface="Calibri"/>
+              </a:rPr>
+              <a:t>≥ 60%</a:t>
+            </a:r>
+          </a:p>
+        </p:txBody>
+      </p:sp>
+      <p:sp>
+        <p:nvSpPr>
+          <p:cNvPr id="24" name="TextBox 23"/>
+          <p:cNvSpPr txBox="1"/>
+          <p:nvPr/>
+        </p:nvSpPr>
+        <p:spPr>
+          <a:xfrm>
+            <a:off x="4251960" y="4983480"/>
+            <a:ext cx="3520440" cy="457200"/>
+          </a:xfrm>
+          <a:prstGeom prst="rect">
+            <a:avLst/>
+          </a:prstGeom>
+          <a:noFill/>
+        </p:spPr>
+        <p:txBody>
+          <a:bodyPr wrap="square" anchor="t">
+            <a:spAutoFit/>
+          </a:bodyPr>
+          <a:lstStyle/>
+          <a:p>
+            <a:pPr algn="ctr">
+              <a:lnSpc>
+                <a:spcPct val="100000"/>
+              </a:lnSpc>
+              <a:spcAft>
+                <a:spcPts val="600"/>
+              </a:spcAft>
+            </a:pPr>
+            <a:r>
+              <a:rPr sz="1400" b="1">
+                <a:solidFill>
+                  <a:srgbClr val="0E2A47"/>
+                </a:solidFill>
+                <a:latin typeface="Calibri"/>
+              </a:rPr>
+              <a:t>Conversão piloto→contrato</a:t>
+            </a:r>
+          </a:p>
+        </p:txBody>
+      </p:sp>
+      <p:sp>
+        <p:nvSpPr>
+          <p:cNvPr id="25" name="Rectangle 24"/>
+          <p:cNvSpPr/>
+          <p:nvPr/>
+        </p:nvSpPr>
+        <p:spPr>
+          <a:xfrm>
+            <a:off x="7955280" y="3840480"/>
+            <a:ext cx="3520440" cy="1691640"/>
+          </a:xfrm>
+          <a:prstGeom prst="rect">
+            <a:avLst/>
+          </a:prstGeom>
+          <a:solidFill>
+            <a:srgbClr val="FFFFFF"/>
+          </a:solidFill>
+          <a:ln>
+            <a:noFill/>
+          </a:ln>
+          <a:effectLst/>
+        </p:spPr>
+        <p:style>
+          <a:lnRef idx="1">
+            <a:schemeClr val="accent1"/>
+          </a:lnRef>
+          <a:fillRef idx="3">
+            <a:schemeClr val="accent1"/>
+          </a:fillRef>
+          <a:effectRef idx="2">
+            <a:schemeClr val="accent1"/>
+          </a:effectRef>
+          <a:fontRef idx="minor">
+            <a:schemeClr val="lt1"/>
+          </a:fontRef>
+        </p:style>
+        <p:txBody>
+          <a:bodyPr rtlCol="0" anchor="ctr"/>
+          <a:lstStyle/>
+          <a:p>
+            <a:pPr algn="ctr"/>
+          </a:p>
+        </p:txBody>
+      </p:sp>
+      <p:sp>
+        <p:nvSpPr>
+          <p:cNvPr id="26" name="Rectangle 25"/>
+          <p:cNvSpPr/>
+          <p:nvPr/>
+        </p:nvSpPr>
+        <p:spPr>
+          <a:xfrm>
+            <a:off x="7955280" y="3840480"/>
+            <a:ext cx="3520440" cy="91440"/>
+          </a:xfrm>
+          <a:prstGeom prst="rect">
+            <a:avLst/>
+          </a:prstGeom>
+          <a:solidFill>
+            <a:srgbClr val="0E2A47"/>
+          </a:solidFill>
+          <a:ln>
+            <a:noFill/>
+          </a:ln>
+          <a:effectLst/>
+        </p:spPr>
+        <p:style>
+          <a:lnRef idx="1">
+            <a:schemeClr val="accent1"/>
+          </a:lnRef>
+          <a:fillRef idx="3">
+            <a:schemeClr val="accent1"/>
+          </a:fillRef>
+          <a:effectRef idx="2">
+            <a:schemeClr val="accent1"/>
+          </a:effectRef>
+          <a:fontRef idx="minor">
+            <a:schemeClr val="lt1"/>
+          </a:fontRef>
+        </p:style>
+        <p:txBody>
+          <a:bodyPr rtlCol="0" anchor="ctr"/>
+          <a:lstStyle/>
+          <a:p>
+            <a:pPr algn="ctr"/>
+          </a:p>
+        </p:txBody>
+      </p:sp>
+      <p:sp>
+        <p:nvSpPr>
+          <p:cNvPr id="27" name="TextBox 26"/>
+          <p:cNvSpPr txBox="1"/>
+          <p:nvPr/>
+        </p:nvSpPr>
+        <p:spPr>
+          <a:xfrm>
+            <a:off x="7955280" y="4114800"/>
+            <a:ext cx="3520440" cy="822960"/>
+          </a:xfrm>
+          <a:prstGeom prst="rect">
+            <a:avLst/>
+          </a:prstGeom>
+          <a:noFill/>
+        </p:spPr>
+        <p:txBody>
+          <a:bodyPr wrap="square" anchor="t">
+            <a:spAutoFit/>
+          </a:bodyPr>
+          <a:lstStyle/>
+          <a:p>
+            <a:pPr algn="ctr">
+              <a:lnSpc>
+                <a:spcPct val="100000"/>
+              </a:lnSpc>
+              <a:spcAft>
+                <a:spcPts val="600"/>
+              </a:spcAft>
+            </a:pPr>
+            <a:r>
+              <a:rPr sz="3400" b="1">
+                <a:solidFill>
+                  <a:srgbClr val="0E2A47"/>
+                </a:solidFill>
+                <a:latin typeface="Calibri"/>
+              </a:rPr>
+              <a:t>−20–35%</a:t>
+            </a:r>
+          </a:p>
+        </p:txBody>
+      </p:sp>
+      <p:sp>
+        <p:nvSpPr>
+          <p:cNvPr id="28" name="TextBox 27"/>
+          <p:cNvSpPr txBox="1"/>
+          <p:nvPr/>
+        </p:nvSpPr>
+        <p:spPr>
+          <a:xfrm>
+            <a:off x="7955280" y="4983480"/>
+            <a:ext cx="3520440" cy="457200"/>
+          </a:xfrm>
+          <a:prstGeom prst="rect">
+            <a:avLst/>
+          </a:prstGeom>
+          <a:noFill/>
+        </p:spPr>
+        <p:txBody>
+          <a:bodyPr wrap="square" anchor="t">
+            <a:spAutoFit/>
+          </a:bodyPr>
+          <a:lstStyle/>
+          <a:p>
+            <a:pPr algn="ctr">
+              <a:lnSpc>
+                <a:spcPct val="100000"/>
+              </a:lnSpc>
+              <a:spcAft>
+                <a:spcPts val="600"/>
+              </a:spcAft>
+            </a:pPr>
+            <a:r>
+              <a:rPr sz="1400" b="1">
+                <a:solidFill>
+                  <a:srgbClr val="0E2A47"/>
+                </a:solidFill>
+                <a:latin typeface="Calibri"/>
+              </a:rPr>
+              <a:t>Custo-de-servir / I&amp;D</a:t>
+            </a:r>
+          </a:p>
+        </p:txBody>
+      </p:sp>
+      <p:sp>
+        <p:nvSpPr>
+          <p:cNvPr id="29" name="TextBox 28"/>
+          <p:cNvSpPr txBox="1"/>
+          <p:nvPr/>
+        </p:nvSpPr>
+        <p:spPr>
+          <a:xfrm>
+            <a:off x="457200" y="6446520"/>
+            <a:ext cx="7315200" cy="365760"/>
+          </a:xfrm>
+          <a:prstGeom prst="rect">
+            <a:avLst/>
+          </a:prstGeom>
+          <a:noFill/>
+        </p:spPr>
+        <p:txBody>
+          <a:bodyPr wrap="square" anchor="t">
+            <a:spAutoFit/>
+          </a:bodyPr>
+          <a:lstStyle/>
+          <a:p>
+            <a:pPr algn="l">
+              <a:lnSpc>
+                <a:spcPct val="100000"/>
+              </a:lnSpc>
+              <a:spcAft>
+                <a:spcPts val="600"/>
+              </a:spcAft>
+            </a:pPr>
+            <a:r>
+              <a:rPr sz="900" b="0">
+                <a:solidFill>
+                  <a:srgbClr val="556670"/>
+                </a:solidFill>
+                <a:latin typeface="Calibri"/>
+              </a:rPr>
+              <a:t>Vidres Portugal — Manual Estratégico</a:t>
+            </a:r>
+          </a:p>
+        </p:txBody>
+      </p:sp>
+      <p:sp>
+        <p:nvSpPr>
+          <p:cNvPr id="30" name="TextBox 29"/>
+          <p:cNvSpPr txBox="1"/>
+          <p:nvPr/>
+        </p:nvSpPr>
+        <p:spPr>
+          <a:xfrm>
+            <a:off x="10332720" y="6446520"/>
+            <a:ext cx="1645920" cy="365760"/>
+          </a:xfrm>
+          <a:prstGeom prst="rect">
+            <a:avLst/>
+          </a:prstGeom>
+          <a:noFill/>
+        </p:spPr>
+        <p:txBody>
+          <a:bodyPr wrap="square" anchor="t">
+            <a:spAutoFit/>
+          </a:bodyPr>
+          <a:lstStyle/>
+          <a:p>
+            <a:pPr algn="r">
+              <a:lnSpc>
+                <a:spcPct val="100000"/>
+              </a:lnSpc>
+              <a:spcAft>
+                <a:spcPts val="600"/>
+              </a:spcAft>
+            </a:pPr>
+            <a:r>
+              <a:rPr sz="900" b="1">
+                <a:solidFill>
+                  <a:srgbClr val="556670"/>
+                </a:solidFill>
+                <a:latin typeface="Calibri"/>
+              </a:rPr>
+              <a:t>13</a:t>
+            </a:r>
+          </a:p>
+        </p:txBody>
+      </p:sp>
+    </p:spTree>
+  </p:cSld>
+  <p:clrMapOvr>
+    <a:masterClrMapping/>
+  </p:clrMapOvr>
+</p:sld>
+</file>
+
+<file path=ppt/slides/slide14.xml><?xml version="1.0" encoding="utf-8"?>
 <p:sld xmlns:a="http://schemas.openxmlformats.org/drawingml/2006/main" xmlns:p="http://schemas.openxmlformats.org/presentationml/2006/main" xmlns:r="http://schemas.openxmlformats.org/officeDocument/2006/relationships">
   <p:cSld>
     <p:bg>
@@ -6430,7 +8170,7 @@
                 </a:solidFill>
                 <a:latin typeface="Calibri"/>
               </a:rPr>
-              <a:t>12</a:t>
+              <a:t>14</a:t>
             </a:r>
           </a:p>
         </p:txBody>
@@ -12978,7 +14718,7 @@
                 </a:solidFill>
                 <a:latin typeface="Calibri"/>
               </a:rPr>
-              <a:t>6. ENTRADA NAS CONTAS-CHAVE</a:t>
+              <a:t>5A. PORTFÓLIO DE INOVAÇÃO</a:t>
             </a:r>
           </a:p>
         </p:txBody>
@@ -13020,7 +14760,7 @@
                 </a:solidFill>
                 <a:latin typeface="Calibri"/>
               </a:rPr>
-              <a:t>Jogo de contas nomeadas — não de volume</a:t>
+              <a:t>5 inovações de matéria-prima — não "o mesmo, mais barato"</a:t>
             </a:r>
           </a:p>
         </p:txBody>
@@ -13034,7 +14774,51 @@
         <p:spPr>
           <a:xfrm>
             <a:off x="548640" y="1783080"/>
-            <a:ext cx="2468880" cy="594360"/>
+            <a:ext cx="2057400" cy="3703320"/>
+          </a:xfrm>
+          <a:prstGeom prst="rect">
+            <a:avLst/>
+          </a:prstGeom>
+          <a:solidFill>
+            <a:srgbClr val="F2F5F7"/>
+          </a:solidFill>
+          <a:ln>
+            <a:noFill/>
+          </a:ln>
+          <a:effectLst/>
+        </p:spPr>
+        <p:style>
+          <a:lnRef idx="1">
+            <a:schemeClr val="accent1"/>
+          </a:lnRef>
+          <a:fillRef idx="3">
+            <a:schemeClr val="accent1"/>
+          </a:fillRef>
+          <a:effectRef idx="2">
+            <a:schemeClr val="accent1"/>
+          </a:effectRef>
+          <a:fontRef idx="minor">
+            <a:schemeClr val="lt1"/>
+          </a:fontRef>
+        </p:style>
+        <p:txBody>
+          <a:bodyPr rtlCol="0" anchor="ctr"/>
+          <a:lstStyle/>
+          <a:p>
+            <a:pPr algn="ctr"/>
+          </a:p>
+        </p:txBody>
+      </p:sp>
+      <p:sp>
+        <p:nvSpPr>
+          <p:cNvPr id="6" name="Rectangle 5"/>
+          <p:cNvSpPr/>
+          <p:nvPr/>
+        </p:nvSpPr>
+        <p:spPr>
+          <a:xfrm>
+            <a:off x="548640" y="1783080"/>
+            <a:ext cx="2057400" cy="1051560"/>
           </a:xfrm>
           <a:prstGeom prst="rect">
             <a:avLst/>
@@ -13071,22 +14855,22 @@
       </p:sp>
       <p:sp>
         <p:nvSpPr>
-          <p:cNvPr id="6" name="TextBox 5"/>
-          <p:cNvSpPr txBox="1"/>
-          <p:nvPr/>
-        </p:nvSpPr>
-        <p:spPr>
-          <a:xfrm>
-            <a:off x="548640" y="1783080"/>
-            <a:ext cx="2468880" cy="594360"/>
-          </a:xfrm>
-          <a:prstGeom prst="rect">
-            <a:avLst/>
-          </a:prstGeom>
-          <a:noFill/>
-        </p:spPr>
-        <p:txBody>
-          <a:bodyPr wrap="square" anchor="ctr">
+          <p:cNvPr id="7" name="TextBox 6"/>
+          <p:cNvSpPr txBox="1"/>
+          <p:nvPr/>
+        </p:nvSpPr>
+        <p:spPr>
+          <a:xfrm>
+            <a:off x="548640" y="1856232"/>
+            <a:ext cx="2057400" cy="365760"/>
+          </a:xfrm>
+          <a:prstGeom prst="rect">
+            <a:avLst/>
+          </a:prstGeom>
+          <a:noFill/>
+        </p:spPr>
+        <p:txBody>
+          <a:bodyPr wrap="square" anchor="t">
             <a:spAutoFit/>
           </a:bodyPr>
           <a:lstStyle/>
@@ -13100,111 +14884,277 @@
               </a:spcAft>
             </a:pPr>
             <a:r>
+              <a:rPr sz="2200" b="1">
+                <a:solidFill>
+                  <a:srgbClr val="FFFFFF"/>
+                </a:solidFill>
+                <a:latin typeface="Calibri"/>
+              </a:rPr>
+              <a:t>1</a:t>
+            </a:r>
+          </a:p>
+        </p:txBody>
+      </p:sp>
+      <p:sp>
+        <p:nvSpPr>
+          <p:cNvPr id="8" name="TextBox 7"/>
+          <p:cNvSpPr txBox="1"/>
+          <p:nvPr/>
+        </p:nvSpPr>
+        <p:spPr>
+          <a:xfrm>
+            <a:off x="548640" y="2221992"/>
+            <a:ext cx="2057400" cy="640080"/>
+          </a:xfrm>
+          <a:prstGeom prst="rect">
+            <a:avLst/>
+          </a:prstGeom>
+          <a:noFill/>
+        </p:spPr>
+        <p:txBody>
+          <a:bodyPr wrap="square" anchor="t">
+            <a:spAutoFit/>
+          </a:bodyPr>
+          <a:lstStyle/>
+          <a:p>
+            <a:pPr algn="ctr">
+              <a:lnSpc>
+                <a:spcPct val="95000"/>
+              </a:lnSpc>
+              <a:spcAft>
+                <a:spcPts val="0"/>
+              </a:spcAft>
+            </a:pPr>
+            <a:r>
               <a:rPr sz="1300" b="1">
                 <a:solidFill>
                   <a:srgbClr val="FFFFFF"/>
                 </a:solidFill>
                 <a:latin typeface="Calibri"/>
               </a:rPr>
-              <a:t>NÍVEL 1 — Farol</a:t>
-            </a:r>
-          </a:p>
-        </p:txBody>
-      </p:sp>
-      <p:sp>
-        <p:nvSpPr>
-          <p:cNvPr id="7" name="TextBox 6"/>
-          <p:cNvSpPr txBox="1"/>
-          <p:nvPr/>
-        </p:nvSpPr>
-        <p:spPr>
-          <a:xfrm>
-            <a:off x="3200400" y="1783080"/>
-            <a:ext cx="3657600" cy="594360"/>
-          </a:xfrm>
-          <a:prstGeom prst="rect">
-            <a:avLst/>
-          </a:prstGeom>
-          <a:noFill/>
-        </p:spPr>
-        <p:txBody>
-          <a:bodyPr wrap="square" anchor="ctr">
-            <a:spAutoFit/>
-          </a:bodyPr>
-          <a:lstStyle/>
-          <a:p>
-            <a:pPr algn="l">
-              <a:lnSpc>
-                <a:spcPct val="100000"/>
+              <a:t>Porcelana</a:t>
+            </a:r>
+          </a:p>
+          <a:p>
+            <a:pPr algn="ctr">
+              <a:lnSpc>
+                <a:spcPct val="95000"/>
+              </a:lnSpc>
+              <a:spcAft>
+                <a:spcPts val="0"/>
+              </a:spcAft>
+            </a:pPr>
+            <a:r>
+              <a:rPr sz="1300" b="1">
+                <a:solidFill>
+                  <a:srgbClr val="FFFFFF"/>
+                </a:solidFill>
+                <a:latin typeface="Calibri"/>
+              </a:rPr>
+              <a:t>Translúcida Vegan</a:t>
+            </a:r>
+          </a:p>
+        </p:txBody>
+      </p:sp>
+      <p:sp>
+        <p:nvSpPr>
+          <p:cNvPr id="9" name="TextBox 8"/>
+          <p:cNvSpPr txBox="1"/>
+          <p:nvPr/>
+        </p:nvSpPr>
+        <p:spPr>
+          <a:xfrm>
+            <a:off x="713232" y="2971800"/>
+            <a:ext cx="1728216" cy="457200"/>
+          </a:xfrm>
+          <a:prstGeom prst="rect">
+            <a:avLst/>
+          </a:prstGeom>
+          <a:noFill/>
+        </p:spPr>
+        <p:txBody>
+          <a:bodyPr wrap="square" anchor="t">
+            <a:spAutoFit/>
+          </a:bodyPr>
+          <a:lstStyle/>
+          <a:p>
+            <a:pPr algn="ctr">
+              <a:lnSpc>
+                <a:spcPct val="95000"/>
               </a:lnSpc>
               <a:spcAft>
                 <a:spcPts val="600"/>
               </a:spcAft>
             </a:pPr>
             <a:r>
-              <a:rPr sz="1300" b="1">
+              <a:rPr sz="1150" b="1">
+                <a:solidFill>
+                  <a:srgbClr val="E36A1E"/>
+                </a:solidFill>
+                <a:latin typeface="Calibri"/>
+              </a:rPr>
+              <a:t>Fine china SEM osso</a:t>
+            </a:r>
+          </a:p>
+        </p:txBody>
+      </p:sp>
+      <p:sp>
+        <p:nvSpPr>
+          <p:cNvPr id="10" name="TextBox 9"/>
+          <p:cNvSpPr txBox="1"/>
+          <p:nvPr/>
+        </p:nvSpPr>
+        <p:spPr>
+          <a:xfrm>
+            <a:off x="713232" y="3566160"/>
+            <a:ext cx="1728216" cy="1188720"/>
+          </a:xfrm>
+          <a:prstGeom prst="rect">
+            <a:avLst/>
+          </a:prstGeom>
+          <a:noFill/>
+        </p:spPr>
+        <p:txBody>
+          <a:bodyPr wrap="square" anchor="t">
+            <a:spAutoFit/>
+          </a:bodyPr>
+          <a:lstStyle/>
+          <a:p>
+            <a:pPr algn="ctr">
+              <a:lnSpc>
+                <a:spcPct val="100000"/>
+              </a:lnSpc>
+              <a:spcAft>
+                <a:spcPts val="200"/>
+              </a:spcAft>
+            </a:pPr>
+            <a:r>
+              <a:rPr sz="1000" b="1">
+                <a:solidFill>
+                  <a:srgbClr val="556670"/>
+                </a:solidFill>
+                <a:latin typeface="Calibri"/>
+              </a:rPr>
+              <a:t>Componentes:</a:t>
+            </a:r>
+          </a:p>
+          <a:p>
+            <a:pPr algn="ctr">
+              <a:lnSpc>
+                <a:spcPct val="100000"/>
+              </a:lnSpc>
+              <a:spcAft>
+                <a:spcPts val="200"/>
+              </a:spcAft>
+            </a:pPr>
+            <a:r>
+              <a:rPr sz="1050" b="0">
+                <a:solidFill>
+                  <a:srgbClr val="1A242B"/>
+                </a:solidFill>
+                <a:latin typeface="Calibri"/>
+              </a:rPr>
+              <a:t>Fosfato de cálcio sintético + wollastonite</a:t>
+            </a:r>
+          </a:p>
+        </p:txBody>
+      </p:sp>
+      <p:sp>
+        <p:nvSpPr>
+          <p:cNvPr id="11" name="TextBox 10"/>
+          <p:cNvSpPr txBox="1"/>
+          <p:nvPr/>
+        </p:nvSpPr>
+        <p:spPr>
+          <a:xfrm>
+            <a:off x="713232" y="4754880"/>
+            <a:ext cx="1728216" cy="640080"/>
+          </a:xfrm>
+          <a:prstGeom prst="rect">
+            <a:avLst/>
+          </a:prstGeom>
+          <a:noFill/>
+        </p:spPr>
+        <p:txBody>
+          <a:bodyPr wrap="square" anchor="t">
+            <a:spAutoFit/>
+          </a:bodyPr>
+          <a:lstStyle/>
+          <a:p>
+            <a:pPr algn="ctr">
+              <a:lnSpc>
+                <a:spcPct val="95000"/>
+              </a:lnSpc>
+              <a:spcAft>
+                <a:spcPts val="600"/>
+              </a:spcAft>
+            </a:pPr>
+            <a:r>
+              <a:rPr sz="1100" b="1">
                 <a:solidFill>
                   <a:srgbClr val="0E2A47"/>
                 </a:solidFill>
                 <a:latin typeface="Calibri"/>
               </a:rPr>
-              <a:t>Vista Alegre · Costa Verde</a:t>
-            </a:r>
-          </a:p>
-        </p:txBody>
-      </p:sp>
-      <p:sp>
-        <p:nvSpPr>
-          <p:cNvPr id="8" name="TextBox 7"/>
-          <p:cNvSpPr txBox="1"/>
-          <p:nvPr/>
-        </p:nvSpPr>
-        <p:spPr>
-          <a:xfrm>
-            <a:off x="6949440" y="1783080"/>
-            <a:ext cx="4663440" cy="594360"/>
-          </a:xfrm>
-          <a:prstGeom prst="rect">
-            <a:avLst/>
-          </a:prstGeom>
-          <a:noFill/>
-        </p:spPr>
-        <p:txBody>
-          <a:bodyPr wrap="square" anchor="ctr">
-            <a:spAutoFit/>
-          </a:bodyPr>
-          <a:lstStyle/>
-          <a:p>
-            <a:pPr algn="l">
-              <a:lnSpc>
-                <a:spcPct val="100000"/>
-              </a:lnSpc>
-              <a:spcAft>
-                <a:spcPts val="600"/>
-              </a:spcAft>
-            </a:pPr>
-            <a:r>
-              <a:rPr sz="1250" b="0">
-                <a:solidFill>
-                  <a:srgbClr val="1A242B"/>
-                </a:solidFill>
-                <a:latin typeface="Calibri"/>
-              </a:rPr>
-              <a:t>Piloto Eco-Low-Fire numa linha</a:t>
-            </a:r>
-          </a:p>
-        </p:txBody>
-      </p:sp>
-      <p:sp>
-        <p:nvSpPr>
-          <p:cNvPr id="9" name="Rectangle 8"/>
+              <a:t>Premium · vegan · ESG</a:t>
+            </a:r>
+          </a:p>
+        </p:txBody>
+      </p:sp>
+      <p:sp>
+        <p:nvSpPr>
+          <p:cNvPr id="12" name="Rectangle 11"/>
           <p:cNvSpPr/>
           <p:nvPr/>
         </p:nvSpPr>
         <p:spPr>
           <a:xfrm>
-            <a:off x="548640" y="2496312"/>
-            <a:ext cx="2468880" cy="594360"/>
+            <a:off x="2729484" y="1783080"/>
+            <a:ext cx="2057400" cy="3703320"/>
+          </a:xfrm>
+          <a:prstGeom prst="rect">
+            <a:avLst/>
+          </a:prstGeom>
+          <a:solidFill>
+            <a:srgbClr val="F2F5F7"/>
+          </a:solidFill>
+          <a:ln>
+            <a:noFill/>
+          </a:ln>
+          <a:effectLst/>
+        </p:spPr>
+        <p:style>
+          <a:lnRef idx="1">
+            <a:schemeClr val="accent1"/>
+          </a:lnRef>
+          <a:fillRef idx="3">
+            <a:schemeClr val="accent1"/>
+          </a:fillRef>
+          <a:effectRef idx="2">
+            <a:schemeClr val="accent1"/>
+          </a:effectRef>
+          <a:fontRef idx="minor">
+            <a:schemeClr val="lt1"/>
+          </a:fontRef>
+        </p:style>
+        <p:txBody>
+          <a:bodyPr rtlCol="0" anchor="ctr"/>
+          <a:lstStyle/>
+          <a:p>
+            <a:pPr algn="ctr"/>
+          </a:p>
+        </p:txBody>
+      </p:sp>
+      <p:sp>
+        <p:nvSpPr>
+          <p:cNvPr id="13" name="Rectangle 12"/>
+          <p:cNvSpPr/>
+          <p:nvPr/>
+        </p:nvSpPr>
+        <p:spPr>
+          <a:xfrm>
+            <a:off x="2729484" y="1783080"/>
+            <a:ext cx="2057400" cy="1051560"/>
           </a:xfrm>
           <a:prstGeom prst="rect">
             <a:avLst/>
@@ -13241,22 +15191,22 @@
       </p:sp>
       <p:sp>
         <p:nvSpPr>
-          <p:cNvPr id="10" name="TextBox 9"/>
-          <p:cNvSpPr txBox="1"/>
-          <p:nvPr/>
-        </p:nvSpPr>
-        <p:spPr>
-          <a:xfrm>
-            <a:off x="548640" y="2496312"/>
-            <a:ext cx="2468880" cy="594360"/>
-          </a:xfrm>
-          <a:prstGeom prst="rect">
-            <a:avLst/>
-          </a:prstGeom>
-          <a:noFill/>
-        </p:spPr>
-        <p:txBody>
-          <a:bodyPr wrap="square" anchor="ctr">
+          <p:cNvPr id="14" name="TextBox 13"/>
+          <p:cNvSpPr txBox="1"/>
+          <p:nvPr/>
+        </p:nvSpPr>
+        <p:spPr>
+          <a:xfrm>
+            <a:off x="2729484" y="1856232"/>
+            <a:ext cx="2057400" cy="365760"/>
+          </a:xfrm>
+          <a:prstGeom prst="rect">
+            <a:avLst/>
+          </a:prstGeom>
+          <a:noFill/>
+        </p:spPr>
+        <p:txBody>
+          <a:bodyPr wrap="square" anchor="t">
             <a:spAutoFit/>
           </a:bodyPr>
           <a:lstStyle/>
@@ -13270,111 +15220,258 @@
               </a:spcAft>
             </a:pPr>
             <a:r>
+              <a:rPr sz="2200" b="1">
+                <a:solidFill>
+                  <a:srgbClr val="FFFFFF"/>
+                </a:solidFill>
+                <a:latin typeface="Calibri"/>
+              </a:rPr>
+              <a:t>2</a:t>
+            </a:r>
+          </a:p>
+        </p:txBody>
+      </p:sp>
+      <p:sp>
+        <p:nvSpPr>
+          <p:cNvPr id="15" name="TextBox 14"/>
+          <p:cNvSpPr txBox="1"/>
+          <p:nvPr/>
+        </p:nvSpPr>
+        <p:spPr>
+          <a:xfrm>
+            <a:off x="2729484" y="2221992"/>
+            <a:ext cx="2057400" cy="640080"/>
+          </a:xfrm>
+          <a:prstGeom prst="rect">
+            <a:avLst/>
+          </a:prstGeom>
+          <a:noFill/>
+        </p:spPr>
+        <p:txBody>
+          <a:bodyPr wrap="square" anchor="t">
+            <a:spAutoFit/>
+          </a:bodyPr>
+          <a:lstStyle/>
+          <a:p>
+            <a:pPr algn="ctr">
+              <a:lnSpc>
+                <a:spcPct val="95000"/>
+              </a:lnSpc>
+              <a:spcAft>
+                <a:spcPts val="0"/>
+              </a:spcAft>
+            </a:pPr>
+            <a:r>
               <a:rPr sz="1300" b="1">
                 <a:solidFill>
                   <a:srgbClr val="FFFFFF"/>
                 </a:solidFill>
                 <a:latin typeface="Calibri"/>
               </a:rPr>
-              <a:t>NÍVEL 2 — Volume</a:t>
-            </a:r>
-          </a:p>
-        </p:txBody>
-      </p:sp>
-      <p:sp>
-        <p:nvSpPr>
-          <p:cNvPr id="11" name="TextBox 10"/>
-          <p:cNvSpPr txBox="1"/>
-          <p:nvPr/>
-        </p:nvSpPr>
-        <p:spPr>
-          <a:xfrm>
-            <a:off x="3200400" y="2496312"/>
-            <a:ext cx="3657600" cy="594360"/>
-          </a:xfrm>
-          <a:prstGeom prst="rect">
-            <a:avLst/>
-          </a:prstGeom>
-          <a:noFill/>
-        </p:spPr>
-        <p:txBody>
-          <a:bodyPr wrap="square" anchor="ctr">
-            <a:spAutoFit/>
-          </a:bodyPr>
-          <a:lstStyle/>
-          <a:p>
-            <a:pPr algn="l">
-              <a:lnSpc>
-                <a:spcPct val="100000"/>
+              <a:t>BioShield</a:t>
+            </a:r>
+          </a:p>
+        </p:txBody>
+      </p:sp>
+      <p:sp>
+        <p:nvSpPr>
+          <p:cNvPr id="16" name="TextBox 15"/>
+          <p:cNvSpPr txBox="1"/>
+          <p:nvPr/>
+        </p:nvSpPr>
+        <p:spPr>
+          <a:xfrm>
+            <a:off x="2894076" y="2971800"/>
+            <a:ext cx="1728216" cy="457200"/>
+          </a:xfrm>
+          <a:prstGeom prst="rect">
+            <a:avLst/>
+          </a:prstGeom>
+          <a:noFill/>
+        </p:spPr>
+        <p:txBody>
+          <a:bodyPr wrap="square" anchor="t">
+            <a:spAutoFit/>
+          </a:bodyPr>
+          <a:lstStyle/>
+          <a:p>
+            <a:pPr algn="ctr">
+              <a:lnSpc>
+                <a:spcPct val="95000"/>
               </a:lnSpc>
               <a:spcAft>
                 <a:spcPts val="600"/>
               </a:spcAft>
             </a:pPr>
             <a:r>
-              <a:rPr sz="1300" b="1">
+              <a:rPr sz="1150" b="1">
+                <a:solidFill>
+                  <a:srgbClr val="128C7E"/>
+                </a:solidFill>
+                <a:latin typeface="Calibri"/>
+              </a:rPr>
+              <a:t>Vidrado antimicrobiano</a:t>
+            </a:r>
+          </a:p>
+        </p:txBody>
+      </p:sp>
+      <p:sp>
+        <p:nvSpPr>
+          <p:cNvPr id="17" name="TextBox 16"/>
+          <p:cNvSpPr txBox="1"/>
+          <p:nvPr/>
+        </p:nvSpPr>
+        <p:spPr>
+          <a:xfrm>
+            <a:off x="2894076" y="3566160"/>
+            <a:ext cx="1728216" cy="1188720"/>
+          </a:xfrm>
+          <a:prstGeom prst="rect">
+            <a:avLst/>
+          </a:prstGeom>
+          <a:noFill/>
+        </p:spPr>
+        <p:txBody>
+          <a:bodyPr wrap="square" anchor="t">
+            <a:spAutoFit/>
+          </a:bodyPr>
+          <a:lstStyle/>
+          <a:p>
+            <a:pPr algn="ctr">
+              <a:lnSpc>
+                <a:spcPct val="100000"/>
+              </a:lnSpc>
+              <a:spcAft>
+                <a:spcPts val="200"/>
+              </a:spcAft>
+            </a:pPr>
+            <a:r>
+              <a:rPr sz="1000" b="1">
+                <a:solidFill>
+                  <a:srgbClr val="556670"/>
+                </a:solidFill>
+                <a:latin typeface="Calibri"/>
+              </a:rPr>
+              <a:t>Componentes:</a:t>
+            </a:r>
+          </a:p>
+          <a:p>
+            <a:pPr algn="ctr">
+              <a:lnSpc>
+                <a:spcPct val="100000"/>
+              </a:lnSpc>
+              <a:spcAft>
+                <a:spcPts val="200"/>
+              </a:spcAft>
+            </a:pPr>
+            <a:r>
+              <a:rPr sz="1050" b="0">
+                <a:solidFill>
+                  <a:srgbClr val="1A242B"/>
+                </a:solidFill>
+                <a:latin typeface="Calibri"/>
+              </a:rPr>
+              <a:t>Iões Ag / Zn / Cu · sem chumbo/cádmio</a:t>
+            </a:r>
+          </a:p>
+        </p:txBody>
+      </p:sp>
+      <p:sp>
+        <p:nvSpPr>
+          <p:cNvPr id="18" name="TextBox 17"/>
+          <p:cNvSpPr txBox="1"/>
+          <p:nvPr/>
+        </p:nvSpPr>
+        <p:spPr>
+          <a:xfrm>
+            <a:off x="2894076" y="4754880"/>
+            <a:ext cx="1728216" cy="640080"/>
+          </a:xfrm>
+          <a:prstGeom prst="rect">
+            <a:avLst/>
+          </a:prstGeom>
+          <a:noFill/>
+        </p:spPr>
+        <p:txBody>
+          <a:bodyPr wrap="square" anchor="t">
+            <a:spAutoFit/>
+          </a:bodyPr>
+          <a:lstStyle/>
+          <a:p>
+            <a:pPr algn="ctr">
+              <a:lnSpc>
+                <a:spcPct val="95000"/>
+              </a:lnSpc>
+              <a:spcAft>
+                <a:spcPts val="600"/>
+              </a:spcAft>
+            </a:pPr>
+            <a:r>
+              <a:rPr sz="1100" b="1">
                 <a:solidFill>
                   <a:srgbClr val="0E2A47"/>
                 </a:solidFill>
                 <a:latin typeface="Calibri"/>
               </a:rPr>
-              <a:t>Grestel · Matceramica · Spal</a:t>
-            </a:r>
-          </a:p>
-        </p:txBody>
-      </p:sp>
-      <p:sp>
-        <p:nvSpPr>
-          <p:cNvPr id="12" name="TextBox 11"/>
-          <p:cNvSpPr txBox="1"/>
-          <p:nvPr/>
-        </p:nvSpPr>
-        <p:spPr>
-          <a:xfrm>
-            <a:off x="6949440" y="2496312"/>
-            <a:ext cx="4663440" cy="594360"/>
-          </a:xfrm>
-          <a:prstGeom prst="rect">
-            <a:avLst/>
-          </a:prstGeom>
-          <a:noFill/>
-        </p:spPr>
-        <p:txBody>
-          <a:bodyPr wrap="square" anchor="ctr">
-            <a:spAutoFit/>
-          </a:bodyPr>
-          <a:lstStyle/>
-          <a:p>
-            <a:pPr algn="l">
-              <a:lnSpc>
-                <a:spcPct val="100000"/>
-              </a:lnSpc>
-              <a:spcAft>
-                <a:spcPts val="600"/>
-              </a:spcAft>
-            </a:pPr>
-            <a:r>
-              <a:rPr sz="1250" b="0">
-                <a:solidFill>
-                  <a:srgbClr val="1A242B"/>
-                </a:solidFill>
-                <a:latin typeface="Calibri"/>
-              </a:rPr>
-              <a:t>SLA de consistência + energia</a:t>
-            </a:r>
-          </a:p>
-        </p:txBody>
-      </p:sp>
-      <p:sp>
-        <p:nvSpPr>
-          <p:cNvPr id="13" name="Rectangle 12"/>
+              <a:t>Auto-higienizante (hospitality/saúde)</a:t>
+            </a:r>
+          </a:p>
+        </p:txBody>
+      </p:sp>
+      <p:sp>
+        <p:nvSpPr>
+          <p:cNvPr id="19" name="Rectangle 18"/>
           <p:cNvSpPr/>
           <p:nvPr/>
         </p:nvSpPr>
         <p:spPr>
           <a:xfrm>
-            <a:off x="548640" y="3209544"/>
-            <a:ext cx="2468880" cy="594360"/>
+            <a:off x="4910328" y="1783080"/>
+            <a:ext cx="2057400" cy="3703320"/>
+          </a:xfrm>
+          <a:prstGeom prst="rect">
+            <a:avLst/>
+          </a:prstGeom>
+          <a:solidFill>
+            <a:srgbClr val="F2F5F7"/>
+          </a:solidFill>
+          <a:ln>
+            <a:noFill/>
+          </a:ln>
+          <a:effectLst/>
+        </p:spPr>
+        <p:style>
+          <a:lnRef idx="1">
+            <a:schemeClr val="accent1"/>
+          </a:lnRef>
+          <a:fillRef idx="3">
+            <a:schemeClr val="accent1"/>
+          </a:fillRef>
+          <a:effectRef idx="2">
+            <a:schemeClr val="accent1"/>
+          </a:effectRef>
+          <a:fontRef idx="minor">
+            <a:schemeClr val="lt1"/>
+          </a:fontRef>
+        </p:style>
+        <p:txBody>
+          <a:bodyPr rtlCol="0" anchor="ctr"/>
+          <a:lstStyle/>
+          <a:p>
+            <a:pPr algn="ctr"/>
+          </a:p>
+        </p:txBody>
+      </p:sp>
+      <p:sp>
+        <p:nvSpPr>
+          <p:cNvPr id="20" name="Rectangle 19"/>
+          <p:cNvSpPr/>
+          <p:nvPr/>
+        </p:nvSpPr>
+        <p:spPr>
+          <a:xfrm>
+            <a:off x="4910328" y="1783080"/>
+            <a:ext cx="2057400" cy="1051560"/>
           </a:xfrm>
           <a:prstGeom prst="rect">
             <a:avLst/>
@@ -13411,22 +15508,22 @@
       </p:sp>
       <p:sp>
         <p:nvSpPr>
-          <p:cNvPr id="14" name="TextBox 13"/>
-          <p:cNvSpPr txBox="1"/>
-          <p:nvPr/>
-        </p:nvSpPr>
-        <p:spPr>
-          <a:xfrm>
-            <a:off x="548640" y="3209544"/>
-            <a:ext cx="2468880" cy="594360"/>
-          </a:xfrm>
-          <a:prstGeom prst="rect">
-            <a:avLst/>
-          </a:prstGeom>
-          <a:noFill/>
-        </p:spPr>
-        <p:txBody>
-          <a:bodyPr wrap="square" anchor="ctr">
+          <p:cNvPr id="21" name="TextBox 20"/>
+          <p:cNvSpPr txBox="1"/>
+          <p:nvPr/>
+        </p:nvSpPr>
+        <p:spPr>
+          <a:xfrm>
+            <a:off x="4910328" y="1856232"/>
+            <a:ext cx="2057400" cy="365760"/>
+          </a:xfrm>
+          <a:prstGeom prst="rect">
+            <a:avLst/>
+          </a:prstGeom>
+          <a:noFill/>
+        </p:spPr>
+        <p:txBody>
+          <a:bodyPr wrap="square" anchor="t">
             <a:spAutoFit/>
           </a:bodyPr>
           <a:lstStyle/>
@@ -13440,111 +15537,214 @@
               </a:spcAft>
             </a:pPr>
             <a:r>
+              <a:rPr sz="2200" b="1">
+                <a:solidFill>
+                  <a:srgbClr val="FFFFFF"/>
+                </a:solidFill>
+                <a:latin typeface="Calibri"/>
+              </a:rPr>
+              <a:t>3</a:t>
+            </a:r>
+          </a:p>
+        </p:txBody>
+      </p:sp>
+      <p:sp>
+        <p:nvSpPr>
+          <p:cNvPr id="22" name="TextBox 21"/>
+          <p:cNvSpPr txBox="1"/>
+          <p:nvPr/>
+        </p:nvSpPr>
+        <p:spPr>
+          <a:xfrm>
+            <a:off x="4910328" y="2221992"/>
+            <a:ext cx="2057400" cy="640080"/>
+          </a:xfrm>
+          <a:prstGeom prst="rect">
+            <a:avLst/>
+          </a:prstGeom>
+          <a:noFill/>
+        </p:spPr>
+        <p:txBody>
+          <a:bodyPr wrap="square" anchor="t">
+            <a:spAutoFit/>
+          </a:bodyPr>
+          <a:lstStyle/>
+          <a:p>
+            <a:pPr algn="ctr">
+              <a:lnSpc>
+                <a:spcPct val="95000"/>
+              </a:lnSpc>
+              <a:spcAft>
+                <a:spcPts val="0"/>
+              </a:spcAft>
+            </a:pPr>
+            <a:r>
               <a:rPr sz="1300" b="1">
                 <a:solidFill>
                   <a:srgbClr val="FFFFFF"/>
                 </a:solidFill>
                 <a:latin typeface="Calibri"/>
               </a:rPr>
-              <a:t>NÍVEL 3 — Expansão</a:t>
-            </a:r>
-          </a:p>
-        </p:txBody>
-      </p:sp>
-      <p:sp>
-        <p:nvSpPr>
-          <p:cNvPr id="15" name="TextBox 14"/>
-          <p:cNvSpPr txBox="1"/>
-          <p:nvPr/>
-        </p:nvSpPr>
-        <p:spPr>
-          <a:xfrm>
-            <a:off x="3200400" y="3209544"/>
-            <a:ext cx="3657600" cy="594360"/>
-          </a:xfrm>
-          <a:prstGeom prst="rect">
-            <a:avLst/>
-          </a:prstGeom>
-          <a:noFill/>
-        </p:spPr>
-        <p:txBody>
-          <a:bodyPr wrap="square" anchor="ctr">
-            <a:spAutoFit/>
-          </a:bodyPr>
-          <a:lstStyle/>
-          <a:p>
-            <a:pPr algn="l">
-              <a:lnSpc>
-                <a:spcPct val="100000"/>
+              <a:t>TerraCircular</a:t>
+            </a:r>
+          </a:p>
+        </p:txBody>
+      </p:sp>
+      <p:sp>
+        <p:nvSpPr>
+          <p:cNvPr id="23" name="TextBox 22"/>
+          <p:cNvSpPr txBox="1"/>
+          <p:nvPr/>
+        </p:nvSpPr>
+        <p:spPr>
+          <a:xfrm>
+            <a:off x="5074920" y="2971800"/>
+            <a:ext cx="1728216" cy="457200"/>
+          </a:xfrm>
+          <a:prstGeom prst="rect">
+            <a:avLst/>
+          </a:prstGeom>
+          <a:noFill/>
+        </p:spPr>
+        <p:txBody>
+          <a:bodyPr wrap="square" anchor="t">
+            <a:spAutoFit/>
+          </a:bodyPr>
+          <a:lstStyle/>
+          <a:p>
+            <a:pPr algn="ctr">
+              <a:lnSpc>
+                <a:spcPct val="95000"/>
               </a:lnSpc>
               <a:spcAft>
                 <a:spcPts val="600"/>
               </a:spcAft>
             </a:pPr>
             <a:r>
-              <a:rPr sz="1300" b="1">
+              <a:rPr sz="1150" b="1">
                 <a:solidFill>
                   <a:srgbClr val="0E2A47"/>
                 </a:solidFill>
                 <a:latin typeface="Calibri"/>
               </a:rPr>
-              <a:t>Sanindusa · Revigrés · Love Tiles</a:t>
-            </a:r>
-          </a:p>
-        </p:txBody>
-      </p:sp>
-      <p:sp>
-        <p:nvSpPr>
-          <p:cNvPr id="16" name="TextBox 15"/>
-          <p:cNvSpPr txBox="1"/>
-          <p:nvPr/>
-        </p:nvSpPr>
-        <p:spPr>
-          <a:xfrm>
-            <a:off x="6949440" y="3209544"/>
-            <a:ext cx="4663440" cy="594360"/>
-          </a:xfrm>
-          <a:prstGeom prst="rect">
-            <a:avLst/>
-          </a:prstGeom>
-          <a:noFill/>
-        </p:spPr>
-        <p:txBody>
-          <a:bodyPr wrap="square" anchor="ctr">
-            <a:spAutoFit/>
-          </a:bodyPr>
-          <a:lstStyle/>
-          <a:p>
-            <a:pPr algn="l">
-              <a:lnSpc>
-                <a:spcPct val="100000"/>
+              <a:t>Matéria-prima circular PT</a:t>
+            </a:r>
+          </a:p>
+        </p:txBody>
+      </p:sp>
+      <p:sp>
+        <p:nvSpPr>
+          <p:cNvPr id="24" name="TextBox 23"/>
+          <p:cNvSpPr txBox="1"/>
+          <p:nvPr/>
+        </p:nvSpPr>
+        <p:spPr>
+          <a:xfrm>
+            <a:off x="5074920" y="3566160"/>
+            <a:ext cx="1728216" cy="1188720"/>
+          </a:xfrm>
+          <a:prstGeom prst="rect">
+            <a:avLst/>
+          </a:prstGeom>
+          <a:noFill/>
+        </p:spPr>
+        <p:txBody>
+          <a:bodyPr wrap="square" anchor="t">
+            <a:spAutoFit/>
+          </a:bodyPr>
+          <a:lstStyle/>
+          <a:p>
+            <a:pPr algn="ctr">
+              <a:lnSpc>
+                <a:spcPct val="100000"/>
+              </a:lnSpc>
+              <a:spcAft>
+                <a:spcPts val="200"/>
+              </a:spcAft>
+            </a:pPr>
+            <a:r>
+              <a:rPr sz="1000" b="1">
+                <a:solidFill>
+                  <a:srgbClr val="556670"/>
+                </a:solidFill>
+                <a:latin typeface="Calibri"/>
+              </a:rPr>
+              <a:t>Componentes:</a:t>
+            </a:r>
+          </a:p>
+          <a:p>
+            <a:pPr algn="ctr">
+              <a:lnSpc>
+                <a:spcPct val="100000"/>
+              </a:lnSpc>
+              <a:spcAft>
+                <a:spcPts val="200"/>
+              </a:spcAft>
+            </a:pPr>
+            <a:r>
+              <a:rPr sz="1050" b="0">
+                <a:solidFill>
+                  <a:srgbClr val="1A242B"/>
+                </a:solidFill>
+                <a:latin typeface="Calibri"/>
+              </a:rPr>
+              <a:t>Cinza de cortiça · biossílica de arroz · conchas · cullet</a:t>
+            </a:r>
+          </a:p>
+        </p:txBody>
+      </p:sp>
+      <p:sp>
+        <p:nvSpPr>
+          <p:cNvPr id="25" name="TextBox 24"/>
+          <p:cNvSpPr txBox="1"/>
+          <p:nvPr/>
+        </p:nvSpPr>
+        <p:spPr>
+          <a:xfrm>
+            <a:off x="5074920" y="4754880"/>
+            <a:ext cx="1728216" cy="640080"/>
+          </a:xfrm>
+          <a:prstGeom prst="rect">
+            <a:avLst/>
+          </a:prstGeom>
+          <a:noFill/>
+        </p:spPr>
+        <p:txBody>
+          <a:bodyPr wrap="square" anchor="t">
+            <a:spAutoFit/>
+          </a:bodyPr>
+          <a:lstStyle/>
+          <a:p>
+            <a:pPr algn="ctr">
+              <a:lnSpc>
+                <a:spcPct val="95000"/>
               </a:lnSpc>
               <a:spcAft>
                 <a:spcPts val="600"/>
               </a:spcAft>
             </a:pPr>
             <a:r>
-              <a:rPr sz="1250" b="0">
-                <a:solidFill>
-                  <a:srgbClr val="1A242B"/>
-                </a:solidFill>
-                <a:latin typeface="Calibri"/>
-              </a:rPr>
-              <a:t>Engobes/vidrados + serviço local</a:t>
-            </a:r>
-          </a:p>
-        </p:txBody>
-      </p:sp>
-      <p:sp>
-        <p:nvSpPr>
-          <p:cNvPr id="17" name="Rectangle 16"/>
+              <a:rPr sz="1100" b="1">
+                <a:solidFill>
+                  <a:srgbClr val="0E2A47"/>
+                </a:solidFill>
+                <a:latin typeface="Calibri"/>
+              </a:rPr>
+              <a:t>−CO₂ + cobertura CBAM</a:t>
+            </a:r>
+          </a:p>
+        </p:txBody>
+      </p:sp>
+      <p:sp>
+        <p:nvSpPr>
+          <p:cNvPr id="26" name="Rectangle 25"/>
           <p:cNvSpPr/>
           <p:nvPr/>
         </p:nvSpPr>
         <p:spPr>
           <a:xfrm>
-            <a:off x="548640" y="4114800"/>
-            <a:ext cx="11064240" cy="1920240"/>
+            <a:off x="7091172" y="1783080"/>
+            <a:ext cx="2057400" cy="3703320"/>
           </a:xfrm>
           <a:prstGeom prst="rect">
             <a:avLst/>
@@ -13581,14 +15781,58 @@
       </p:sp>
       <p:sp>
         <p:nvSpPr>
-          <p:cNvPr id="18" name="TextBox 17"/>
-          <p:cNvSpPr txBox="1"/>
-          <p:nvPr/>
-        </p:nvSpPr>
-        <p:spPr>
-          <a:xfrm>
-            <a:off x="822960" y="4251960"/>
-            <a:ext cx="10515600" cy="457200"/>
+          <p:cNvPr id="27" name="Rectangle 26"/>
+          <p:cNvSpPr/>
+          <p:nvPr/>
+        </p:nvSpPr>
+        <p:spPr>
+          <a:xfrm>
+            <a:off x="7091172" y="1783080"/>
+            <a:ext cx="2057400" cy="1051560"/>
+          </a:xfrm>
+          <a:prstGeom prst="rect">
+            <a:avLst/>
+          </a:prstGeom>
+          <a:solidFill>
+            <a:srgbClr val="6A4C93"/>
+          </a:solidFill>
+          <a:ln>
+            <a:noFill/>
+          </a:ln>
+          <a:effectLst/>
+        </p:spPr>
+        <p:style>
+          <a:lnRef idx="1">
+            <a:schemeClr val="accent1"/>
+          </a:lnRef>
+          <a:fillRef idx="3">
+            <a:schemeClr val="accent1"/>
+          </a:fillRef>
+          <a:effectRef idx="2">
+            <a:schemeClr val="accent1"/>
+          </a:effectRef>
+          <a:fontRef idx="minor">
+            <a:schemeClr val="lt1"/>
+          </a:fontRef>
+        </p:style>
+        <p:txBody>
+          <a:bodyPr rtlCol="0" anchor="ctr"/>
+          <a:lstStyle/>
+          <a:p>
+            <a:pPr algn="ctr"/>
+          </a:p>
+        </p:txBody>
+      </p:sp>
+      <p:sp>
+        <p:nvSpPr>
+          <p:cNvPr id="28" name="TextBox 27"/>
+          <p:cNvSpPr txBox="1"/>
+          <p:nvPr/>
+        </p:nvSpPr>
+        <p:spPr>
+          <a:xfrm>
+            <a:off x="7091172" y="1856232"/>
+            <a:ext cx="2057400" cy="365760"/>
           </a:xfrm>
           <a:prstGeom prst="rect">
             <a:avLst/>
@@ -13601,7 +15845,7 @@
           </a:bodyPr>
           <a:lstStyle/>
           <a:p>
-            <a:pPr algn="l">
+            <a:pPr algn="ctr">
               <a:lnSpc>
                 <a:spcPct val="100000"/>
               </a:lnSpc>
@@ -13610,27 +15854,302 @@
               </a:spcAft>
             </a:pPr>
             <a:r>
-              <a:rPr sz="1700" b="1">
+              <a:rPr sz="2200" b="1">
+                <a:solidFill>
+                  <a:srgbClr val="FFFFFF"/>
+                </a:solidFill>
+                <a:latin typeface="Calibri"/>
+              </a:rPr>
+              <a:t>4</a:t>
+            </a:r>
+          </a:p>
+        </p:txBody>
+      </p:sp>
+      <p:sp>
+        <p:nvSpPr>
+          <p:cNvPr id="29" name="TextBox 28"/>
+          <p:cNvSpPr txBox="1"/>
+          <p:nvPr/>
+        </p:nvSpPr>
+        <p:spPr>
+          <a:xfrm>
+            <a:off x="7091172" y="2221992"/>
+            <a:ext cx="2057400" cy="640080"/>
+          </a:xfrm>
+          <a:prstGeom prst="rect">
+            <a:avLst/>
+          </a:prstGeom>
+          <a:noFill/>
+        </p:spPr>
+        <p:txBody>
+          <a:bodyPr wrap="square" anchor="t">
+            <a:spAutoFit/>
+          </a:bodyPr>
+          <a:lstStyle/>
+          <a:p>
+            <a:pPr algn="ctr">
+              <a:lnSpc>
+                <a:spcPct val="95000"/>
+              </a:lnSpc>
+              <a:spcAft>
+                <a:spcPts val="0"/>
+              </a:spcAft>
+            </a:pPr>
+            <a:r>
+              <a:rPr sz="1300" b="1">
+                <a:solidFill>
+                  <a:srgbClr val="FFFFFF"/>
+                </a:solidFill>
+                <a:latin typeface="Calibri"/>
+              </a:rPr>
+              <a:t>ChromaSafe</a:t>
+            </a:r>
+          </a:p>
+        </p:txBody>
+      </p:sp>
+      <p:sp>
+        <p:nvSpPr>
+          <p:cNvPr id="30" name="TextBox 29"/>
+          <p:cNvSpPr txBox="1"/>
+          <p:nvPr/>
+        </p:nvSpPr>
+        <p:spPr>
+          <a:xfrm>
+            <a:off x="7255764" y="2971800"/>
+            <a:ext cx="1728216" cy="457200"/>
+          </a:xfrm>
+          <a:prstGeom prst="rect">
+            <a:avLst/>
+          </a:prstGeom>
+          <a:noFill/>
+        </p:spPr>
+        <p:txBody>
+          <a:bodyPr wrap="square" anchor="t">
+            <a:spAutoFit/>
+          </a:bodyPr>
+          <a:lstStyle/>
+          <a:p>
+            <a:pPr algn="ctr">
+              <a:lnSpc>
+                <a:spcPct val="95000"/>
+              </a:lnSpc>
+              <a:spcAft>
+                <a:spcPts val="600"/>
+              </a:spcAft>
+            </a:pPr>
+            <a:r>
+              <a:rPr sz="1150" b="1">
+                <a:solidFill>
+                  <a:srgbClr val="6A4C93"/>
+                </a:solidFill>
+                <a:latin typeface="Calibri"/>
+              </a:rPr>
+              <a:t>Cor vibrante segura</a:t>
+            </a:r>
+          </a:p>
+        </p:txBody>
+      </p:sp>
+      <p:sp>
+        <p:nvSpPr>
+          <p:cNvPr id="31" name="TextBox 30"/>
+          <p:cNvSpPr txBox="1"/>
+          <p:nvPr/>
+        </p:nvSpPr>
+        <p:spPr>
+          <a:xfrm>
+            <a:off x="7255764" y="3566160"/>
+            <a:ext cx="1728216" cy="1188720"/>
+          </a:xfrm>
+          <a:prstGeom prst="rect">
+            <a:avLst/>
+          </a:prstGeom>
+          <a:noFill/>
+        </p:spPr>
+        <p:txBody>
+          <a:bodyPr wrap="square" anchor="t">
+            <a:spAutoFit/>
+          </a:bodyPr>
+          <a:lstStyle/>
+          <a:p>
+            <a:pPr algn="ctr">
+              <a:lnSpc>
+                <a:spcPct val="100000"/>
+              </a:lnSpc>
+              <a:spcAft>
+                <a:spcPts val="200"/>
+              </a:spcAft>
+            </a:pPr>
+            <a:r>
+              <a:rPr sz="1000" b="1">
+                <a:solidFill>
+                  <a:srgbClr val="556670"/>
+                </a:solidFill>
+                <a:latin typeface="Calibri"/>
+              </a:rPr>
+              <a:t>Componentes:</a:t>
+            </a:r>
+          </a:p>
+          <a:p>
+            <a:pPr algn="ctr">
+              <a:lnSpc>
+                <a:spcPct val="100000"/>
+              </a:lnSpc>
+              <a:spcAft>
+                <a:spcPts val="200"/>
+              </a:spcAft>
+            </a:pPr>
+            <a:r>
+              <a:rPr sz="1050" b="0">
+                <a:solidFill>
+                  <a:srgbClr val="1A242B"/>
+                </a:solidFill>
+                <a:latin typeface="Calibri"/>
+              </a:rPr>
+              <a:t>Pigmentos encapsulados em zircão + terras-raras</a:t>
+            </a:r>
+          </a:p>
+        </p:txBody>
+      </p:sp>
+      <p:sp>
+        <p:nvSpPr>
+          <p:cNvPr id="32" name="TextBox 31"/>
+          <p:cNvSpPr txBox="1"/>
+          <p:nvPr/>
+        </p:nvSpPr>
+        <p:spPr>
+          <a:xfrm>
+            <a:off x="7255764" y="4754880"/>
+            <a:ext cx="1728216" cy="640080"/>
+          </a:xfrm>
+          <a:prstGeom prst="rect">
+            <a:avLst/>
+          </a:prstGeom>
+          <a:noFill/>
+        </p:spPr>
+        <p:txBody>
+          <a:bodyPr wrap="square" anchor="t">
+            <a:spAutoFit/>
+          </a:bodyPr>
+          <a:lstStyle/>
+          <a:p>
+            <a:pPr algn="ctr">
+              <a:lnSpc>
+                <a:spcPct val="95000"/>
+              </a:lnSpc>
+              <a:spcAft>
+                <a:spcPts val="600"/>
+              </a:spcAft>
+            </a:pPr>
+            <a:r>
+              <a:rPr sz="1100" b="1">
                 <a:solidFill>
                   <a:srgbClr val="0E2A47"/>
                 </a:solidFill>
                 <a:latin typeface="Calibri"/>
               </a:rPr>
-              <a:t>A jogada de "aterragem" em 5 passos</a:t>
-            </a:r>
-          </a:p>
-        </p:txBody>
-      </p:sp>
-      <p:sp>
-        <p:nvSpPr>
-          <p:cNvPr id="19" name="TextBox 18"/>
-          <p:cNvSpPr txBox="1"/>
-          <p:nvPr/>
-        </p:nvSpPr>
-        <p:spPr>
-          <a:xfrm>
-            <a:off x="822960" y="4754880"/>
-            <a:ext cx="10515600" cy="1188720"/>
+              <a:t>Vermelhos food-safe a baixa cozedura</a:t>
+            </a:r>
+          </a:p>
+        </p:txBody>
+      </p:sp>
+      <p:sp>
+        <p:nvSpPr>
+          <p:cNvPr id="33" name="Rectangle 32"/>
+          <p:cNvSpPr/>
+          <p:nvPr/>
+        </p:nvSpPr>
+        <p:spPr>
+          <a:xfrm>
+            <a:off x="9272016" y="1783080"/>
+            <a:ext cx="2057400" cy="3703320"/>
+          </a:xfrm>
+          <a:prstGeom prst="rect">
+            <a:avLst/>
+          </a:prstGeom>
+          <a:solidFill>
+            <a:srgbClr val="F2F5F7"/>
+          </a:solidFill>
+          <a:ln>
+            <a:noFill/>
+          </a:ln>
+          <a:effectLst/>
+        </p:spPr>
+        <p:style>
+          <a:lnRef idx="1">
+            <a:schemeClr val="accent1"/>
+          </a:lnRef>
+          <a:fillRef idx="3">
+            <a:schemeClr val="accent1"/>
+          </a:fillRef>
+          <a:effectRef idx="2">
+            <a:schemeClr val="accent1"/>
+          </a:effectRef>
+          <a:fontRef idx="minor">
+            <a:schemeClr val="lt1"/>
+          </a:fontRef>
+        </p:style>
+        <p:txBody>
+          <a:bodyPr rtlCol="0" anchor="ctr"/>
+          <a:lstStyle/>
+          <a:p>
+            <a:pPr algn="ctr"/>
+          </a:p>
+        </p:txBody>
+      </p:sp>
+      <p:sp>
+        <p:nvSpPr>
+          <p:cNvPr id="34" name="Rectangle 33"/>
+          <p:cNvSpPr/>
+          <p:nvPr/>
+        </p:nvSpPr>
+        <p:spPr>
+          <a:xfrm>
+            <a:off x="9272016" y="1783080"/>
+            <a:ext cx="2057400" cy="1051560"/>
+          </a:xfrm>
+          <a:prstGeom prst="rect">
+            <a:avLst/>
+          </a:prstGeom>
+          <a:solidFill>
+            <a:srgbClr val="B03A2E"/>
+          </a:solidFill>
+          <a:ln>
+            <a:noFill/>
+          </a:ln>
+          <a:effectLst/>
+        </p:spPr>
+        <p:style>
+          <a:lnRef idx="1">
+            <a:schemeClr val="accent1"/>
+          </a:lnRef>
+          <a:fillRef idx="3">
+            <a:schemeClr val="accent1"/>
+          </a:fillRef>
+          <a:effectRef idx="2">
+            <a:schemeClr val="accent1"/>
+          </a:effectRef>
+          <a:fontRef idx="minor">
+            <a:schemeClr val="lt1"/>
+          </a:fontRef>
+        </p:style>
+        <p:txBody>
+          <a:bodyPr rtlCol="0" anchor="ctr"/>
+          <a:lstStyle/>
+          <a:p>
+            <a:pPr algn="ctr"/>
+          </a:p>
+        </p:txBody>
+      </p:sp>
+      <p:sp>
+        <p:nvSpPr>
+          <p:cNvPr id="35" name="TextBox 34"/>
+          <p:cNvSpPr txBox="1"/>
+          <p:nvPr/>
+        </p:nvSpPr>
+        <p:spPr>
+          <a:xfrm>
+            <a:off x="9272016" y="1856232"/>
+            <a:ext cx="2057400" cy="365760"/>
           </a:xfrm>
           <a:prstGeom prst="rect">
             <a:avLst/>
@@ -13643,29 +16162,321 @@
           </a:bodyPr>
           <a:lstStyle/>
           <a:p>
-            <a:pPr algn="l">
-              <a:lnSpc>
-                <a:spcPct val="120000"/>
+            <a:pPr algn="ctr">
+              <a:lnSpc>
+                <a:spcPct val="100000"/>
               </a:lnSpc>
               <a:spcAft>
                 <a:spcPts val="600"/>
               </a:spcAft>
             </a:pPr>
             <a:r>
-              <a:rPr sz="1400" b="0">
+              <a:rPr sz="2200" b="1">
+                <a:solidFill>
+                  <a:srgbClr val="FFFFFF"/>
+                </a:solidFill>
+                <a:latin typeface="Calibri"/>
+              </a:rPr>
+              <a:t>5</a:t>
+            </a:r>
+          </a:p>
+        </p:txBody>
+      </p:sp>
+      <p:sp>
+        <p:nvSpPr>
+          <p:cNvPr id="36" name="TextBox 35"/>
+          <p:cNvSpPr txBox="1"/>
+          <p:nvPr/>
+        </p:nvSpPr>
+        <p:spPr>
+          <a:xfrm>
+            <a:off x="9272016" y="2221992"/>
+            <a:ext cx="2057400" cy="640080"/>
+          </a:xfrm>
+          <a:prstGeom prst="rect">
+            <a:avLst/>
+          </a:prstGeom>
+          <a:noFill/>
+        </p:spPr>
+        <p:txBody>
+          <a:bodyPr wrap="square" anchor="t">
+            <a:spAutoFit/>
+          </a:bodyPr>
+          <a:lstStyle/>
+          <a:p>
+            <a:pPr algn="ctr">
+              <a:lnSpc>
+                <a:spcPct val="95000"/>
+              </a:lnSpc>
+              <a:spcAft>
+                <a:spcPts val="0"/>
+              </a:spcAft>
+            </a:pPr>
+            <a:r>
+              <a:rPr sz="1300" b="1">
+                <a:solidFill>
+                  <a:srgbClr val="FFFFFF"/>
+                </a:solidFill>
+                <a:latin typeface="Calibri"/>
+              </a:rPr>
+              <a:t>DuraGlaze /</a:t>
+            </a:r>
+          </a:p>
+          <a:p>
+            <a:pPr algn="ctr">
+              <a:lnSpc>
+                <a:spcPct val="95000"/>
+              </a:lnSpc>
+              <a:spcAft>
+                <a:spcPts val="0"/>
+              </a:spcAft>
+            </a:pPr>
+            <a:r>
+              <a:rPr sz="1300" b="1">
+                <a:solidFill>
+                  <a:srgbClr val="FFFFFF"/>
+                </a:solidFill>
+                <a:latin typeface="Calibri"/>
+              </a:rPr>
+              <a:t>SensaGlaze</a:t>
+            </a:r>
+          </a:p>
+        </p:txBody>
+      </p:sp>
+      <p:sp>
+        <p:nvSpPr>
+          <p:cNvPr id="37" name="TextBox 36"/>
+          <p:cNvSpPr txBox="1"/>
+          <p:nvPr/>
+        </p:nvSpPr>
+        <p:spPr>
+          <a:xfrm>
+            <a:off x="9436608" y="2971800"/>
+            <a:ext cx="1728216" cy="457200"/>
+          </a:xfrm>
+          <a:prstGeom prst="rect">
+            <a:avLst/>
+          </a:prstGeom>
+          <a:noFill/>
+        </p:spPr>
+        <p:txBody>
+          <a:bodyPr wrap="square" anchor="t">
+            <a:spAutoFit/>
+          </a:bodyPr>
+          <a:lstStyle/>
+          <a:p>
+            <a:pPr algn="ctr">
+              <a:lnSpc>
+                <a:spcPct val="95000"/>
+              </a:lnSpc>
+              <a:spcAft>
+                <a:spcPts val="600"/>
+              </a:spcAft>
+            </a:pPr>
+            <a:r>
+              <a:rPr sz="1150" b="1">
+                <a:solidFill>
+                  <a:srgbClr val="B03A2E"/>
+                </a:solidFill>
+                <a:latin typeface="Calibri"/>
+              </a:rPr>
+              <a:t>Superfícies funcionais</a:t>
+            </a:r>
+          </a:p>
+        </p:txBody>
+      </p:sp>
+      <p:sp>
+        <p:nvSpPr>
+          <p:cNvPr id="38" name="TextBox 37"/>
+          <p:cNvSpPr txBox="1"/>
+          <p:nvPr/>
+        </p:nvSpPr>
+        <p:spPr>
+          <a:xfrm>
+            <a:off x="9436608" y="3566160"/>
+            <a:ext cx="1728216" cy="1188720"/>
+          </a:xfrm>
+          <a:prstGeom prst="rect">
+            <a:avLst/>
+          </a:prstGeom>
+          <a:noFill/>
+        </p:spPr>
+        <p:txBody>
+          <a:bodyPr wrap="square" anchor="t">
+            <a:spAutoFit/>
+          </a:bodyPr>
+          <a:lstStyle/>
+          <a:p>
+            <a:pPr algn="ctr">
+              <a:lnSpc>
+                <a:spcPct val="100000"/>
+              </a:lnSpc>
+              <a:spcAft>
+                <a:spcPts val="200"/>
+              </a:spcAft>
+            </a:pPr>
+            <a:r>
+              <a:rPr sz="1000" b="1">
+                <a:solidFill>
+                  <a:srgbClr val="556670"/>
+                </a:solidFill>
+                <a:latin typeface="Calibri"/>
+              </a:rPr>
+              <a:t>Componentes:</a:t>
+            </a:r>
+          </a:p>
+          <a:p>
+            <a:pPr algn="ctr">
+              <a:lnSpc>
+                <a:spcPct val="100000"/>
+              </a:lnSpc>
+              <a:spcAft>
+                <a:spcPts val="200"/>
+              </a:spcAft>
+            </a:pPr>
+            <a:r>
+              <a:rPr sz="1050" b="0">
                 <a:solidFill>
                   <a:srgbClr val="1A242B"/>
                 </a:solidFill>
                 <a:latin typeface="Calibri"/>
               </a:rPr>
-              <a:t>1. Visita de diagnóstico gratuita (relatório de oportunidade)   →   2. Piloto numa única linha (baixo risco)   →   3. Resultado quantificado em €/ano   →   4. Contrato com SLA de consistência   →   5. Expandir + plataforma de IA = fidelização</a:t>
-            </a:r>
-          </a:p>
-        </p:txBody>
-      </p:sp>
-      <p:sp>
-        <p:nvSpPr>
-          <p:cNvPr id="20" name="TextBox 19"/>
+              <a:t>CTE ajustado + nano (zircónia) + termocrómico</a:t>
+            </a:r>
+          </a:p>
+        </p:txBody>
+      </p:sp>
+      <p:sp>
+        <p:nvSpPr>
+          <p:cNvPr id="39" name="TextBox 38"/>
+          <p:cNvSpPr txBox="1"/>
+          <p:nvPr/>
+        </p:nvSpPr>
+        <p:spPr>
+          <a:xfrm>
+            <a:off x="9436608" y="4754880"/>
+            <a:ext cx="1728216" cy="640080"/>
+          </a:xfrm>
+          <a:prstGeom prst="rect">
+            <a:avLst/>
+          </a:prstGeom>
+          <a:noFill/>
+        </p:spPr>
+        <p:txBody>
+          <a:bodyPr wrap="square" anchor="t">
+            <a:spAutoFit/>
+          </a:bodyPr>
+          <a:lstStyle/>
+          <a:p>
+            <a:pPr algn="ctr">
+              <a:lnSpc>
+                <a:spcPct val="95000"/>
+              </a:lnSpc>
+              <a:spcAft>
+                <a:spcPts val="600"/>
+              </a:spcAft>
+            </a:pPr>
+            <a:r>
+              <a:rPr sz="1100" b="1">
+                <a:solidFill>
+                  <a:srgbClr val="0E2A47"/>
+                </a:solidFill>
+                <a:latin typeface="Calibri"/>
+              </a:rPr>
+              <a:t>Durabilidade + efeito "wow"</a:t>
+            </a:r>
+          </a:p>
+        </p:txBody>
+      </p:sp>
+      <p:sp>
+        <p:nvSpPr>
+          <p:cNvPr id="40" name="Rectangle 39"/>
+          <p:cNvSpPr/>
+          <p:nvPr/>
+        </p:nvSpPr>
+        <p:spPr>
+          <a:xfrm>
+            <a:off x="548640" y="5623560"/>
+            <a:ext cx="11064240" cy="566928"/>
+          </a:xfrm>
+          <a:prstGeom prst="rect">
+            <a:avLst/>
+          </a:prstGeom>
+          <a:solidFill>
+            <a:srgbClr val="1A242B"/>
+          </a:solidFill>
+          <a:ln>
+            <a:noFill/>
+          </a:ln>
+          <a:effectLst/>
+        </p:spPr>
+        <p:style>
+          <a:lnRef idx="1">
+            <a:schemeClr val="accent1"/>
+          </a:lnRef>
+          <a:fillRef idx="3">
+            <a:schemeClr val="accent1"/>
+          </a:fillRef>
+          <a:effectRef idx="2">
+            <a:schemeClr val="accent1"/>
+          </a:effectRef>
+          <a:fontRef idx="minor">
+            <a:schemeClr val="lt1"/>
+          </a:fontRef>
+        </p:style>
+        <p:txBody>
+          <a:bodyPr rtlCol="0" anchor="ctr"/>
+          <a:lstStyle/>
+          <a:p>
+            <a:pPr algn="ctr"/>
+          </a:p>
+        </p:txBody>
+      </p:sp>
+      <p:sp>
+        <p:nvSpPr>
+          <p:cNvPr id="41" name="TextBox 40"/>
+          <p:cNvSpPr txBox="1"/>
+          <p:nvPr/>
+        </p:nvSpPr>
+        <p:spPr>
+          <a:xfrm>
+            <a:off x="548640" y="5623560"/>
+            <a:ext cx="11064240" cy="566928"/>
+          </a:xfrm>
+          <a:prstGeom prst="rect">
+            <a:avLst/>
+          </a:prstGeom>
+          <a:noFill/>
+        </p:spPr>
+        <p:txBody>
+          <a:bodyPr wrap="square" anchor="ctr">
+            <a:spAutoFit/>
+          </a:bodyPr>
+          <a:lstStyle/>
+          <a:p>
+            <a:pPr algn="ctr">
+              <a:lnSpc>
+                <a:spcPct val="100000"/>
+              </a:lnSpc>
+              <a:spcAft>
+                <a:spcPts val="600"/>
+              </a:spcAft>
+            </a:pPr>
+            <a:r>
+              <a:rPr sz="1300" b="1">
+                <a:solidFill>
+                  <a:srgbClr val="FFFFFF"/>
+                </a:solidFill>
+                <a:latin typeface="Calibri"/>
+              </a:rPr>
+              <a:t>Vendemos componentes que ninguém mais tem — segurança alimentar, circularidade, durabilidade e design funcional.</a:t>
+            </a:r>
+          </a:p>
+        </p:txBody>
+      </p:sp>
+      <p:sp>
+        <p:nvSpPr>
+          <p:cNvPr id="42" name="TextBox 41"/>
           <p:cNvSpPr txBox="1"/>
           <p:nvPr/>
         </p:nvSpPr>
@@ -13707,7 +16518,7 @@
       </p:sp>
       <p:sp>
         <p:nvSpPr>
-          <p:cNvPr id="21" name="TextBox 20"/>
+          <p:cNvPr id="43" name="TextBox 42"/>
           <p:cNvSpPr txBox="1"/>
           <p:nvPr/>
         </p:nvSpPr>
@@ -13854,7 +16665,7 @@
                 </a:solidFill>
                 <a:latin typeface="Calibri"/>
               </a:rPr>
-              <a:t>7. PROJETOS-PILOTO</a:t>
+              <a:t>5A. PORTFÓLIO DE INOVAÇÃO</a:t>
             </a:r>
           </a:p>
         </p:txBody>
@@ -13896,7 +16707,7 @@
                 </a:solidFill>
                 <a:latin typeface="Calibri"/>
               </a:rPr>
-              <a:t>Dois pilotos farol = prova quantificada e inegável</a:t>
+              <a:t>Priorização — o que lançar primeiro e porquê</a:t>
             </a:r>
           </a:p>
         </p:txBody>
@@ -13910,7 +16721,261 @@
         <p:spPr>
           <a:xfrm>
             <a:off x="548640" y="1783080"/>
-            <a:ext cx="5440680" cy="4023360"/>
+            <a:ext cx="11064240" cy="566928"/>
+          </a:xfrm>
+          <a:prstGeom prst="rect">
+            <a:avLst/>
+          </a:prstGeom>
+          <a:solidFill>
+            <a:srgbClr val="0E2A47"/>
+          </a:solidFill>
+          <a:ln>
+            <a:noFill/>
+          </a:ln>
+          <a:effectLst/>
+        </p:spPr>
+        <p:style>
+          <a:lnRef idx="1">
+            <a:schemeClr val="accent1"/>
+          </a:lnRef>
+          <a:fillRef idx="3">
+            <a:schemeClr val="accent1"/>
+          </a:fillRef>
+          <a:effectRef idx="2">
+            <a:schemeClr val="accent1"/>
+          </a:effectRef>
+          <a:fontRef idx="minor">
+            <a:schemeClr val="lt1"/>
+          </a:fontRef>
+        </p:style>
+        <p:txBody>
+          <a:bodyPr rtlCol="0" anchor="ctr"/>
+          <a:lstStyle/>
+          <a:p>
+            <a:pPr algn="ctr"/>
+          </a:p>
+        </p:txBody>
+      </p:sp>
+      <p:sp>
+        <p:nvSpPr>
+          <p:cNvPr id="6" name="TextBox 5"/>
+          <p:cNvSpPr txBox="1"/>
+          <p:nvPr/>
+        </p:nvSpPr>
+        <p:spPr>
+          <a:xfrm>
+            <a:off x="640080" y="1783080"/>
+            <a:ext cx="2743200" cy="566928"/>
+          </a:xfrm>
+          <a:prstGeom prst="rect">
+            <a:avLst/>
+          </a:prstGeom>
+          <a:noFill/>
+        </p:spPr>
+        <p:txBody>
+          <a:bodyPr wrap="square" anchor="ctr">
+            <a:spAutoFit/>
+          </a:bodyPr>
+          <a:lstStyle/>
+          <a:p>
+            <a:pPr algn="l">
+              <a:lnSpc>
+                <a:spcPct val="100000"/>
+              </a:lnSpc>
+              <a:spcAft>
+                <a:spcPts val="600"/>
+              </a:spcAft>
+            </a:pPr>
+            <a:r>
+              <a:rPr sz="1250" b="1">
+                <a:solidFill>
+                  <a:srgbClr val="FFFFFF"/>
+                </a:solidFill>
+                <a:latin typeface="Calibri"/>
+              </a:rPr>
+              <a:t>Inovação</a:t>
+            </a:r>
+          </a:p>
+        </p:txBody>
+      </p:sp>
+      <p:sp>
+        <p:nvSpPr>
+          <p:cNvPr id="7" name="TextBox 6"/>
+          <p:cNvSpPr txBox="1"/>
+          <p:nvPr/>
+        </p:nvSpPr>
+        <p:spPr>
+          <a:xfrm>
+            <a:off x="3474720" y="1783080"/>
+            <a:ext cx="3291840" cy="566928"/>
+          </a:xfrm>
+          <a:prstGeom prst="rect">
+            <a:avLst/>
+          </a:prstGeom>
+          <a:noFill/>
+        </p:spPr>
+        <p:txBody>
+          <a:bodyPr wrap="square" anchor="ctr">
+            <a:spAutoFit/>
+          </a:bodyPr>
+          <a:lstStyle/>
+          <a:p>
+            <a:pPr algn="l">
+              <a:lnSpc>
+                <a:spcPct val="100000"/>
+              </a:lnSpc>
+              <a:spcAft>
+                <a:spcPts val="600"/>
+              </a:spcAft>
+            </a:pPr>
+            <a:r>
+              <a:rPr sz="1250" b="1">
+                <a:solidFill>
+                  <a:srgbClr val="FFFFFF"/>
+                </a:solidFill>
+                <a:latin typeface="Calibri"/>
+              </a:rPr>
+              <a:t>Dor que resolve</a:t>
+            </a:r>
+          </a:p>
+        </p:txBody>
+      </p:sp>
+      <p:sp>
+        <p:nvSpPr>
+          <p:cNvPr id="8" name="TextBox 7"/>
+          <p:cNvSpPr txBox="1"/>
+          <p:nvPr/>
+        </p:nvSpPr>
+        <p:spPr>
+          <a:xfrm>
+            <a:off x="6858000" y="1783080"/>
+            <a:ext cx="1097280" cy="566928"/>
+          </a:xfrm>
+          <a:prstGeom prst="rect">
+            <a:avLst/>
+          </a:prstGeom>
+          <a:noFill/>
+        </p:spPr>
+        <p:txBody>
+          <a:bodyPr wrap="square" anchor="ctr">
+            <a:spAutoFit/>
+          </a:bodyPr>
+          <a:lstStyle/>
+          <a:p>
+            <a:pPr algn="l">
+              <a:lnSpc>
+                <a:spcPct val="100000"/>
+              </a:lnSpc>
+              <a:spcAft>
+                <a:spcPts val="600"/>
+              </a:spcAft>
+            </a:pPr>
+            <a:r>
+              <a:rPr sz="1250" b="1">
+                <a:solidFill>
+                  <a:srgbClr val="FFFFFF"/>
+                </a:solidFill>
+                <a:latin typeface="Calibri"/>
+              </a:rPr>
+              <a:t>Margem</a:t>
+            </a:r>
+          </a:p>
+        </p:txBody>
+      </p:sp>
+      <p:sp>
+        <p:nvSpPr>
+          <p:cNvPr id="9" name="TextBox 8"/>
+          <p:cNvSpPr txBox="1"/>
+          <p:nvPr/>
+        </p:nvSpPr>
+        <p:spPr>
+          <a:xfrm>
+            <a:off x="8046719" y="1783080"/>
+            <a:ext cx="1097280" cy="566928"/>
+          </a:xfrm>
+          <a:prstGeom prst="rect">
+            <a:avLst/>
+          </a:prstGeom>
+          <a:noFill/>
+        </p:spPr>
+        <p:txBody>
+          <a:bodyPr wrap="square" anchor="ctr">
+            <a:spAutoFit/>
+          </a:bodyPr>
+          <a:lstStyle/>
+          <a:p>
+            <a:pPr algn="l">
+              <a:lnSpc>
+                <a:spcPct val="100000"/>
+              </a:lnSpc>
+              <a:spcAft>
+                <a:spcPts val="600"/>
+              </a:spcAft>
+            </a:pPr>
+            <a:r>
+              <a:rPr sz="1250" b="1">
+                <a:solidFill>
+                  <a:srgbClr val="FFFFFF"/>
+                </a:solidFill>
+                <a:latin typeface="Calibri"/>
+              </a:rPr>
+              <a:t>I&amp;D</a:t>
+            </a:r>
+          </a:p>
+        </p:txBody>
+      </p:sp>
+      <p:sp>
+        <p:nvSpPr>
+          <p:cNvPr id="10" name="TextBox 9"/>
+          <p:cNvSpPr txBox="1"/>
+          <p:nvPr/>
+        </p:nvSpPr>
+        <p:spPr>
+          <a:xfrm>
+            <a:off x="9235440" y="1783080"/>
+            <a:ext cx="2468880" cy="566928"/>
+          </a:xfrm>
+          <a:prstGeom prst="rect">
+            <a:avLst/>
+          </a:prstGeom>
+          <a:noFill/>
+        </p:spPr>
+        <p:txBody>
+          <a:bodyPr wrap="square" anchor="ctr">
+            <a:spAutoFit/>
+          </a:bodyPr>
+          <a:lstStyle/>
+          <a:p>
+            <a:pPr algn="l">
+              <a:lnSpc>
+                <a:spcPct val="100000"/>
+              </a:lnSpc>
+              <a:spcAft>
+                <a:spcPts val="600"/>
+              </a:spcAft>
+            </a:pPr>
+            <a:r>
+              <a:rPr sz="1250" b="1">
+                <a:solidFill>
+                  <a:srgbClr val="FFFFFF"/>
+                </a:solidFill>
+                <a:latin typeface="Calibri"/>
+              </a:rPr>
+              <a:t>Prioridade</a:t>
+            </a:r>
+          </a:p>
+        </p:txBody>
+      </p:sp>
+      <p:sp>
+        <p:nvSpPr>
+          <p:cNvPr id="11" name="Rectangle 10"/>
+          <p:cNvSpPr/>
+          <p:nvPr/>
+        </p:nvSpPr>
+        <p:spPr>
+          <a:xfrm>
+            <a:off x="548640" y="2350008"/>
+            <a:ext cx="11064240" cy="566928"/>
           </a:xfrm>
           <a:prstGeom prst="rect">
             <a:avLst/>
@@ -13947,20 +17012,230 @@
       </p:sp>
       <p:sp>
         <p:nvSpPr>
-          <p:cNvPr id="6" name="Rectangle 5"/>
+          <p:cNvPr id="12" name="TextBox 11"/>
+          <p:cNvSpPr txBox="1"/>
+          <p:nvPr/>
+        </p:nvSpPr>
+        <p:spPr>
+          <a:xfrm>
+            <a:off x="640080" y="2350008"/>
+            <a:ext cx="2743200" cy="566928"/>
+          </a:xfrm>
+          <a:prstGeom prst="rect">
+            <a:avLst/>
+          </a:prstGeom>
+          <a:noFill/>
+        </p:spPr>
+        <p:txBody>
+          <a:bodyPr wrap="square" anchor="ctr">
+            <a:spAutoFit/>
+          </a:bodyPr>
+          <a:lstStyle/>
+          <a:p>
+            <a:pPr algn="l">
+              <a:lnSpc>
+                <a:spcPct val="100000"/>
+              </a:lnSpc>
+              <a:spcAft>
+                <a:spcPts val="600"/>
+              </a:spcAft>
+            </a:pPr>
+            <a:r>
+              <a:rPr sz="1200" b="1">
+                <a:solidFill>
+                  <a:srgbClr val="1A242B"/>
+                </a:solidFill>
+                <a:latin typeface="Calibri"/>
+              </a:rPr>
+              <a:t>3 · TerraCircular</a:t>
+            </a:r>
+          </a:p>
+        </p:txBody>
+      </p:sp>
+      <p:sp>
+        <p:nvSpPr>
+          <p:cNvPr id="13" name="TextBox 12"/>
+          <p:cNvSpPr txBox="1"/>
+          <p:nvPr/>
+        </p:nvSpPr>
+        <p:spPr>
+          <a:xfrm>
+            <a:off x="3474720" y="2350008"/>
+            <a:ext cx="3291840" cy="566928"/>
+          </a:xfrm>
+          <a:prstGeom prst="rect">
+            <a:avLst/>
+          </a:prstGeom>
+          <a:noFill/>
+        </p:spPr>
+        <p:txBody>
+          <a:bodyPr wrap="square" anchor="ctr">
+            <a:spAutoFit/>
+          </a:bodyPr>
+          <a:lstStyle/>
+          <a:p>
+            <a:pPr algn="l">
+              <a:lnSpc>
+                <a:spcPct val="100000"/>
+              </a:lnSpc>
+              <a:spcAft>
+                <a:spcPts val="600"/>
+              </a:spcAft>
+            </a:pPr>
+            <a:r>
+              <a:rPr sz="1200" b="0">
+                <a:solidFill>
+                  <a:srgbClr val="1A242B"/>
+                </a:solidFill>
+                <a:latin typeface="Calibri"/>
+              </a:rPr>
+              <a:t>Custo + CO₂ + CBAM</a:t>
+            </a:r>
+          </a:p>
+        </p:txBody>
+      </p:sp>
+      <p:sp>
+        <p:nvSpPr>
+          <p:cNvPr id="14" name="TextBox 13"/>
+          <p:cNvSpPr txBox="1"/>
+          <p:nvPr/>
+        </p:nvSpPr>
+        <p:spPr>
+          <a:xfrm>
+            <a:off x="6858000" y="2350008"/>
+            <a:ext cx="1097280" cy="566928"/>
+          </a:xfrm>
+          <a:prstGeom prst="rect">
+            <a:avLst/>
+          </a:prstGeom>
+          <a:noFill/>
+        </p:spPr>
+        <p:txBody>
+          <a:bodyPr wrap="square" anchor="ctr">
+            <a:spAutoFit/>
+          </a:bodyPr>
+          <a:lstStyle/>
+          <a:p>
+            <a:pPr algn="l">
+              <a:lnSpc>
+                <a:spcPct val="100000"/>
+              </a:lnSpc>
+              <a:spcAft>
+                <a:spcPts val="600"/>
+              </a:spcAft>
+            </a:pPr>
+            <a:r>
+              <a:rPr sz="1200" b="0">
+                <a:solidFill>
+                  <a:srgbClr val="1A242B"/>
+                </a:solidFill>
+                <a:latin typeface="Calibri"/>
+              </a:rPr>
+              <a:t>Média</a:t>
+            </a:r>
+          </a:p>
+        </p:txBody>
+      </p:sp>
+      <p:sp>
+        <p:nvSpPr>
+          <p:cNvPr id="15" name="TextBox 14"/>
+          <p:cNvSpPr txBox="1"/>
+          <p:nvPr/>
+        </p:nvSpPr>
+        <p:spPr>
+          <a:xfrm>
+            <a:off x="8046719" y="2350008"/>
+            <a:ext cx="1097280" cy="566928"/>
+          </a:xfrm>
+          <a:prstGeom prst="rect">
+            <a:avLst/>
+          </a:prstGeom>
+          <a:noFill/>
+        </p:spPr>
+        <p:txBody>
+          <a:bodyPr wrap="square" anchor="ctr">
+            <a:spAutoFit/>
+          </a:bodyPr>
+          <a:lstStyle/>
+          <a:p>
+            <a:pPr algn="l">
+              <a:lnSpc>
+                <a:spcPct val="100000"/>
+              </a:lnSpc>
+              <a:spcAft>
+                <a:spcPts val="600"/>
+              </a:spcAft>
+            </a:pPr>
+            <a:r>
+              <a:rPr sz="1200" b="0">
+                <a:solidFill>
+                  <a:srgbClr val="1A242B"/>
+                </a:solidFill>
+                <a:latin typeface="Calibri"/>
+              </a:rPr>
+              <a:t>Baixo</a:t>
+            </a:r>
+          </a:p>
+        </p:txBody>
+      </p:sp>
+      <p:sp>
+        <p:nvSpPr>
+          <p:cNvPr id="16" name="TextBox 15"/>
+          <p:cNvSpPr txBox="1"/>
+          <p:nvPr/>
+        </p:nvSpPr>
+        <p:spPr>
+          <a:xfrm>
+            <a:off x="9235440" y="2350008"/>
+            <a:ext cx="2468880" cy="566928"/>
+          </a:xfrm>
+          <a:prstGeom prst="rect">
+            <a:avLst/>
+          </a:prstGeom>
+          <a:noFill/>
+        </p:spPr>
+        <p:txBody>
+          <a:bodyPr wrap="square" anchor="ctr">
+            <a:spAutoFit/>
+          </a:bodyPr>
+          <a:lstStyle/>
+          <a:p>
+            <a:pPr algn="l">
+              <a:lnSpc>
+                <a:spcPct val="100000"/>
+              </a:lnSpc>
+              <a:spcAft>
+                <a:spcPts val="600"/>
+              </a:spcAft>
+            </a:pPr>
+            <a:r>
+              <a:rPr sz="1200" b="1">
+                <a:solidFill>
+                  <a:srgbClr val="E36A1E"/>
+                </a:solidFill>
+                <a:latin typeface="Calibri"/>
+              </a:rPr>
+              <a:t>IMEDIATA</a:t>
+            </a:r>
+          </a:p>
+        </p:txBody>
+      </p:sp>
+      <p:sp>
+        <p:nvSpPr>
+          <p:cNvPr id="17" name="Rectangle 16"/>
           <p:cNvSpPr/>
           <p:nvPr/>
         </p:nvSpPr>
         <p:spPr>
           <a:xfrm>
-            <a:off x="548640" y="1783080"/>
-            <a:ext cx="5440680" cy="731520"/>
+            <a:off x="548640" y="2916936"/>
+            <a:ext cx="11064240" cy="566928"/>
           </a:xfrm>
           <a:prstGeom prst="rect">
             <a:avLst/>
           </a:prstGeom>
           <a:solidFill>
-            <a:srgbClr val="0E2A47"/>
+            <a:srgbClr val="E7EEF1"/>
           </a:solidFill>
           <a:ln>
             <a:noFill/>
@@ -13991,14 +17266,14 @@
       </p:sp>
       <p:sp>
         <p:nvSpPr>
-          <p:cNvPr id="7" name="TextBox 6"/>
-          <p:cNvSpPr txBox="1"/>
-          <p:nvPr/>
-        </p:nvSpPr>
-        <p:spPr>
-          <a:xfrm>
-            <a:off x="777240" y="1783080"/>
-            <a:ext cx="5029200" cy="731520"/>
+          <p:cNvPr id="18" name="TextBox 17"/>
+          <p:cNvSpPr txBox="1"/>
+          <p:nvPr/>
+        </p:nvSpPr>
+        <p:spPr>
+          <a:xfrm>
+            <a:off x="640080" y="2916936"/>
+            <a:ext cx="2743200" cy="566928"/>
           </a:xfrm>
           <a:prstGeom prst="rect">
             <a:avLst/>
@@ -14016,213 +17291,199 @@
                 <a:spcPct val="100000"/>
               </a:lnSpc>
               <a:spcAft>
-                <a:spcPts val="200"/>
-              </a:spcAft>
-            </a:pPr>
-            <a:r>
-              <a:rPr sz="1800" b="1">
-                <a:solidFill>
-                  <a:srgbClr val="FFFFFF"/>
-                </a:solidFill>
-                <a:latin typeface="Calibri"/>
-              </a:rPr>
-              <a:t>PILOTO A — Vista Alegre</a:t>
-            </a:r>
-          </a:p>
+                <a:spcPts val="600"/>
+              </a:spcAft>
+            </a:pPr>
+            <a:r>
+              <a:rPr sz="1200" b="1">
+                <a:solidFill>
+                  <a:srgbClr val="1A242B"/>
+                </a:solidFill>
+                <a:latin typeface="Calibri"/>
+              </a:rPr>
+              <a:t>2 · BioShield</a:t>
+            </a:r>
+          </a:p>
+        </p:txBody>
+      </p:sp>
+      <p:sp>
+        <p:nvSpPr>
+          <p:cNvPr id="19" name="TextBox 18"/>
+          <p:cNvSpPr txBox="1"/>
+          <p:nvPr/>
+        </p:nvSpPr>
+        <p:spPr>
+          <a:xfrm>
+            <a:off x="3474720" y="2916936"/>
+            <a:ext cx="3291840" cy="566928"/>
+          </a:xfrm>
+          <a:prstGeom prst="rect">
+            <a:avLst/>
+          </a:prstGeom>
+          <a:noFill/>
+        </p:spPr>
+        <p:txBody>
+          <a:bodyPr wrap="square" anchor="ctr">
+            <a:spAutoFit/>
+          </a:bodyPr>
+          <a:lstStyle/>
           <a:p>
             <a:pPr algn="l">
               <a:lnSpc>
                 <a:spcPct val="100000"/>
               </a:lnSpc>
               <a:spcAft>
-                <a:spcPts val="200"/>
-              </a:spcAft>
-            </a:pPr>
-            <a:r>
-              <a:rPr sz="1100" b="0">
-                <a:solidFill>
-                  <a:srgbClr val="C8D4DC"/>
-                </a:solidFill>
-                <a:latin typeface="Calibri"/>
-              </a:rPr>
-              <a:t>Porcelana premium · a barra de qualidade mais alta</a:t>
-            </a:r>
-          </a:p>
-        </p:txBody>
-      </p:sp>
-      <p:sp>
-        <p:nvSpPr>
-          <p:cNvPr id="8" name="TextBox 7"/>
-          <p:cNvSpPr txBox="1"/>
-          <p:nvPr/>
-        </p:nvSpPr>
-        <p:spPr>
-          <a:xfrm>
-            <a:off x="777240" y="2743200"/>
-            <a:ext cx="5029200" cy="2926080"/>
-          </a:xfrm>
-          <a:prstGeom prst="rect">
-            <a:avLst/>
-          </a:prstGeom>
-          <a:noFill/>
-        </p:spPr>
-        <p:txBody>
-          <a:bodyPr wrap="square" anchor="t">
+                <a:spcPts val="600"/>
+              </a:spcAft>
+            </a:pPr>
+            <a:r>
+              <a:rPr sz="1200" b="0">
+                <a:solidFill>
+                  <a:srgbClr val="1A242B"/>
+                </a:solidFill>
+                <a:latin typeface="Calibri"/>
+              </a:rPr>
+              <a:t>Higiene / valor funcional</a:t>
+            </a:r>
+          </a:p>
+        </p:txBody>
+      </p:sp>
+      <p:sp>
+        <p:nvSpPr>
+          <p:cNvPr id="20" name="TextBox 19"/>
+          <p:cNvSpPr txBox="1"/>
+          <p:nvPr/>
+        </p:nvSpPr>
+        <p:spPr>
+          <a:xfrm>
+            <a:off x="6858000" y="2916936"/>
+            <a:ext cx="1097280" cy="566928"/>
+          </a:xfrm>
+          <a:prstGeom prst="rect">
+            <a:avLst/>
+          </a:prstGeom>
+          <a:noFill/>
+        </p:spPr>
+        <p:txBody>
+          <a:bodyPr wrap="square" anchor="ctr">
             <a:spAutoFit/>
           </a:bodyPr>
           <a:lstStyle/>
           <a:p>
             <a:pPr algn="l">
               <a:lnSpc>
-                <a:spcPct val="105000"/>
-              </a:lnSpc>
-              <a:spcAft>
-                <a:spcPts val="1000"/>
-              </a:spcAft>
-            </a:pPr>
-            <a:r>
-              <a:rPr sz="1350" b="1">
-                <a:solidFill>
-                  <a:srgbClr val="128C7E"/>
-                </a:solidFill>
-                <a:latin typeface="Calibri"/>
-              </a:rPr>
-              <a:t>•  </a:t>
-            </a:r>
-            <a:r>
-              <a:rPr sz="1350" b="0">
+                <a:spcPct val="100000"/>
+              </a:lnSpc>
+              <a:spcAft>
+                <a:spcPts val="600"/>
+              </a:spcAft>
+            </a:pPr>
+            <a:r>
+              <a:rPr sz="1200" b="0">
                 <a:solidFill>
                   <a:srgbClr val="1A242B"/>
                 </a:solidFill>
                 <a:latin typeface="Calibri"/>
               </a:rPr>
-              <a:t>Provar Eco-Low-Fire sem perda de brancura/brilho</a:t>
-            </a:r>
-          </a:p>
+              <a:t>Alta</a:t>
+            </a:r>
+          </a:p>
+        </p:txBody>
+      </p:sp>
+      <p:sp>
+        <p:nvSpPr>
+          <p:cNvPr id="21" name="TextBox 20"/>
+          <p:cNvSpPr txBox="1"/>
+          <p:nvPr/>
+        </p:nvSpPr>
+        <p:spPr>
+          <a:xfrm>
+            <a:off x="8046719" y="2916936"/>
+            <a:ext cx="1097280" cy="566928"/>
+          </a:xfrm>
+          <a:prstGeom prst="rect">
+            <a:avLst/>
+          </a:prstGeom>
+          <a:noFill/>
+        </p:spPr>
+        <p:txBody>
+          <a:bodyPr wrap="square" anchor="ctr">
+            <a:spAutoFit/>
+          </a:bodyPr>
+          <a:lstStyle/>
           <a:p>
             <a:pPr algn="l">
               <a:lnSpc>
-                <a:spcPct val="105000"/>
-              </a:lnSpc>
-              <a:spcAft>
-                <a:spcPts val="1000"/>
-              </a:spcAft>
-            </a:pPr>
-            <a:r>
-              <a:rPr sz="1350" b="1">
-                <a:solidFill>
-                  <a:srgbClr val="128C7E"/>
-                </a:solidFill>
-                <a:latin typeface="Calibri"/>
-              </a:rPr>
-              <a:t>•  </a:t>
-            </a:r>
-            <a:r>
-              <a:rPr sz="1350" b="0">
+                <a:spcPct val="100000"/>
+              </a:lnSpc>
+              <a:spcAft>
+                <a:spcPts val="600"/>
+              </a:spcAft>
+            </a:pPr>
+            <a:r>
+              <a:rPr sz="1200" b="0">
                 <a:solidFill>
                   <a:srgbClr val="1A242B"/>
                 </a:solidFill>
                 <a:latin typeface="Calibri"/>
               </a:rPr>
-              <a:t>−30 a −50 °C na temperatura de pico</a:t>
-            </a:r>
-          </a:p>
+              <a:t>Médio</a:t>
+            </a:r>
+          </a:p>
+        </p:txBody>
+      </p:sp>
+      <p:sp>
+        <p:nvSpPr>
+          <p:cNvPr id="22" name="TextBox 21"/>
+          <p:cNvSpPr txBox="1"/>
+          <p:nvPr/>
+        </p:nvSpPr>
+        <p:spPr>
+          <a:xfrm>
+            <a:off x="9235440" y="2916936"/>
+            <a:ext cx="2468880" cy="566928"/>
+          </a:xfrm>
+          <a:prstGeom prst="rect">
+            <a:avLst/>
+          </a:prstGeom>
+          <a:noFill/>
+        </p:spPr>
+        <p:txBody>
+          <a:bodyPr wrap="square" anchor="ctr">
+            <a:spAutoFit/>
+          </a:bodyPr>
+          <a:lstStyle/>
           <a:p>
             <a:pPr algn="l">
               <a:lnSpc>
-                <a:spcPct val="105000"/>
-              </a:lnSpc>
-              <a:spcAft>
-                <a:spcPts val="1000"/>
-              </a:spcAft>
-            </a:pPr>
-            <a:r>
-              <a:rPr sz="1350" b="1">
-                <a:solidFill>
-                  <a:srgbClr val="128C7E"/>
-                </a:solidFill>
-                <a:latin typeface="Calibri"/>
-              </a:rPr>
-              <a:t>•  </a:t>
-            </a:r>
-            <a:r>
-              <a:rPr sz="1350" b="0">
+                <a:spcPct val="100000"/>
+              </a:lnSpc>
+              <a:spcAft>
+                <a:spcPts val="600"/>
+              </a:spcAft>
+            </a:pPr>
+            <a:r>
+              <a:rPr sz="1200" b="0">
                 <a:solidFill>
                   <a:srgbClr val="1A242B"/>
                 </a:solidFill>
                 <a:latin typeface="Calibri"/>
               </a:rPr>
-              <a:t>≥ 8% de redução medida de energia</a:t>
-            </a:r>
-          </a:p>
-          <a:p>
-            <a:pPr algn="l">
-              <a:lnSpc>
-                <a:spcPct val="105000"/>
-              </a:lnSpc>
-              <a:spcAft>
-                <a:spcPts val="1000"/>
-              </a:spcAft>
-            </a:pPr>
-            <a:r>
-              <a:rPr sz="1350" b="1">
-                <a:solidFill>
-                  <a:srgbClr val="128C7E"/>
-                </a:solidFill>
-                <a:latin typeface="Calibri"/>
-              </a:rPr>
-              <a:t>•  </a:t>
-            </a:r>
-            <a:r>
-              <a:rPr sz="1350" b="0">
-                <a:solidFill>
-                  <a:srgbClr val="1A242B"/>
-                </a:solidFill>
-                <a:latin typeface="Calibri"/>
-              </a:rPr>
-              <a:t>ΔE ≤ 0,5 em 3 lotes consecutivos</a:t>
-            </a:r>
-          </a:p>
-          <a:p>
-            <a:pPr algn="l">
-              <a:lnSpc>
-                <a:spcPct val="105000"/>
-              </a:lnSpc>
-              <a:spcAft>
-                <a:spcPts val="1000"/>
-              </a:spcAft>
-            </a:pPr>
-            <a:r>
-              <a:rPr sz="1350" b="1">
-                <a:solidFill>
-                  <a:srgbClr val="128C7E"/>
-                </a:solidFill>
-                <a:latin typeface="Calibri"/>
-              </a:rPr>
-              <a:t>•  </a:t>
-            </a:r>
-            <a:r>
-              <a:rPr sz="1350" b="0">
-                <a:solidFill>
-                  <a:srgbClr val="1A242B"/>
-                </a:solidFill>
-                <a:latin typeface="Calibri"/>
-              </a:rPr>
-              <a:t>Vencer aqui = certificado de qualidade para todas as contas</a:t>
-            </a:r>
-          </a:p>
-        </p:txBody>
-      </p:sp>
-      <p:sp>
-        <p:nvSpPr>
-          <p:cNvPr id="9" name="Rectangle 8"/>
+              <a:t>Alta</a:t>
+            </a:r>
+          </a:p>
+        </p:txBody>
+      </p:sp>
+      <p:sp>
+        <p:nvSpPr>
+          <p:cNvPr id="23" name="Rectangle 22"/>
           <p:cNvSpPr/>
           <p:nvPr/>
         </p:nvSpPr>
         <p:spPr>
           <a:xfrm>
-            <a:off x="6172200" y="1783080"/>
-            <a:ext cx="5440680" cy="4023360"/>
+            <a:off x="548640" y="3483864"/>
+            <a:ext cx="11064240" cy="566928"/>
           </a:xfrm>
           <a:prstGeom prst="rect">
             <a:avLst/>
@@ -14259,14 +17520,732 @@
       </p:sp>
       <p:sp>
         <p:nvSpPr>
-          <p:cNvPr id="10" name="Rectangle 9"/>
+          <p:cNvPr id="24" name="TextBox 23"/>
+          <p:cNvSpPr txBox="1"/>
+          <p:nvPr/>
+        </p:nvSpPr>
+        <p:spPr>
+          <a:xfrm>
+            <a:off x="640080" y="3483864"/>
+            <a:ext cx="2743200" cy="566928"/>
+          </a:xfrm>
+          <a:prstGeom prst="rect">
+            <a:avLst/>
+          </a:prstGeom>
+          <a:noFill/>
+        </p:spPr>
+        <p:txBody>
+          <a:bodyPr wrap="square" anchor="ctr">
+            <a:spAutoFit/>
+          </a:bodyPr>
+          <a:lstStyle/>
+          <a:p>
+            <a:pPr algn="l">
+              <a:lnSpc>
+                <a:spcPct val="100000"/>
+              </a:lnSpc>
+              <a:spcAft>
+                <a:spcPts val="600"/>
+              </a:spcAft>
+            </a:pPr>
+            <a:r>
+              <a:rPr sz="1200" b="1">
+                <a:solidFill>
+                  <a:srgbClr val="1A242B"/>
+                </a:solidFill>
+                <a:latin typeface="Calibri"/>
+              </a:rPr>
+              <a:t>1 · Porcelana Vegan</a:t>
+            </a:r>
+          </a:p>
+        </p:txBody>
+      </p:sp>
+      <p:sp>
+        <p:nvSpPr>
+          <p:cNvPr id="25" name="TextBox 24"/>
+          <p:cNvSpPr txBox="1"/>
+          <p:nvPr/>
+        </p:nvSpPr>
+        <p:spPr>
+          <a:xfrm>
+            <a:off x="3474720" y="3483864"/>
+            <a:ext cx="3291840" cy="566928"/>
+          </a:xfrm>
+          <a:prstGeom prst="rect">
+            <a:avLst/>
+          </a:prstGeom>
+          <a:noFill/>
+        </p:spPr>
+        <p:txBody>
+          <a:bodyPr wrap="square" anchor="ctr">
+            <a:spAutoFit/>
+          </a:bodyPr>
+          <a:lstStyle/>
+          <a:p>
+            <a:pPr algn="l">
+              <a:lnSpc>
+                <a:spcPct val="100000"/>
+              </a:lnSpc>
+              <a:spcAft>
+                <a:spcPts val="600"/>
+              </a:spcAft>
+            </a:pPr>
+            <a:r>
+              <a:rPr sz="1200" b="0">
+                <a:solidFill>
+                  <a:srgbClr val="1A242B"/>
+                </a:solidFill>
+                <a:latin typeface="Calibri"/>
+              </a:rPr>
+              <a:t>Diferenciação premium / ESG</a:t>
+            </a:r>
+          </a:p>
+        </p:txBody>
+      </p:sp>
+      <p:sp>
+        <p:nvSpPr>
+          <p:cNvPr id="26" name="TextBox 25"/>
+          <p:cNvSpPr txBox="1"/>
+          <p:nvPr/>
+        </p:nvSpPr>
+        <p:spPr>
+          <a:xfrm>
+            <a:off x="6858000" y="3483864"/>
+            <a:ext cx="1097280" cy="566928"/>
+          </a:xfrm>
+          <a:prstGeom prst="rect">
+            <a:avLst/>
+          </a:prstGeom>
+          <a:noFill/>
+        </p:spPr>
+        <p:txBody>
+          <a:bodyPr wrap="square" anchor="ctr">
+            <a:spAutoFit/>
+          </a:bodyPr>
+          <a:lstStyle/>
+          <a:p>
+            <a:pPr algn="l">
+              <a:lnSpc>
+                <a:spcPct val="100000"/>
+              </a:lnSpc>
+              <a:spcAft>
+                <a:spcPts val="600"/>
+              </a:spcAft>
+            </a:pPr>
+            <a:r>
+              <a:rPr sz="1200" b="0">
+                <a:solidFill>
+                  <a:srgbClr val="1A242B"/>
+                </a:solidFill>
+                <a:latin typeface="Calibri"/>
+              </a:rPr>
+              <a:t>Alta</a:t>
+            </a:r>
+          </a:p>
+        </p:txBody>
+      </p:sp>
+      <p:sp>
+        <p:nvSpPr>
+          <p:cNvPr id="27" name="TextBox 26"/>
+          <p:cNvSpPr txBox="1"/>
+          <p:nvPr/>
+        </p:nvSpPr>
+        <p:spPr>
+          <a:xfrm>
+            <a:off x="8046719" y="3483864"/>
+            <a:ext cx="1097280" cy="566928"/>
+          </a:xfrm>
+          <a:prstGeom prst="rect">
+            <a:avLst/>
+          </a:prstGeom>
+          <a:noFill/>
+        </p:spPr>
+        <p:txBody>
+          <a:bodyPr wrap="square" anchor="ctr">
+            <a:spAutoFit/>
+          </a:bodyPr>
+          <a:lstStyle/>
+          <a:p>
+            <a:pPr algn="l">
+              <a:lnSpc>
+                <a:spcPct val="100000"/>
+              </a:lnSpc>
+              <a:spcAft>
+                <a:spcPts val="600"/>
+              </a:spcAft>
+            </a:pPr>
+            <a:r>
+              <a:rPr sz="1200" b="0">
+                <a:solidFill>
+                  <a:srgbClr val="1A242B"/>
+                </a:solidFill>
+                <a:latin typeface="Calibri"/>
+              </a:rPr>
+              <a:t>Médio</a:t>
+            </a:r>
+          </a:p>
+        </p:txBody>
+      </p:sp>
+      <p:sp>
+        <p:nvSpPr>
+          <p:cNvPr id="28" name="TextBox 27"/>
+          <p:cNvSpPr txBox="1"/>
+          <p:nvPr/>
+        </p:nvSpPr>
+        <p:spPr>
+          <a:xfrm>
+            <a:off x="9235440" y="3483864"/>
+            <a:ext cx="2468880" cy="566928"/>
+          </a:xfrm>
+          <a:prstGeom prst="rect">
+            <a:avLst/>
+          </a:prstGeom>
+          <a:noFill/>
+        </p:spPr>
+        <p:txBody>
+          <a:bodyPr wrap="square" anchor="ctr">
+            <a:spAutoFit/>
+          </a:bodyPr>
+          <a:lstStyle/>
+          <a:p>
+            <a:pPr algn="l">
+              <a:lnSpc>
+                <a:spcPct val="100000"/>
+              </a:lnSpc>
+              <a:spcAft>
+                <a:spcPts val="600"/>
+              </a:spcAft>
+            </a:pPr>
+            <a:r>
+              <a:rPr sz="1200" b="0">
+                <a:solidFill>
+                  <a:srgbClr val="1A242B"/>
+                </a:solidFill>
+                <a:latin typeface="Calibri"/>
+              </a:rPr>
+              <a:t>Alta (Vista Alegre)</a:t>
+            </a:r>
+          </a:p>
+        </p:txBody>
+      </p:sp>
+      <p:sp>
+        <p:nvSpPr>
+          <p:cNvPr id="29" name="Rectangle 28"/>
           <p:cNvSpPr/>
           <p:nvPr/>
         </p:nvSpPr>
         <p:spPr>
           <a:xfrm>
-            <a:off x="6172200" y="1783080"/>
-            <a:ext cx="5440680" cy="731520"/>
+            <a:off x="548640" y="4050792"/>
+            <a:ext cx="11064240" cy="566928"/>
+          </a:xfrm>
+          <a:prstGeom prst="rect">
+            <a:avLst/>
+          </a:prstGeom>
+          <a:solidFill>
+            <a:srgbClr val="E7EEF1"/>
+          </a:solidFill>
+          <a:ln>
+            <a:noFill/>
+          </a:ln>
+          <a:effectLst/>
+        </p:spPr>
+        <p:style>
+          <a:lnRef idx="1">
+            <a:schemeClr val="accent1"/>
+          </a:lnRef>
+          <a:fillRef idx="3">
+            <a:schemeClr val="accent1"/>
+          </a:fillRef>
+          <a:effectRef idx="2">
+            <a:schemeClr val="accent1"/>
+          </a:effectRef>
+          <a:fontRef idx="minor">
+            <a:schemeClr val="lt1"/>
+          </a:fontRef>
+        </p:style>
+        <p:txBody>
+          <a:bodyPr rtlCol="0" anchor="ctr"/>
+          <a:lstStyle/>
+          <a:p>
+            <a:pPr algn="ctr"/>
+          </a:p>
+        </p:txBody>
+      </p:sp>
+      <p:sp>
+        <p:nvSpPr>
+          <p:cNvPr id="30" name="TextBox 29"/>
+          <p:cNvSpPr txBox="1"/>
+          <p:nvPr/>
+        </p:nvSpPr>
+        <p:spPr>
+          <a:xfrm>
+            <a:off x="640080" y="4050792"/>
+            <a:ext cx="2743200" cy="566928"/>
+          </a:xfrm>
+          <a:prstGeom prst="rect">
+            <a:avLst/>
+          </a:prstGeom>
+          <a:noFill/>
+        </p:spPr>
+        <p:txBody>
+          <a:bodyPr wrap="square" anchor="ctr">
+            <a:spAutoFit/>
+          </a:bodyPr>
+          <a:lstStyle/>
+          <a:p>
+            <a:pPr algn="l">
+              <a:lnSpc>
+                <a:spcPct val="100000"/>
+              </a:lnSpc>
+              <a:spcAft>
+                <a:spcPts val="600"/>
+              </a:spcAft>
+            </a:pPr>
+            <a:r>
+              <a:rPr sz="1200" b="1">
+                <a:solidFill>
+                  <a:srgbClr val="1A242B"/>
+                </a:solidFill>
+                <a:latin typeface="Calibri"/>
+              </a:rPr>
+              <a:t>4 · ChromaSafe</a:t>
+            </a:r>
+          </a:p>
+        </p:txBody>
+      </p:sp>
+      <p:sp>
+        <p:nvSpPr>
+          <p:cNvPr id="31" name="TextBox 30"/>
+          <p:cNvSpPr txBox="1"/>
+          <p:nvPr/>
+        </p:nvSpPr>
+        <p:spPr>
+          <a:xfrm>
+            <a:off x="3474720" y="4050792"/>
+            <a:ext cx="3291840" cy="566928"/>
+          </a:xfrm>
+          <a:prstGeom prst="rect">
+            <a:avLst/>
+          </a:prstGeom>
+          <a:noFill/>
+        </p:spPr>
+        <p:txBody>
+          <a:bodyPr wrap="square" anchor="ctr">
+            <a:spAutoFit/>
+          </a:bodyPr>
+          <a:lstStyle/>
+          <a:p>
+            <a:pPr algn="l">
+              <a:lnSpc>
+                <a:spcPct val="100000"/>
+              </a:lnSpc>
+              <a:spcAft>
+                <a:spcPts val="600"/>
+              </a:spcAft>
+            </a:pPr>
+            <a:r>
+              <a:rPr sz="1200" b="0">
+                <a:solidFill>
+                  <a:srgbClr val="1A242B"/>
+                </a:solidFill>
+                <a:latin typeface="Calibri"/>
+              </a:rPr>
+              <a:t>Cor segura difícil</a:t>
+            </a:r>
+          </a:p>
+        </p:txBody>
+      </p:sp>
+      <p:sp>
+        <p:nvSpPr>
+          <p:cNvPr id="32" name="TextBox 31"/>
+          <p:cNvSpPr txBox="1"/>
+          <p:nvPr/>
+        </p:nvSpPr>
+        <p:spPr>
+          <a:xfrm>
+            <a:off x="6858000" y="4050792"/>
+            <a:ext cx="1097280" cy="566928"/>
+          </a:xfrm>
+          <a:prstGeom prst="rect">
+            <a:avLst/>
+          </a:prstGeom>
+          <a:noFill/>
+        </p:spPr>
+        <p:txBody>
+          <a:bodyPr wrap="square" anchor="ctr">
+            <a:spAutoFit/>
+          </a:bodyPr>
+          <a:lstStyle/>
+          <a:p>
+            <a:pPr algn="l">
+              <a:lnSpc>
+                <a:spcPct val="100000"/>
+              </a:lnSpc>
+              <a:spcAft>
+                <a:spcPts val="600"/>
+              </a:spcAft>
+            </a:pPr>
+            <a:r>
+              <a:rPr sz="1200" b="0">
+                <a:solidFill>
+                  <a:srgbClr val="1A242B"/>
+                </a:solidFill>
+                <a:latin typeface="Calibri"/>
+              </a:rPr>
+              <a:t>Alta</a:t>
+            </a:r>
+          </a:p>
+        </p:txBody>
+      </p:sp>
+      <p:sp>
+        <p:nvSpPr>
+          <p:cNvPr id="33" name="TextBox 32"/>
+          <p:cNvSpPr txBox="1"/>
+          <p:nvPr/>
+        </p:nvSpPr>
+        <p:spPr>
+          <a:xfrm>
+            <a:off x="8046719" y="4050792"/>
+            <a:ext cx="1097280" cy="566928"/>
+          </a:xfrm>
+          <a:prstGeom prst="rect">
+            <a:avLst/>
+          </a:prstGeom>
+          <a:noFill/>
+        </p:spPr>
+        <p:txBody>
+          <a:bodyPr wrap="square" anchor="ctr">
+            <a:spAutoFit/>
+          </a:bodyPr>
+          <a:lstStyle/>
+          <a:p>
+            <a:pPr algn="l">
+              <a:lnSpc>
+                <a:spcPct val="100000"/>
+              </a:lnSpc>
+              <a:spcAft>
+                <a:spcPts val="600"/>
+              </a:spcAft>
+            </a:pPr>
+            <a:r>
+              <a:rPr sz="1200" b="0">
+                <a:solidFill>
+                  <a:srgbClr val="1A242B"/>
+                </a:solidFill>
+                <a:latin typeface="Calibri"/>
+              </a:rPr>
+              <a:t>Médio-alto</a:t>
+            </a:r>
+          </a:p>
+        </p:txBody>
+      </p:sp>
+      <p:sp>
+        <p:nvSpPr>
+          <p:cNvPr id="34" name="TextBox 33"/>
+          <p:cNvSpPr txBox="1"/>
+          <p:nvPr/>
+        </p:nvSpPr>
+        <p:spPr>
+          <a:xfrm>
+            <a:off x="9235440" y="4050792"/>
+            <a:ext cx="2468880" cy="566928"/>
+          </a:xfrm>
+          <a:prstGeom prst="rect">
+            <a:avLst/>
+          </a:prstGeom>
+          <a:noFill/>
+        </p:spPr>
+        <p:txBody>
+          <a:bodyPr wrap="square" anchor="ctr">
+            <a:spAutoFit/>
+          </a:bodyPr>
+          <a:lstStyle/>
+          <a:p>
+            <a:pPr algn="l">
+              <a:lnSpc>
+                <a:spcPct val="100000"/>
+              </a:lnSpc>
+              <a:spcAft>
+                <a:spcPts val="600"/>
+              </a:spcAft>
+            </a:pPr>
+            <a:r>
+              <a:rPr sz="1200" b="0">
+                <a:solidFill>
+                  <a:srgbClr val="1A242B"/>
+                </a:solidFill>
+                <a:latin typeface="Calibri"/>
+              </a:rPr>
+              <a:t>Média</a:t>
+            </a:r>
+          </a:p>
+        </p:txBody>
+      </p:sp>
+      <p:sp>
+        <p:nvSpPr>
+          <p:cNvPr id="35" name="Rectangle 34"/>
+          <p:cNvSpPr/>
+          <p:nvPr/>
+        </p:nvSpPr>
+        <p:spPr>
+          <a:xfrm>
+            <a:off x="548640" y="4617720"/>
+            <a:ext cx="11064240" cy="566928"/>
+          </a:xfrm>
+          <a:prstGeom prst="rect">
+            <a:avLst/>
+          </a:prstGeom>
+          <a:solidFill>
+            <a:srgbClr val="FFFFFF"/>
+          </a:solidFill>
+          <a:ln>
+            <a:noFill/>
+          </a:ln>
+          <a:effectLst/>
+        </p:spPr>
+        <p:style>
+          <a:lnRef idx="1">
+            <a:schemeClr val="accent1"/>
+          </a:lnRef>
+          <a:fillRef idx="3">
+            <a:schemeClr val="accent1"/>
+          </a:fillRef>
+          <a:effectRef idx="2">
+            <a:schemeClr val="accent1"/>
+          </a:effectRef>
+          <a:fontRef idx="minor">
+            <a:schemeClr val="lt1"/>
+          </a:fontRef>
+        </p:style>
+        <p:txBody>
+          <a:bodyPr rtlCol="0" anchor="ctr"/>
+          <a:lstStyle/>
+          <a:p>
+            <a:pPr algn="ctr"/>
+          </a:p>
+        </p:txBody>
+      </p:sp>
+      <p:sp>
+        <p:nvSpPr>
+          <p:cNvPr id="36" name="TextBox 35"/>
+          <p:cNvSpPr txBox="1"/>
+          <p:nvPr/>
+        </p:nvSpPr>
+        <p:spPr>
+          <a:xfrm>
+            <a:off x="640080" y="4617720"/>
+            <a:ext cx="2743200" cy="566928"/>
+          </a:xfrm>
+          <a:prstGeom prst="rect">
+            <a:avLst/>
+          </a:prstGeom>
+          <a:noFill/>
+        </p:spPr>
+        <p:txBody>
+          <a:bodyPr wrap="square" anchor="ctr">
+            <a:spAutoFit/>
+          </a:bodyPr>
+          <a:lstStyle/>
+          <a:p>
+            <a:pPr algn="l">
+              <a:lnSpc>
+                <a:spcPct val="100000"/>
+              </a:lnSpc>
+              <a:spcAft>
+                <a:spcPts val="600"/>
+              </a:spcAft>
+            </a:pPr>
+            <a:r>
+              <a:rPr sz="1200" b="1">
+                <a:solidFill>
+                  <a:srgbClr val="1A242B"/>
+                </a:solidFill>
+                <a:latin typeface="Calibri"/>
+              </a:rPr>
+              <a:t>5 · DuraGlaze/SensaGlaze</a:t>
+            </a:r>
+          </a:p>
+        </p:txBody>
+      </p:sp>
+      <p:sp>
+        <p:nvSpPr>
+          <p:cNvPr id="37" name="TextBox 36"/>
+          <p:cNvSpPr txBox="1"/>
+          <p:nvPr/>
+        </p:nvSpPr>
+        <p:spPr>
+          <a:xfrm>
+            <a:off x="3474720" y="4617720"/>
+            <a:ext cx="3291840" cy="566928"/>
+          </a:xfrm>
+          <a:prstGeom prst="rect">
+            <a:avLst/>
+          </a:prstGeom>
+          <a:noFill/>
+        </p:spPr>
+        <p:txBody>
+          <a:bodyPr wrap="square" anchor="ctr">
+            <a:spAutoFit/>
+          </a:bodyPr>
+          <a:lstStyle/>
+          <a:p>
+            <a:pPr algn="l">
+              <a:lnSpc>
+                <a:spcPct val="100000"/>
+              </a:lnSpc>
+              <a:spcAft>
+                <a:spcPts val="600"/>
+              </a:spcAft>
+            </a:pPr>
+            <a:r>
+              <a:rPr sz="1200" b="0">
+                <a:solidFill>
+                  <a:srgbClr val="1A242B"/>
+                </a:solidFill>
+                <a:latin typeface="Calibri"/>
+              </a:rPr>
+              <a:t>Durabilidade + design</a:t>
+            </a:r>
+          </a:p>
+        </p:txBody>
+      </p:sp>
+      <p:sp>
+        <p:nvSpPr>
+          <p:cNvPr id="38" name="TextBox 37"/>
+          <p:cNvSpPr txBox="1"/>
+          <p:nvPr/>
+        </p:nvSpPr>
+        <p:spPr>
+          <a:xfrm>
+            <a:off x="6858000" y="4617720"/>
+            <a:ext cx="1097280" cy="566928"/>
+          </a:xfrm>
+          <a:prstGeom prst="rect">
+            <a:avLst/>
+          </a:prstGeom>
+          <a:noFill/>
+        </p:spPr>
+        <p:txBody>
+          <a:bodyPr wrap="square" anchor="ctr">
+            <a:spAutoFit/>
+          </a:bodyPr>
+          <a:lstStyle/>
+          <a:p>
+            <a:pPr algn="l">
+              <a:lnSpc>
+                <a:spcPct val="100000"/>
+              </a:lnSpc>
+              <a:spcAft>
+                <a:spcPts val="600"/>
+              </a:spcAft>
+            </a:pPr>
+            <a:r>
+              <a:rPr sz="1200" b="0">
+                <a:solidFill>
+                  <a:srgbClr val="1A242B"/>
+                </a:solidFill>
+                <a:latin typeface="Calibri"/>
+              </a:rPr>
+              <a:t>Média-alta</a:t>
+            </a:r>
+          </a:p>
+        </p:txBody>
+      </p:sp>
+      <p:sp>
+        <p:nvSpPr>
+          <p:cNvPr id="39" name="TextBox 38"/>
+          <p:cNvSpPr txBox="1"/>
+          <p:nvPr/>
+        </p:nvSpPr>
+        <p:spPr>
+          <a:xfrm>
+            <a:off x="8046719" y="4617720"/>
+            <a:ext cx="1097280" cy="566928"/>
+          </a:xfrm>
+          <a:prstGeom prst="rect">
+            <a:avLst/>
+          </a:prstGeom>
+          <a:noFill/>
+        </p:spPr>
+        <p:txBody>
+          <a:bodyPr wrap="square" anchor="ctr">
+            <a:spAutoFit/>
+          </a:bodyPr>
+          <a:lstStyle/>
+          <a:p>
+            <a:pPr algn="l">
+              <a:lnSpc>
+                <a:spcPct val="100000"/>
+              </a:lnSpc>
+              <a:spcAft>
+                <a:spcPts val="600"/>
+              </a:spcAft>
+            </a:pPr>
+            <a:r>
+              <a:rPr sz="1200" b="0">
+                <a:solidFill>
+                  <a:srgbClr val="1A242B"/>
+                </a:solidFill>
+                <a:latin typeface="Calibri"/>
+              </a:rPr>
+              <a:t>Alto</a:t>
+            </a:r>
+          </a:p>
+        </p:txBody>
+      </p:sp>
+      <p:sp>
+        <p:nvSpPr>
+          <p:cNvPr id="40" name="TextBox 39"/>
+          <p:cNvSpPr txBox="1"/>
+          <p:nvPr/>
+        </p:nvSpPr>
+        <p:spPr>
+          <a:xfrm>
+            <a:off x="9235440" y="4617720"/>
+            <a:ext cx="2468880" cy="566928"/>
+          </a:xfrm>
+          <a:prstGeom prst="rect">
+            <a:avLst/>
+          </a:prstGeom>
+          <a:noFill/>
+        </p:spPr>
+        <p:txBody>
+          <a:bodyPr wrap="square" anchor="ctr">
+            <a:spAutoFit/>
+          </a:bodyPr>
+          <a:lstStyle/>
+          <a:p>
+            <a:pPr algn="l">
+              <a:lnSpc>
+                <a:spcPct val="100000"/>
+              </a:lnSpc>
+              <a:spcAft>
+                <a:spcPts val="600"/>
+              </a:spcAft>
+            </a:pPr>
+            <a:r>
+              <a:rPr sz="1200" b="0">
+                <a:solidFill>
+                  <a:srgbClr val="1A242B"/>
+                </a:solidFill>
+                <a:latin typeface="Calibri"/>
+              </a:rPr>
+              <a:t>Faseada</a:t>
+            </a:r>
+          </a:p>
+        </p:txBody>
+      </p:sp>
+      <p:sp>
+        <p:nvSpPr>
+          <p:cNvPr id="41" name="Rectangle 40"/>
+          <p:cNvSpPr/>
+          <p:nvPr/>
+        </p:nvSpPr>
+        <p:spPr>
+          <a:xfrm>
+            <a:off x="548640" y="5257800"/>
+            <a:ext cx="11064240" cy="914400"/>
           </a:xfrm>
           <a:prstGeom prst="rect">
             <a:avLst/>
@@ -14303,14 +18282,14 @@
       </p:sp>
       <p:sp>
         <p:nvSpPr>
-          <p:cNvPr id="11" name="TextBox 10"/>
-          <p:cNvSpPr txBox="1"/>
-          <p:nvPr/>
-        </p:nvSpPr>
-        <p:spPr>
-          <a:xfrm>
-            <a:off x="6400800" y="1783080"/>
-            <a:ext cx="5029200" cy="731520"/>
+          <p:cNvPr id="42" name="TextBox 41"/>
+          <p:cNvSpPr txBox="1"/>
+          <p:nvPr/>
+        </p:nvSpPr>
+        <p:spPr>
+          <a:xfrm>
+            <a:off x="822960" y="5394960"/>
+            <a:ext cx="10515600" cy="685800"/>
           </a:xfrm>
           <a:prstGeom prst="rect">
             <a:avLst/>
@@ -14325,209 +18304,36 @@
           <a:p>
             <a:pPr algn="l">
               <a:lnSpc>
-                <a:spcPct val="100000"/>
-              </a:lnSpc>
-              <a:spcAft>
-                <a:spcPts val="200"/>
-              </a:spcAft>
-            </a:pPr>
-            <a:r>
-              <a:rPr sz="1800" b="1">
+                <a:spcPct val="105000"/>
+              </a:lnSpc>
+              <a:spcAft>
+                <a:spcPts val="600"/>
+              </a:spcAft>
+            </a:pPr>
+            <a:r>
+              <a:rPr sz="1500" b="1">
                 <a:solidFill>
                   <a:srgbClr val="FFFFFF"/>
                 </a:solidFill>
                 <a:latin typeface="Calibri"/>
               </a:rPr>
-              <a:t>PILOTO B — Costa Verde</a:t>
-            </a:r>
-          </a:p>
-          <a:p>
-            <a:pPr algn="l">
-              <a:lnSpc>
-                <a:spcPct val="100000"/>
-              </a:lnSpc>
-              <a:spcAft>
-                <a:spcPts val="200"/>
-              </a:spcAft>
-            </a:pPr>
-            <a:r>
-              <a:rPr sz="1100" b="0">
+              <a:t>Sequência: </a:t>
+            </a:r>
+            <a:r>
+              <a:rPr sz="1500" b="0">
                 <a:solidFill>
                   <a:srgbClr val="FFFFFF"/>
                 </a:solidFill>
                 <a:latin typeface="Calibri"/>
               </a:rPr>
-              <a:t>Louça de volume · prova de serviço e SLA</a:t>
-            </a:r>
-          </a:p>
-        </p:txBody>
-      </p:sp>
-      <p:sp>
-        <p:nvSpPr>
-          <p:cNvPr id="12" name="TextBox 11"/>
-          <p:cNvSpPr txBox="1"/>
-          <p:nvPr/>
-        </p:nvSpPr>
-        <p:spPr>
-          <a:xfrm>
-            <a:off x="6400800" y="2743200"/>
-            <a:ext cx="5029200" cy="2926080"/>
-          </a:xfrm>
-          <a:prstGeom prst="rect">
-            <a:avLst/>
-          </a:prstGeom>
-          <a:noFill/>
-        </p:spPr>
-        <p:txBody>
-          <a:bodyPr wrap="square" anchor="t">
-            <a:spAutoFit/>
-          </a:bodyPr>
-          <a:lstStyle/>
-          <a:p>
-            <a:pPr algn="l">
-              <a:lnSpc>
-                <a:spcPct val="105000"/>
-              </a:lnSpc>
-              <a:spcAft>
-                <a:spcPts val="1000"/>
-              </a:spcAft>
-            </a:pPr>
-            <a:r>
-              <a:rPr sz="1350" b="1">
-                <a:solidFill>
-                  <a:srgbClr val="128C7E"/>
-                </a:solidFill>
-                <a:latin typeface="Calibri"/>
-              </a:rPr>
-              <a:t>•  </a:t>
-            </a:r>
-            <a:r>
-              <a:rPr sz="1350" b="0">
-                <a:solidFill>
-                  <a:srgbClr val="1A242B"/>
-                </a:solidFill>
-                <a:latin typeface="Calibri"/>
-              </a:rPr>
-              <a:t>SLA de consistência + serviço no local 24–48h</a:t>
-            </a:r>
-          </a:p>
-          <a:p>
-            <a:pPr algn="l">
-              <a:lnSpc>
-                <a:spcPct val="105000"/>
-              </a:lnSpc>
-              <a:spcAft>
-                <a:spcPts val="1000"/>
-              </a:spcAft>
-            </a:pPr>
-            <a:r>
-              <a:rPr sz="1350" b="1">
-                <a:solidFill>
-                  <a:srgbClr val="128C7E"/>
-                </a:solidFill>
-                <a:latin typeface="Calibri"/>
-              </a:rPr>
-              <a:t>•  </a:t>
-            </a:r>
-            <a:r>
-              <a:rPr sz="1350" b="0">
-                <a:solidFill>
-                  <a:srgbClr val="1A242B"/>
-                </a:solidFill>
-                <a:latin typeface="Calibri"/>
-              </a:rPr>
-              <a:t>Taxa de defeitos ↓ (alvo −20%)</a:t>
-            </a:r>
-          </a:p>
-          <a:p>
-            <a:pPr algn="l">
-              <a:lnSpc>
-                <a:spcPct val="105000"/>
-              </a:lnSpc>
-              <a:spcAft>
-                <a:spcPts val="1000"/>
-              </a:spcAft>
-            </a:pPr>
-            <a:r>
-              <a:rPr sz="1350" b="1">
-                <a:solidFill>
-                  <a:srgbClr val="128C7E"/>
-                </a:solidFill>
-                <a:latin typeface="Calibri"/>
-              </a:rPr>
-              <a:t>•  </a:t>
-            </a:r>
-            <a:r>
-              <a:rPr sz="1350" b="0">
-                <a:solidFill>
-                  <a:srgbClr val="1A242B"/>
-                </a:solidFill>
-                <a:latin typeface="Calibri"/>
-              </a:rPr>
-              <a:t>Energia/peça ↓ 8–12%</a:t>
-            </a:r>
-          </a:p>
-          <a:p>
-            <a:pPr algn="l">
-              <a:lnSpc>
-                <a:spcPct val="105000"/>
-              </a:lnSpc>
-              <a:spcAft>
-                <a:spcPts val="1000"/>
-              </a:spcAft>
-            </a:pPr>
-            <a:r>
-              <a:rPr sz="1350" b="1">
-                <a:solidFill>
-                  <a:srgbClr val="128C7E"/>
-                </a:solidFill>
-                <a:latin typeface="Calibri"/>
-              </a:rPr>
-              <a:t>•  </a:t>
-            </a:r>
-            <a:r>
-              <a:rPr sz="1350" b="0">
-                <a:solidFill>
-                  <a:srgbClr val="1A242B"/>
-                </a:solidFill>
-                <a:latin typeface="Calibri"/>
-              </a:rPr>
-              <a:t>Resposta do engenheiro ≤ 48h registada</a:t>
-            </a:r>
-          </a:p>
-          <a:p>
-            <a:pPr algn="l">
-              <a:lnSpc>
-                <a:spcPct val="105000"/>
-              </a:lnSpc>
-              <a:spcAft>
-                <a:spcPts val="1000"/>
-              </a:spcAft>
-            </a:pPr>
-            <a:r>
-              <a:rPr sz="1350" b="1">
-                <a:solidFill>
-                  <a:srgbClr val="128C7E"/>
-                </a:solidFill>
-                <a:latin typeface="Calibri"/>
-              </a:rPr>
-              <a:t>•  </a:t>
-            </a:r>
-            <a:r>
-              <a:rPr sz="1350" b="0">
-                <a:solidFill>
-                  <a:srgbClr val="1A242B"/>
-                </a:solidFill>
-                <a:latin typeface="Calibri"/>
-              </a:rPr>
-              <a:t>Poupança em €/ano validada pela equipa de processo</a:t>
-            </a:r>
-          </a:p>
-        </p:txBody>
-      </p:sp>
-      <p:sp>
-        <p:nvSpPr>
-          <p:cNvPr id="13" name="TextBox 12"/>
+              <a:t>TerraCircular + BioShield já  →  Porcelana Vegan como gancho na Vista Alegre  →  ChromaSafe e DuraGlaze sobre a base Eco-Low-Fire.</a:t>
+            </a:r>
+          </a:p>
+        </p:txBody>
+      </p:sp>
+      <p:sp>
+        <p:nvSpPr>
+          <p:cNvPr id="43" name="TextBox 42"/>
           <p:cNvSpPr txBox="1"/>
           <p:nvPr/>
         </p:nvSpPr>
@@ -14569,7 +18375,7 @@
       </p:sp>
       <p:sp>
         <p:nvSpPr>
-          <p:cNvPr id="14" name="TextBox 13"/>
+          <p:cNvPr id="44" name="TextBox 43"/>
           <p:cNvSpPr txBox="1"/>
           <p:nvPr/>
         </p:nvSpPr>
